--- a/hestodb/data/test/HESTO-202612_Report_24-HTIDS24_Smith-rev3.pptx
+++ b/hestodb/data/test/HESTO-202612_Report_24-HTIDS24_Smith-rev3.pptx
@@ -5,7 +5,7 @@
     <p:sldMasterId id="2147483648" r:id="rId4"/>
   </p:sldMasterIdLst>
   <p:notesMasterIdLst>
-    <p:notesMasterId r:id="rId38"/>
+    <p:notesMasterId r:id="rId39"/>
   </p:notesMasterIdLst>
   <p:sldIdLst>
     <p:sldId id="262" r:id="rId5"/>
@@ -21,26 +21,27 @@
     <p:sldId id="267" r:id="rId15"/>
     <p:sldId id="268" r:id="rId16"/>
     <p:sldId id="269" r:id="rId17"/>
-    <p:sldId id="270" r:id="rId18"/>
-    <p:sldId id="271" r:id="rId19"/>
-    <p:sldId id="291" r:id="rId20"/>
-    <p:sldId id="272" r:id="rId21"/>
-    <p:sldId id="295" r:id="rId22"/>
-    <p:sldId id="297" r:id="rId23"/>
-    <p:sldId id="273" r:id="rId24"/>
-    <p:sldId id="274" r:id="rId25"/>
-    <p:sldId id="286" r:id="rId26"/>
-    <p:sldId id="276" r:id="rId27"/>
-    <p:sldId id="293" r:id="rId28"/>
-    <p:sldId id="277" r:id="rId29"/>
-    <p:sldId id="287" r:id="rId30"/>
-    <p:sldId id="288" r:id="rId31"/>
-    <p:sldId id="289" r:id="rId32"/>
-    <p:sldId id="280" r:id="rId33"/>
-    <p:sldId id="281" r:id="rId34"/>
-    <p:sldId id="282" r:id="rId35"/>
-    <p:sldId id="283" r:id="rId36"/>
-    <p:sldId id="257" r:id="rId37"/>
+    <p:sldId id="298" r:id="rId18"/>
+    <p:sldId id="270" r:id="rId19"/>
+    <p:sldId id="271" r:id="rId20"/>
+    <p:sldId id="291" r:id="rId21"/>
+    <p:sldId id="272" r:id="rId22"/>
+    <p:sldId id="295" r:id="rId23"/>
+    <p:sldId id="297" r:id="rId24"/>
+    <p:sldId id="273" r:id="rId25"/>
+    <p:sldId id="274" r:id="rId26"/>
+    <p:sldId id="286" r:id="rId27"/>
+    <p:sldId id="276" r:id="rId28"/>
+    <p:sldId id="293" r:id="rId29"/>
+    <p:sldId id="277" r:id="rId30"/>
+    <p:sldId id="287" r:id="rId31"/>
+    <p:sldId id="288" r:id="rId32"/>
+    <p:sldId id="289" r:id="rId33"/>
+    <p:sldId id="280" r:id="rId34"/>
+    <p:sldId id="281" r:id="rId35"/>
+    <p:sldId id="282" r:id="rId36"/>
+    <p:sldId id="283" r:id="rId37"/>
+    <p:sldId id="257" r:id="rId38"/>
   </p:sldIdLst>
   <p:sldSz cx="12192000" cy="6858000"/>
   <p:notesSz cx="6858000" cy="9144000"/>
@@ -237,7 +238,7 @@
           <a:p>
             <a:fld id="{967C348A-65EE-2346-B875-14163D95B043}" type="datetimeFigureOut">
               <a:rPr lang="en-US" smtClean="0"/>
-              <a:t>6/2/2026</a:t>
+              <a:t>6/30/2026</a:t>
             </a:fld>
             <a:endParaRPr lang="en-US"/>
           </a:p>
@@ -681,7 +682,7 @@
           <a:p>
             <a:fld id="{BAF3AD8F-0C6C-1745-954D-84FC5BD779C3}" type="datetime1">
               <a:rPr lang="en-US" smtClean="0"/>
-              <a:t>6/2/2026</a:t>
+              <a:t>6/30/2026</a:t>
             </a:fld>
             <a:endParaRPr lang="en-US"/>
           </a:p>
@@ -857,7 +858,7 @@
           <a:p>
             <a:fld id="{3CBDC1F2-9447-8148-8F1E-69CE8F492350}" type="datetime1">
               <a:rPr lang="en-US" smtClean="0"/>
-              <a:t>6/2/2026</a:t>
+              <a:t>6/30/2026</a:t>
             </a:fld>
             <a:endParaRPr lang="en-US"/>
           </a:p>
@@ -1137,7 +1138,7 @@
           <a:p>
             <a:fld id="{DE0D5D48-76E5-8347-ABDB-5FD7936B4587}" type="datetime1">
               <a:rPr lang="en-US" smtClean="0"/>
-              <a:t>6/2/2026</a:t>
+              <a:t>6/30/2026</a:t>
             </a:fld>
             <a:endParaRPr lang="en-US"/>
           </a:p>
@@ -1318,7 +1319,7 @@
           <a:p>
             <a:fld id="{ED39A409-8F63-B04A-8625-2E6E4F6AB17F}" type="datetime1">
               <a:rPr lang="en-US" smtClean="0"/>
-              <a:t>6/2/2026</a:t>
+              <a:t>6/30/2026</a:t>
             </a:fld>
             <a:endParaRPr lang="en-US"/>
           </a:p>
@@ -1471,7 +1472,7 @@
           <a:p>
             <a:fld id="{C6EDE133-48EC-254D-9865-A7A660CAACE9}" type="datetime1">
               <a:rPr lang="en-US" smtClean="0"/>
-              <a:t>6/2/2026</a:t>
+              <a:t>6/30/2026</a:t>
             </a:fld>
             <a:endParaRPr lang="en-US"/>
           </a:p>
@@ -1742,7 +1743,7 @@
           <a:p>
             <a:fld id="{B7AE25AD-F9AD-244B-BC9A-4E98246A4942}" type="datetime1">
               <a:rPr lang="en-US" smtClean="0"/>
-              <a:t>6/2/2026</a:t>
+              <a:t>6/30/2026</a:t>
             </a:fld>
             <a:endParaRPr lang="en-US"/>
           </a:p>
@@ -4257,10 +4258,10 @@
           <a:lstStyle/>
           <a:p>
             <a:r>
-              <a:rPr lang="en-US" sz="3600"/>
-              <a:t>Student Metrics and Support</a:t>
+              <a:rPr lang="en-US" sz="3600" dirty="0"/>
+              <a:t>Student Metrics</a:t>
             </a:r>
-            <a:endParaRPr lang="en-US" sz="2400"/>
+            <a:endParaRPr lang="en-US" sz="2400" dirty="0"/>
           </a:p>
         </p:txBody>
       </p:sp>
@@ -4538,10 +4539,2239 @@
       </p:sp>
       <p:sp>
         <p:nvSpPr>
+          <p:cNvPr id="6" name="Slide Number Placeholder 5">
+            <a:extLst>
+              <a:ext uri="{FF2B5EF4-FFF2-40B4-BE49-F238E27FC236}">
+                <a16:creationId xmlns:a16="http://schemas.microsoft.com/office/drawing/2014/main" id="{2D2F8CF1-4FEB-55E6-7228-872037C533AE}"/>
+              </a:ext>
+            </a:extLst>
+          </p:cNvPr>
+          <p:cNvSpPr>
+            <a:spLocks noGrp="1"/>
+          </p:cNvSpPr>
+          <p:nvPr>
+            <p:ph type="sldNum" sz="quarter" idx="12"/>
+          </p:nvPr>
+        </p:nvSpPr>
+        <p:spPr/>
+        <p:txBody>
+          <a:bodyPr/>
+          <a:lstStyle/>
+          <a:p>
+            <a:fld id="{88E0E29E-E225-F048-A964-380D52CA58AC}" type="slidenum">
+              <a:rPr lang="en-US" smtClean="0"/>
+              <a:t>13</a:t>
+            </a:fld>
+            <a:endParaRPr lang="en-US"/>
+          </a:p>
+        </p:txBody>
+      </p:sp>
+      <p:graphicFrame>
+        <p:nvGraphicFramePr>
+          <p:cNvPr id="3" name="Table 2">
+            <a:extLst>
+              <a:ext uri="{FF2B5EF4-FFF2-40B4-BE49-F238E27FC236}">
+                <a16:creationId xmlns:a16="http://schemas.microsoft.com/office/drawing/2014/main" id="{E58A4940-6014-DF40-5DE5-5C9C39AA2223}"/>
+              </a:ext>
+            </a:extLst>
+          </p:cNvPr>
+          <p:cNvGraphicFramePr>
+            <a:graphicFrameLocks noGrp="1"/>
+          </p:cNvGraphicFramePr>
+          <p:nvPr>
+            <p:extLst>
+              <p:ext uri="{D42A27DB-BD31-4B8C-83A1-F6EECF244321}">
+                <p14:modId xmlns:p14="http://schemas.microsoft.com/office/powerpoint/2010/main" val="4158225514"/>
+              </p:ext>
+            </p:extLst>
+          </p:nvPr>
+        </p:nvGraphicFramePr>
+        <p:xfrm>
+          <a:off x="401781" y="2592765"/>
+          <a:ext cx="10515600" cy="1761490"/>
+        </p:xfrm>
+        <a:graphic>
+          <a:graphicData uri="http://schemas.openxmlformats.org/drawingml/2006/table">
+            <a:tbl>
+              <a:tblPr firstRow="1" firstCol="1" bandRow="1"/>
+              <a:tblGrid>
+                <a:gridCol w="2667231">
+                  <a:extLst>
+                    <a:ext uri="{9D8B030D-6E8A-4147-A177-3AD203B41FA5}">
+                      <a16:colId xmlns:a16="http://schemas.microsoft.com/office/drawing/2014/main" val="1666455828"/>
+                    </a:ext>
+                  </a:extLst>
+                </a:gridCol>
+                <a:gridCol w="2654455">
+                  <a:extLst>
+                    <a:ext uri="{9D8B030D-6E8A-4147-A177-3AD203B41FA5}">
+                      <a16:colId xmlns:a16="http://schemas.microsoft.com/office/drawing/2014/main" val="4024254451"/>
+                    </a:ext>
+                  </a:extLst>
+                </a:gridCol>
+                <a:gridCol w="2536265">
+                  <a:extLst>
+                    <a:ext uri="{9D8B030D-6E8A-4147-A177-3AD203B41FA5}">
+                      <a16:colId xmlns:a16="http://schemas.microsoft.com/office/drawing/2014/main" val="1475550422"/>
+                    </a:ext>
+                  </a:extLst>
+                </a:gridCol>
+                <a:gridCol w="2657649">
+                  <a:extLst>
+                    <a:ext uri="{9D8B030D-6E8A-4147-A177-3AD203B41FA5}">
+                      <a16:colId xmlns:a16="http://schemas.microsoft.com/office/drawing/2014/main" val="918896136"/>
+                    </a:ext>
+                  </a:extLst>
+                </a:gridCol>
+              </a:tblGrid>
+              <a:tr h="0">
+                <a:tc>
+                  <a:txBody>
+                    <a:bodyPr/>
+                    <a:lstStyle/>
+                    <a:p>
+                      <a:pPr marL="0" marR="0">
+                        <a:lnSpc>
+                          <a:spcPct val="115000"/>
+                        </a:lnSpc>
+                        <a:buNone/>
+                      </a:pPr>
+                      <a:r>
+                        <a:rPr lang="en-US" sz="1400" kern="100">
+                          <a:solidFill>
+                            <a:srgbClr val="000000"/>
+                          </a:solidFill>
+                          <a:effectLst/>
+                          <a:latin typeface="Aptos"/>
+                          <a:ea typeface="Aptos" panose="020B0004020202020204" pitchFamily="34" charset="0"/>
+                          <a:cs typeface="Aptos" panose="020B0004020202020204" pitchFamily="34" charset="0"/>
+                        </a:rPr>
+                        <a:t>Student Name (first last)</a:t>
+                      </a:r>
+                      <a:endParaRPr lang="en-US" sz="1400" kern="100">
+                        <a:effectLst/>
+                        <a:latin typeface="Aptos" panose="020B0004020202020204" pitchFamily="34" charset="0"/>
+                        <a:ea typeface="Aptos" panose="020B0004020202020204" pitchFamily="34" charset="0"/>
+                        <a:cs typeface="Aptos" panose="020B0004020202020204" pitchFamily="34" charset="0"/>
+                      </a:endParaRPr>
+                    </a:p>
+                  </a:txBody>
+                  <a:tcPr marL="68580" marR="68580" marT="0" marB="0">
+                    <a:lnL w="12700" cap="flat" cmpd="sng" algn="ctr">
+                      <a:solidFill>
+                        <a:schemeClr val="tx1"/>
+                      </a:solidFill>
+                      <a:prstDash val="solid"/>
+                      <a:round/>
+                      <a:headEnd type="none" w="med" len="med"/>
+                      <a:tailEnd type="none" w="med" len="med"/>
+                    </a:lnL>
+                    <a:lnR w="12700" cap="flat" cmpd="sng" algn="ctr">
+                      <a:solidFill>
+                        <a:schemeClr val="tx1"/>
+                      </a:solidFill>
+                      <a:prstDash val="solid"/>
+                      <a:round/>
+                      <a:headEnd type="none" w="med" len="med"/>
+                      <a:tailEnd type="none" w="med" len="med"/>
+                    </a:lnR>
+                    <a:lnT w="12700" cap="flat" cmpd="sng" algn="ctr">
+                      <a:solidFill>
+                        <a:schemeClr val="tx1"/>
+                      </a:solidFill>
+                      <a:prstDash val="solid"/>
+                      <a:round/>
+                      <a:headEnd type="none" w="med" len="med"/>
+                      <a:tailEnd type="none" w="med" len="med"/>
+                    </a:lnT>
+                    <a:lnB w="12700" cap="flat" cmpd="sng" algn="ctr">
+                      <a:solidFill>
+                        <a:schemeClr val="tx1"/>
+                      </a:solidFill>
+                      <a:prstDash val="solid"/>
+                      <a:round/>
+                      <a:headEnd type="none" w="med" len="med"/>
+                      <a:tailEnd type="none" w="med" len="med"/>
+                    </a:lnB>
+                    <a:solidFill>
+                      <a:srgbClr val="E8E8E8"/>
+                    </a:solidFill>
+                  </a:tcPr>
+                </a:tc>
+                <a:tc>
+                  <a:txBody>
+                    <a:bodyPr/>
+                    <a:lstStyle/>
+                    <a:p>
+                      <a:pPr marL="0" marR="0">
+                        <a:lnSpc>
+                          <a:spcPct val="115000"/>
+                        </a:lnSpc>
+                        <a:buNone/>
+                      </a:pPr>
+                      <a:r>
+                        <a:rPr lang="en-US" sz="1400" kern="100">
+                          <a:solidFill>
+                            <a:srgbClr val="000000"/>
+                          </a:solidFill>
+                          <a:effectLst/>
+                          <a:latin typeface="Aptos" panose="020B0004020202020204" pitchFamily="34" charset="0"/>
+                          <a:ea typeface="Aptos" panose="020B0004020202020204" pitchFamily="34" charset="0"/>
+                          <a:cs typeface="Aptos" panose="020B0004020202020204" pitchFamily="34" charset="0"/>
+                        </a:rPr>
+                        <a:t>Major</a:t>
+                      </a:r>
+                      <a:endParaRPr lang="en-US" sz="1400" kern="100">
+                        <a:effectLst/>
+                        <a:latin typeface="Aptos" panose="020B0004020202020204" pitchFamily="34" charset="0"/>
+                        <a:ea typeface="Aptos" panose="020B0004020202020204" pitchFamily="34" charset="0"/>
+                        <a:cs typeface="Aptos" panose="020B0004020202020204" pitchFamily="34" charset="0"/>
+                      </a:endParaRPr>
+                    </a:p>
+                  </a:txBody>
+                  <a:tcPr marL="0" marR="0" marT="0" marB="0">
+                    <a:lnL w="12700" cap="flat" cmpd="sng" algn="ctr">
+                      <a:solidFill>
+                        <a:schemeClr val="tx1"/>
+                      </a:solidFill>
+                      <a:prstDash val="solid"/>
+                      <a:round/>
+                      <a:headEnd type="none" w="med" len="med"/>
+                      <a:tailEnd type="none" w="med" len="med"/>
+                    </a:lnL>
+                    <a:lnR w="12700" cap="flat" cmpd="sng" algn="ctr">
+                      <a:solidFill>
+                        <a:schemeClr val="tx1"/>
+                      </a:solidFill>
+                      <a:prstDash val="solid"/>
+                      <a:round/>
+                      <a:headEnd type="none" w="med" len="med"/>
+                      <a:tailEnd type="none" w="med" len="med"/>
+                    </a:lnR>
+                    <a:lnT w="12700" cap="flat" cmpd="sng" algn="ctr">
+                      <a:solidFill>
+                        <a:schemeClr val="tx1"/>
+                      </a:solidFill>
+                      <a:prstDash val="solid"/>
+                      <a:round/>
+                      <a:headEnd type="none" w="med" len="med"/>
+                      <a:tailEnd type="none" w="med" len="med"/>
+                    </a:lnT>
+                    <a:lnB w="12700" cap="flat" cmpd="sng" algn="ctr">
+                      <a:solidFill>
+                        <a:schemeClr val="tx1"/>
+                      </a:solidFill>
+                      <a:prstDash val="solid"/>
+                      <a:round/>
+                      <a:headEnd type="none" w="med" len="med"/>
+                      <a:tailEnd type="none" w="med" len="med"/>
+                    </a:lnB>
+                    <a:solidFill>
+                      <a:srgbClr val="E8E8E8"/>
+                    </a:solidFill>
+                  </a:tcPr>
+                </a:tc>
+                <a:tc>
+                  <a:txBody>
+                    <a:bodyPr/>
+                    <a:lstStyle/>
+                    <a:p>
+                      <a:pPr marL="0" marR="0">
+                        <a:lnSpc>
+                          <a:spcPct val="115000"/>
+                        </a:lnSpc>
+                        <a:buNone/>
+                      </a:pPr>
+                      <a:r>
+                        <a:rPr lang="en-US" sz="1400" kern="100">
+                          <a:solidFill>
+                            <a:srgbClr val="000000"/>
+                          </a:solidFill>
+                          <a:effectLst/>
+                          <a:latin typeface="Aptos" panose="020B0004020202020204" pitchFamily="34" charset="0"/>
+                          <a:ea typeface="Aptos" panose="020B0004020202020204" pitchFamily="34" charset="0"/>
+                          <a:cs typeface="Aptos" panose="020B0004020202020204" pitchFamily="34" charset="0"/>
+                        </a:rPr>
+                        <a:t>Affiliation (School, University, etc.)</a:t>
+                      </a:r>
+                      <a:endParaRPr lang="en-US" sz="1400" kern="100">
+                        <a:effectLst/>
+                        <a:latin typeface="Aptos" panose="020B0004020202020204" pitchFamily="34" charset="0"/>
+                        <a:ea typeface="Aptos" panose="020B0004020202020204" pitchFamily="34" charset="0"/>
+                        <a:cs typeface="Aptos" panose="020B0004020202020204" pitchFamily="34" charset="0"/>
+                      </a:endParaRPr>
+                    </a:p>
+                  </a:txBody>
+                  <a:tcPr marL="68580" marR="68580" marT="0" marB="0">
+                    <a:lnL w="12700" cap="flat" cmpd="sng" algn="ctr">
+                      <a:solidFill>
+                        <a:schemeClr val="tx1"/>
+                      </a:solidFill>
+                      <a:prstDash val="solid"/>
+                      <a:round/>
+                      <a:headEnd type="none" w="med" len="med"/>
+                      <a:tailEnd type="none" w="med" len="med"/>
+                    </a:lnL>
+                    <a:lnR w="12700" cap="flat" cmpd="sng" algn="ctr">
+                      <a:solidFill>
+                        <a:schemeClr val="tx1"/>
+                      </a:solidFill>
+                      <a:prstDash val="solid"/>
+                      <a:round/>
+                      <a:headEnd type="none" w="med" len="med"/>
+                      <a:tailEnd type="none" w="med" len="med"/>
+                    </a:lnR>
+                    <a:lnT w="12700" cap="flat" cmpd="sng" algn="ctr">
+                      <a:solidFill>
+                        <a:schemeClr val="tx1"/>
+                      </a:solidFill>
+                      <a:prstDash val="solid"/>
+                      <a:round/>
+                      <a:headEnd type="none" w="med" len="med"/>
+                      <a:tailEnd type="none" w="med" len="med"/>
+                    </a:lnT>
+                    <a:lnB w="12700" cap="flat" cmpd="sng" algn="ctr">
+                      <a:solidFill>
+                        <a:schemeClr val="tx1"/>
+                      </a:solidFill>
+                      <a:prstDash val="solid"/>
+                      <a:round/>
+                      <a:headEnd type="none" w="med" len="med"/>
+                      <a:tailEnd type="none" w="med" len="med"/>
+                    </a:lnB>
+                    <a:solidFill>
+                      <a:srgbClr val="E8E8E8"/>
+                    </a:solidFill>
+                  </a:tcPr>
+                </a:tc>
+                <a:tc>
+                  <a:txBody>
+                    <a:bodyPr/>
+                    <a:lstStyle/>
+                    <a:p>
+                      <a:pPr marL="0" marR="0">
+                        <a:lnSpc>
+                          <a:spcPct val="115000"/>
+                        </a:lnSpc>
+                        <a:buNone/>
+                      </a:pPr>
+                      <a:r>
+                        <a:rPr lang="en-US" sz="1400" kern="100">
+                          <a:solidFill>
+                            <a:srgbClr val="000000"/>
+                          </a:solidFill>
+                          <a:effectLst/>
+                          <a:latin typeface="Aptos" panose="020B0004020202020204" pitchFamily="34" charset="0"/>
+                          <a:ea typeface="Aptos" panose="020B0004020202020204" pitchFamily="34" charset="0"/>
+                          <a:cs typeface="Aptos" panose="020B0004020202020204" pitchFamily="34" charset="0"/>
+                        </a:rPr>
+                        <a:t>Level (High School, Undergrad, Grad, PhD)</a:t>
+                      </a:r>
+                      <a:endParaRPr lang="en-US" sz="1400" kern="100">
+                        <a:effectLst/>
+                        <a:latin typeface="Aptos" panose="020B0004020202020204" pitchFamily="34" charset="0"/>
+                        <a:ea typeface="Aptos" panose="020B0004020202020204" pitchFamily="34" charset="0"/>
+                        <a:cs typeface="Aptos" panose="020B0004020202020204" pitchFamily="34" charset="0"/>
+                      </a:endParaRPr>
+                    </a:p>
+                  </a:txBody>
+                  <a:tcPr marL="68580" marR="68580" marT="0" marB="0">
+                    <a:lnL w="12700" cap="flat" cmpd="sng" algn="ctr">
+                      <a:solidFill>
+                        <a:schemeClr val="tx1"/>
+                      </a:solidFill>
+                      <a:prstDash val="solid"/>
+                      <a:round/>
+                      <a:headEnd type="none" w="med" len="med"/>
+                      <a:tailEnd type="none" w="med" len="med"/>
+                    </a:lnL>
+                    <a:lnR w="12700" cap="flat" cmpd="sng" algn="ctr">
+                      <a:solidFill>
+                        <a:schemeClr val="tx1"/>
+                      </a:solidFill>
+                      <a:prstDash val="solid"/>
+                      <a:round/>
+                      <a:headEnd type="none" w="med" len="med"/>
+                      <a:tailEnd type="none" w="med" len="med"/>
+                    </a:lnR>
+                    <a:lnT w="12700" cap="flat" cmpd="sng" algn="ctr">
+                      <a:solidFill>
+                        <a:schemeClr val="tx1"/>
+                      </a:solidFill>
+                      <a:prstDash val="solid"/>
+                      <a:round/>
+                      <a:headEnd type="none" w="med" len="med"/>
+                      <a:tailEnd type="none" w="med" len="med"/>
+                    </a:lnT>
+                    <a:lnB w="12700" cap="flat" cmpd="sng" algn="ctr">
+                      <a:solidFill>
+                        <a:schemeClr val="tx1"/>
+                      </a:solidFill>
+                      <a:prstDash val="solid"/>
+                      <a:round/>
+                      <a:headEnd type="none" w="med" len="med"/>
+                      <a:tailEnd type="none" w="med" len="med"/>
+                    </a:lnB>
+                    <a:solidFill>
+                      <a:srgbClr val="E8E8E8"/>
+                    </a:solidFill>
+                  </a:tcPr>
+                </a:tc>
+                <a:extLst>
+                  <a:ext uri="{0D108BD9-81ED-4DB2-BD59-A6C34878D82A}">
+                    <a16:rowId xmlns:a16="http://schemas.microsoft.com/office/drawing/2014/main" val="2818315040"/>
+                  </a:ext>
+                </a:extLst>
+              </a:tr>
+              <a:tr h="0">
+                <a:tc>
+                  <a:txBody>
+                    <a:bodyPr/>
+                    <a:lstStyle/>
+                    <a:p>
+                      <a:pPr marL="0" marR="0">
+                        <a:lnSpc>
+                          <a:spcPct val="115000"/>
+                        </a:lnSpc>
+                        <a:buNone/>
+                      </a:pPr>
+                      <a:r>
+                        <a:rPr lang="en-US" sz="1100" kern="100" dirty="0">
+                          <a:effectLst/>
+                          <a:latin typeface="Aptos" panose="020B0004020202020204" pitchFamily="34" charset="0"/>
+                          <a:ea typeface="Aptos" panose="020B0004020202020204" pitchFamily="34" charset="0"/>
+                          <a:cs typeface="Aptos" panose="020B0004020202020204" pitchFamily="34" charset="0"/>
+                        </a:rPr>
+                        <a:t>John Doe</a:t>
+                      </a:r>
+                    </a:p>
+                  </a:txBody>
+                  <a:tcPr marL="68580" marR="68580" marT="0" marB="0">
+                    <a:lnL w="12700" cap="flat" cmpd="sng" algn="ctr">
+                      <a:solidFill>
+                        <a:schemeClr val="tx1"/>
+                      </a:solidFill>
+                      <a:prstDash val="solid"/>
+                      <a:round/>
+                      <a:headEnd type="none" w="med" len="med"/>
+                      <a:tailEnd type="none" w="med" len="med"/>
+                    </a:lnL>
+                    <a:lnR w="12700" cap="flat" cmpd="sng" algn="ctr">
+                      <a:solidFill>
+                        <a:schemeClr val="tx1"/>
+                      </a:solidFill>
+                      <a:prstDash val="solid"/>
+                      <a:round/>
+                      <a:headEnd type="none" w="med" len="med"/>
+                      <a:tailEnd type="none" w="med" len="med"/>
+                    </a:lnR>
+                    <a:lnT w="12700" cap="flat" cmpd="sng" algn="ctr">
+                      <a:solidFill>
+                        <a:schemeClr val="tx1"/>
+                      </a:solidFill>
+                      <a:prstDash val="solid"/>
+                      <a:round/>
+                      <a:headEnd type="none" w="med" len="med"/>
+                      <a:tailEnd type="none" w="med" len="med"/>
+                    </a:lnT>
+                    <a:lnB w="12700" cap="flat" cmpd="sng" algn="ctr">
+                      <a:solidFill>
+                        <a:schemeClr val="tx1"/>
+                      </a:solidFill>
+                      <a:prstDash val="solid"/>
+                      <a:round/>
+                      <a:headEnd type="none" w="med" len="med"/>
+                      <a:tailEnd type="none" w="med" len="med"/>
+                    </a:lnB>
+                    <a:noFill/>
+                  </a:tcPr>
+                </a:tc>
+                <a:tc>
+                  <a:txBody>
+                    <a:bodyPr/>
+                    <a:lstStyle/>
+                    <a:p>
+                      <a:pPr marL="0" marR="0">
+                        <a:lnSpc>
+                          <a:spcPct val="115000"/>
+                        </a:lnSpc>
+                        <a:buNone/>
+                      </a:pPr>
+                      <a:r>
+                        <a:rPr lang="en-US" sz="1100" kern="100" dirty="0">
+                          <a:effectLst/>
+                          <a:latin typeface="Aptos" panose="020B0004020202020204" pitchFamily="34" charset="0"/>
+                          <a:ea typeface="Aptos" panose="020B0004020202020204" pitchFamily="34" charset="0"/>
+                          <a:cs typeface="Aptos" panose="020B0004020202020204" pitchFamily="34" charset="0"/>
+                        </a:rPr>
+                        <a:t>Physics</a:t>
+                      </a:r>
+                    </a:p>
+                  </a:txBody>
+                  <a:tcPr marL="0" marR="0" marT="0" marB="0">
+                    <a:lnL w="12700" cap="flat" cmpd="sng" algn="ctr">
+                      <a:solidFill>
+                        <a:schemeClr val="tx1"/>
+                      </a:solidFill>
+                      <a:prstDash val="solid"/>
+                      <a:round/>
+                      <a:headEnd type="none" w="med" len="med"/>
+                      <a:tailEnd type="none" w="med" len="med"/>
+                    </a:lnL>
+                    <a:lnR w="12700" cap="flat" cmpd="sng" algn="ctr">
+                      <a:solidFill>
+                        <a:schemeClr val="tx1"/>
+                      </a:solidFill>
+                      <a:prstDash val="solid"/>
+                      <a:round/>
+                      <a:headEnd type="none" w="med" len="med"/>
+                      <a:tailEnd type="none" w="med" len="med"/>
+                    </a:lnR>
+                    <a:lnT w="12700" cap="flat" cmpd="sng" algn="ctr">
+                      <a:solidFill>
+                        <a:schemeClr val="tx1"/>
+                      </a:solidFill>
+                      <a:prstDash val="solid"/>
+                      <a:round/>
+                      <a:headEnd type="none" w="med" len="med"/>
+                      <a:tailEnd type="none" w="med" len="med"/>
+                    </a:lnT>
+                    <a:lnB w="12700" cap="flat" cmpd="sng" algn="ctr">
+                      <a:solidFill>
+                        <a:schemeClr val="tx1"/>
+                      </a:solidFill>
+                      <a:prstDash val="solid"/>
+                      <a:round/>
+                      <a:headEnd type="none" w="med" len="med"/>
+                      <a:tailEnd type="none" w="med" len="med"/>
+                    </a:lnB>
+                    <a:noFill/>
+                  </a:tcPr>
+                </a:tc>
+                <a:tc>
+                  <a:txBody>
+                    <a:bodyPr/>
+                    <a:lstStyle/>
+                    <a:p>
+                      <a:pPr marL="0" marR="0">
+                        <a:lnSpc>
+                          <a:spcPct val="115000"/>
+                        </a:lnSpc>
+                        <a:buNone/>
+                      </a:pPr>
+                      <a:r>
+                        <a:rPr lang="en-US" sz="1100" kern="100" dirty="0">
+                          <a:effectLst/>
+                          <a:latin typeface="Aptos" panose="020B0004020202020204" pitchFamily="34" charset="0"/>
+                          <a:ea typeface="Aptos" panose="020B0004020202020204" pitchFamily="34" charset="0"/>
+                          <a:cs typeface="Aptos" panose="020B0004020202020204" pitchFamily="34" charset="0"/>
+                        </a:rPr>
+                        <a:t>University of Alabama</a:t>
+                      </a:r>
+                    </a:p>
+                  </a:txBody>
+                  <a:tcPr marL="68580" marR="68580" marT="0" marB="0">
+                    <a:lnL w="12700" cap="flat" cmpd="sng" algn="ctr">
+                      <a:solidFill>
+                        <a:schemeClr val="tx1"/>
+                      </a:solidFill>
+                      <a:prstDash val="solid"/>
+                      <a:round/>
+                      <a:headEnd type="none" w="med" len="med"/>
+                      <a:tailEnd type="none" w="med" len="med"/>
+                    </a:lnL>
+                    <a:lnR w="12700" cap="flat" cmpd="sng" algn="ctr">
+                      <a:solidFill>
+                        <a:schemeClr val="tx1"/>
+                      </a:solidFill>
+                      <a:prstDash val="solid"/>
+                      <a:round/>
+                      <a:headEnd type="none" w="med" len="med"/>
+                      <a:tailEnd type="none" w="med" len="med"/>
+                    </a:lnR>
+                    <a:lnT w="12700" cap="flat" cmpd="sng" algn="ctr">
+                      <a:solidFill>
+                        <a:schemeClr val="tx1"/>
+                      </a:solidFill>
+                      <a:prstDash val="solid"/>
+                      <a:round/>
+                      <a:headEnd type="none" w="med" len="med"/>
+                      <a:tailEnd type="none" w="med" len="med"/>
+                    </a:lnT>
+                    <a:lnB w="12700" cap="flat" cmpd="sng" algn="ctr">
+                      <a:solidFill>
+                        <a:schemeClr val="tx1"/>
+                      </a:solidFill>
+                      <a:prstDash val="solid"/>
+                      <a:round/>
+                      <a:headEnd type="none" w="med" len="med"/>
+                      <a:tailEnd type="none" w="med" len="med"/>
+                    </a:lnB>
+                    <a:noFill/>
+                  </a:tcPr>
+                </a:tc>
+                <a:tc>
+                  <a:txBody>
+                    <a:bodyPr/>
+                    <a:lstStyle/>
+                    <a:p>
+                      <a:pPr marL="0" marR="0">
+                        <a:lnSpc>
+                          <a:spcPct val="115000"/>
+                        </a:lnSpc>
+                        <a:buNone/>
+                      </a:pPr>
+                      <a:r>
+                        <a:rPr lang="en-US" sz="1100" kern="100" dirty="0">
+                          <a:effectLst/>
+                          <a:latin typeface="Aptos" panose="020B0004020202020204" pitchFamily="34" charset="0"/>
+                          <a:ea typeface="Aptos" panose="020B0004020202020204" pitchFamily="34" charset="0"/>
+                          <a:cs typeface="Aptos" panose="020B0004020202020204" pitchFamily="34" charset="0"/>
+                        </a:rPr>
+                        <a:t>Undergrad</a:t>
+                      </a:r>
+                    </a:p>
+                  </a:txBody>
+                  <a:tcPr marL="68580" marR="68580" marT="0" marB="0">
+                    <a:lnL w="12700" cap="flat" cmpd="sng" algn="ctr">
+                      <a:solidFill>
+                        <a:schemeClr val="tx1"/>
+                      </a:solidFill>
+                      <a:prstDash val="solid"/>
+                      <a:round/>
+                      <a:headEnd type="none" w="med" len="med"/>
+                      <a:tailEnd type="none" w="med" len="med"/>
+                    </a:lnL>
+                    <a:lnR w="12700" cap="flat" cmpd="sng" algn="ctr">
+                      <a:solidFill>
+                        <a:schemeClr val="tx1"/>
+                      </a:solidFill>
+                      <a:prstDash val="solid"/>
+                      <a:round/>
+                      <a:headEnd type="none" w="med" len="med"/>
+                      <a:tailEnd type="none" w="med" len="med"/>
+                    </a:lnR>
+                    <a:lnT w="12700" cap="flat" cmpd="sng" algn="ctr">
+                      <a:solidFill>
+                        <a:schemeClr val="tx1"/>
+                      </a:solidFill>
+                      <a:prstDash val="solid"/>
+                      <a:round/>
+                      <a:headEnd type="none" w="med" len="med"/>
+                      <a:tailEnd type="none" w="med" len="med"/>
+                    </a:lnT>
+                    <a:lnB w="12700" cap="flat" cmpd="sng" algn="ctr">
+                      <a:solidFill>
+                        <a:schemeClr val="tx1"/>
+                      </a:solidFill>
+                      <a:prstDash val="solid"/>
+                      <a:round/>
+                      <a:headEnd type="none" w="med" len="med"/>
+                      <a:tailEnd type="none" w="med" len="med"/>
+                    </a:lnB>
+                    <a:noFill/>
+                  </a:tcPr>
+                </a:tc>
+                <a:extLst>
+                  <a:ext uri="{0D108BD9-81ED-4DB2-BD59-A6C34878D82A}">
+                    <a16:rowId xmlns:a16="http://schemas.microsoft.com/office/drawing/2014/main" val="3253294115"/>
+                  </a:ext>
+                </a:extLst>
+              </a:tr>
+              <a:tr h="0">
+                <a:tc>
+                  <a:txBody>
+                    <a:bodyPr/>
+                    <a:lstStyle/>
+                    <a:p>
+                      <a:pPr marL="0" marR="0">
+                        <a:lnSpc>
+                          <a:spcPct val="115000"/>
+                        </a:lnSpc>
+                        <a:buNone/>
+                      </a:pPr>
+                      <a:endParaRPr lang="en-US" sz="1100" kern="100" dirty="0">
+                        <a:effectLst/>
+                        <a:latin typeface="Aptos" panose="020B0004020202020204" pitchFamily="34" charset="0"/>
+                        <a:ea typeface="Aptos" panose="020B0004020202020204" pitchFamily="34" charset="0"/>
+                        <a:cs typeface="Aptos" panose="020B0004020202020204" pitchFamily="34" charset="0"/>
+                      </a:endParaRPr>
+                    </a:p>
+                  </a:txBody>
+                  <a:tcPr marL="68580" marR="68580" marT="0" marB="0">
+                    <a:lnL w="12700" cap="flat" cmpd="sng" algn="ctr">
+                      <a:solidFill>
+                        <a:schemeClr val="tx1"/>
+                      </a:solidFill>
+                      <a:prstDash val="solid"/>
+                      <a:round/>
+                      <a:headEnd type="none" w="med" len="med"/>
+                      <a:tailEnd type="none" w="med" len="med"/>
+                    </a:lnL>
+                    <a:lnR w="12700" cap="flat" cmpd="sng" algn="ctr">
+                      <a:solidFill>
+                        <a:schemeClr val="tx1"/>
+                      </a:solidFill>
+                      <a:prstDash val="solid"/>
+                      <a:round/>
+                      <a:headEnd type="none" w="med" len="med"/>
+                      <a:tailEnd type="none" w="med" len="med"/>
+                    </a:lnR>
+                    <a:lnT w="12700" cap="flat" cmpd="sng" algn="ctr">
+                      <a:solidFill>
+                        <a:schemeClr val="tx1"/>
+                      </a:solidFill>
+                      <a:prstDash val="solid"/>
+                      <a:round/>
+                      <a:headEnd type="none" w="med" len="med"/>
+                      <a:tailEnd type="none" w="med" len="med"/>
+                    </a:lnT>
+                    <a:lnB w="12700" cap="flat" cmpd="sng" algn="ctr">
+                      <a:solidFill>
+                        <a:schemeClr val="tx1"/>
+                      </a:solidFill>
+                      <a:prstDash val="solid"/>
+                      <a:round/>
+                      <a:headEnd type="none" w="med" len="med"/>
+                      <a:tailEnd type="none" w="med" len="med"/>
+                    </a:lnB>
+                    <a:noFill/>
+                  </a:tcPr>
+                </a:tc>
+                <a:tc>
+                  <a:txBody>
+                    <a:bodyPr/>
+                    <a:lstStyle/>
+                    <a:p>
+                      <a:pPr marL="0" marR="0">
+                        <a:lnSpc>
+                          <a:spcPct val="115000"/>
+                        </a:lnSpc>
+                        <a:buNone/>
+                      </a:pPr>
+                      <a:endParaRPr lang="en-US" sz="1100" kern="100">
+                        <a:effectLst/>
+                        <a:latin typeface="Aptos" panose="020B0004020202020204" pitchFamily="34" charset="0"/>
+                        <a:ea typeface="Aptos" panose="020B0004020202020204" pitchFamily="34" charset="0"/>
+                        <a:cs typeface="Aptos" panose="020B0004020202020204" pitchFamily="34" charset="0"/>
+                      </a:endParaRPr>
+                    </a:p>
+                  </a:txBody>
+                  <a:tcPr marL="0" marR="0" marT="0" marB="0">
+                    <a:lnL w="12700" cap="flat" cmpd="sng" algn="ctr">
+                      <a:solidFill>
+                        <a:schemeClr val="tx1"/>
+                      </a:solidFill>
+                      <a:prstDash val="solid"/>
+                      <a:round/>
+                      <a:headEnd type="none" w="med" len="med"/>
+                      <a:tailEnd type="none" w="med" len="med"/>
+                    </a:lnL>
+                    <a:lnR w="12700" cap="flat" cmpd="sng" algn="ctr">
+                      <a:solidFill>
+                        <a:schemeClr val="tx1"/>
+                      </a:solidFill>
+                      <a:prstDash val="solid"/>
+                      <a:round/>
+                      <a:headEnd type="none" w="med" len="med"/>
+                      <a:tailEnd type="none" w="med" len="med"/>
+                    </a:lnR>
+                    <a:lnT w="12700" cap="flat" cmpd="sng" algn="ctr">
+                      <a:solidFill>
+                        <a:schemeClr val="tx1"/>
+                      </a:solidFill>
+                      <a:prstDash val="solid"/>
+                      <a:round/>
+                      <a:headEnd type="none" w="med" len="med"/>
+                      <a:tailEnd type="none" w="med" len="med"/>
+                    </a:lnT>
+                    <a:lnB w="12700" cap="flat" cmpd="sng" algn="ctr">
+                      <a:solidFill>
+                        <a:schemeClr val="tx1"/>
+                      </a:solidFill>
+                      <a:prstDash val="solid"/>
+                      <a:round/>
+                      <a:headEnd type="none" w="med" len="med"/>
+                      <a:tailEnd type="none" w="med" len="med"/>
+                    </a:lnB>
+                    <a:noFill/>
+                  </a:tcPr>
+                </a:tc>
+                <a:tc>
+                  <a:txBody>
+                    <a:bodyPr/>
+                    <a:lstStyle/>
+                    <a:p>
+                      <a:pPr marL="0" marR="0">
+                        <a:lnSpc>
+                          <a:spcPct val="115000"/>
+                        </a:lnSpc>
+                        <a:buNone/>
+                      </a:pPr>
+                      <a:endParaRPr lang="en-US" sz="1100" kern="100">
+                        <a:effectLst/>
+                        <a:latin typeface="Aptos" panose="020B0004020202020204" pitchFamily="34" charset="0"/>
+                        <a:ea typeface="Aptos" panose="020B0004020202020204" pitchFamily="34" charset="0"/>
+                        <a:cs typeface="Aptos" panose="020B0004020202020204" pitchFamily="34" charset="0"/>
+                      </a:endParaRPr>
+                    </a:p>
+                  </a:txBody>
+                  <a:tcPr marL="68580" marR="68580" marT="0" marB="0">
+                    <a:lnL w="12700" cap="flat" cmpd="sng" algn="ctr">
+                      <a:solidFill>
+                        <a:schemeClr val="tx1"/>
+                      </a:solidFill>
+                      <a:prstDash val="solid"/>
+                      <a:round/>
+                      <a:headEnd type="none" w="med" len="med"/>
+                      <a:tailEnd type="none" w="med" len="med"/>
+                    </a:lnL>
+                    <a:lnR w="12700" cap="flat" cmpd="sng" algn="ctr">
+                      <a:solidFill>
+                        <a:schemeClr val="tx1"/>
+                      </a:solidFill>
+                      <a:prstDash val="solid"/>
+                      <a:round/>
+                      <a:headEnd type="none" w="med" len="med"/>
+                      <a:tailEnd type="none" w="med" len="med"/>
+                    </a:lnR>
+                    <a:lnT w="12700" cap="flat" cmpd="sng" algn="ctr">
+                      <a:solidFill>
+                        <a:schemeClr val="tx1"/>
+                      </a:solidFill>
+                      <a:prstDash val="solid"/>
+                      <a:round/>
+                      <a:headEnd type="none" w="med" len="med"/>
+                      <a:tailEnd type="none" w="med" len="med"/>
+                    </a:lnT>
+                    <a:lnB w="12700" cap="flat" cmpd="sng" algn="ctr">
+                      <a:solidFill>
+                        <a:schemeClr val="tx1"/>
+                      </a:solidFill>
+                      <a:prstDash val="solid"/>
+                      <a:round/>
+                      <a:headEnd type="none" w="med" len="med"/>
+                      <a:tailEnd type="none" w="med" len="med"/>
+                    </a:lnB>
+                    <a:noFill/>
+                  </a:tcPr>
+                </a:tc>
+                <a:tc>
+                  <a:txBody>
+                    <a:bodyPr/>
+                    <a:lstStyle/>
+                    <a:p>
+                      <a:pPr marL="0" marR="0">
+                        <a:lnSpc>
+                          <a:spcPct val="115000"/>
+                        </a:lnSpc>
+                        <a:buNone/>
+                      </a:pPr>
+                      <a:endParaRPr lang="en-US" sz="1100" kern="100">
+                        <a:effectLst/>
+                        <a:latin typeface="Aptos" panose="020B0004020202020204" pitchFamily="34" charset="0"/>
+                        <a:ea typeface="Aptos" panose="020B0004020202020204" pitchFamily="34" charset="0"/>
+                        <a:cs typeface="Aptos" panose="020B0004020202020204" pitchFamily="34" charset="0"/>
+                      </a:endParaRPr>
+                    </a:p>
+                  </a:txBody>
+                  <a:tcPr marL="68580" marR="68580" marT="0" marB="0">
+                    <a:lnL w="12700" cap="flat" cmpd="sng" algn="ctr">
+                      <a:solidFill>
+                        <a:schemeClr val="tx1"/>
+                      </a:solidFill>
+                      <a:prstDash val="solid"/>
+                      <a:round/>
+                      <a:headEnd type="none" w="med" len="med"/>
+                      <a:tailEnd type="none" w="med" len="med"/>
+                    </a:lnL>
+                    <a:lnR w="12700" cap="flat" cmpd="sng" algn="ctr">
+                      <a:solidFill>
+                        <a:schemeClr val="tx1"/>
+                      </a:solidFill>
+                      <a:prstDash val="solid"/>
+                      <a:round/>
+                      <a:headEnd type="none" w="med" len="med"/>
+                      <a:tailEnd type="none" w="med" len="med"/>
+                    </a:lnR>
+                    <a:lnT w="12700" cap="flat" cmpd="sng" algn="ctr">
+                      <a:solidFill>
+                        <a:schemeClr val="tx1"/>
+                      </a:solidFill>
+                      <a:prstDash val="solid"/>
+                      <a:round/>
+                      <a:headEnd type="none" w="med" len="med"/>
+                      <a:tailEnd type="none" w="med" len="med"/>
+                    </a:lnT>
+                    <a:lnB w="12700" cap="flat" cmpd="sng" algn="ctr">
+                      <a:solidFill>
+                        <a:schemeClr val="tx1"/>
+                      </a:solidFill>
+                      <a:prstDash val="solid"/>
+                      <a:round/>
+                      <a:headEnd type="none" w="med" len="med"/>
+                      <a:tailEnd type="none" w="med" len="med"/>
+                    </a:lnB>
+                    <a:noFill/>
+                  </a:tcPr>
+                </a:tc>
+                <a:extLst>
+                  <a:ext uri="{0D108BD9-81ED-4DB2-BD59-A6C34878D82A}">
+                    <a16:rowId xmlns:a16="http://schemas.microsoft.com/office/drawing/2014/main" val="1375515884"/>
+                  </a:ext>
+                </a:extLst>
+              </a:tr>
+              <a:tr h="0">
+                <a:tc>
+                  <a:txBody>
+                    <a:bodyPr/>
+                    <a:lstStyle/>
+                    <a:p>
+                      <a:pPr marL="0" marR="0">
+                        <a:lnSpc>
+                          <a:spcPct val="115000"/>
+                        </a:lnSpc>
+                        <a:buNone/>
+                      </a:pPr>
+                      <a:endParaRPr lang="en-US" sz="1100" kern="100">
+                        <a:effectLst/>
+                        <a:latin typeface="Aptos" panose="020B0004020202020204" pitchFamily="34" charset="0"/>
+                        <a:ea typeface="Aptos" panose="020B0004020202020204" pitchFamily="34" charset="0"/>
+                        <a:cs typeface="Aptos" panose="020B0004020202020204" pitchFamily="34" charset="0"/>
+                      </a:endParaRPr>
+                    </a:p>
+                  </a:txBody>
+                  <a:tcPr marL="68580" marR="68580" marT="0" marB="0">
+                    <a:lnL w="12700" cap="flat" cmpd="sng" algn="ctr">
+                      <a:solidFill>
+                        <a:schemeClr val="tx1"/>
+                      </a:solidFill>
+                      <a:prstDash val="solid"/>
+                      <a:round/>
+                      <a:headEnd type="none" w="med" len="med"/>
+                      <a:tailEnd type="none" w="med" len="med"/>
+                    </a:lnL>
+                    <a:lnR w="12700" cap="flat" cmpd="sng" algn="ctr">
+                      <a:solidFill>
+                        <a:schemeClr val="tx1"/>
+                      </a:solidFill>
+                      <a:prstDash val="solid"/>
+                      <a:round/>
+                      <a:headEnd type="none" w="med" len="med"/>
+                      <a:tailEnd type="none" w="med" len="med"/>
+                    </a:lnR>
+                    <a:lnT w="12700" cap="flat" cmpd="sng" algn="ctr">
+                      <a:solidFill>
+                        <a:schemeClr val="tx1"/>
+                      </a:solidFill>
+                      <a:prstDash val="solid"/>
+                      <a:round/>
+                      <a:headEnd type="none" w="med" len="med"/>
+                      <a:tailEnd type="none" w="med" len="med"/>
+                    </a:lnT>
+                    <a:lnB w="12700" cap="flat" cmpd="sng" algn="ctr">
+                      <a:solidFill>
+                        <a:schemeClr val="tx1"/>
+                      </a:solidFill>
+                      <a:prstDash val="solid"/>
+                      <a:round/>
+                      <a:headEnd type="none" w="med" len="med"/>
+                      <a:tailEnd type="none" w="med" len="med"/>
+                    </a:lnB>
+                    <a:noFill/>
+                  </a:tcPr>
+                </a:tc>
+                <a:tc>
+                  <a:txBody>
+                    <a:bodyPr/>
+                    <a:lstStyle/>
+                    <a:p>
+                      <a:pPr marL="0" marR="0">
+                        <a:lnSpc>
+                          <a:spcPct val="115000"/>
+                        </a:lnSpc>
+                        <a:buNone/>
+                      </a:pPr>
+                      <a:endParaRPr lang="en-US" sz="1100" kern="100">
+                        <a:effectLst/>
+                        <a:latin typeface="Aptos" panose="020B0004020202020204" pitchFamily="34" charset="0"/>
+                        <a:ea typeface="Aptos" panose="020B0004020202020204" pitchFamily="34" charset="0"/>
+                        <a:cs typeface="Aptos" panose="020B0004020202020204" pitchFamily="34" charset="0"/>
+                      </a:endParaRPr>
+                    </a:p>
+                  </a:txBody>
+                  <a:tcPr marL="0" marR="0" marT="0" marB="0">
+                    <a:lnL w="12700" cap="flat" cmpd="sng" algn="ctr">
+                      <a:solidFill>
+                        <a:schemeClr val="tx1"/>
+                      </a:solidFill>
+                      <a:prstDash val="solid"/>
+                      <a:round/>
+                      <a:headEnd type="none" w="med" len="med"/>
+                      <a:tailEnd type="none" w="med" len="med"/>
+                    </a:lnL>
+                    <a:lnR w="12700" cap="flat" cmpd="sng" algn="ctr">
+                      <a:solidFill>
+                        <a:schemeClr val="tx1"/>
+                      </a:solidFill>
+                      <a:prstDash val="solid"/>
+                      <a:round/>
+                      <a:headEnd type="none" w="med" len="med"/>
+                      <a:tailEnd type="none" w="med" len="med"/>
+                    </a:lnR>
+                    <a:lnT w="12700" cap="flat" cmpd="sng" algn="ctr">
+                      <a:solidFill>
+                        <a:schemeClr val="tx1"/>
+                      </a:solidFill>
+                      <a:prstDash val="solid"/>
+                      <a:round/>
+                      <a:headEnd type="none" w="med" len="med"/>
+                      <a:tailEnd type="none" w="med" len="med"/>
+                    </a:lnT>
+                    <a:lnB w="12700" cap="flat" cmpd="sng" algn="ctr">
+                      <a:solidFill>
+                        <a:schemeClr val="tx1"/>
+                      </a:solidFill>
+                      <a:prstDash val="solid"/>
+                      <a:round/>
+                      <a:headEnd type="none" w="med" len="med"/>
+                      <a:tailEnd type="none" w="med" len="med"/>
+                    </a:lnB>
+                    <a:noFill/>
+                  </a:tcPr>
+                </a:tc>
+                <a:tc>
+                  <a:txBody>
+                    <a:bodyPr/>
+                    <a:lstStyle/>
+                    <a:p>
+                      <a:pPr marL="0" marR="0">
+                        <a:lnSpc>
+                          <a:spcPct val="115000"/>
+                        </a:lnSpc>
+                        <a:buNone/>
+                      </a:pPr>
+                      <a:endParaRPr lang="en-US" sz="1100" kern="100">
+                        <a:effectLst/>
+                        <a:latin typeface="Aptos" panose="020B0004020202020204" pitchFamily="34" charset="0"/>
+                        <a:ea typeface="Aptos" panose="020B0004020202020204" pitchFamily="34" charset="0"/>
+                        <a:cs typeface="Aptos" panose="020B0004020202020204" pitchFamily="34" charset="0"/>
+                      </a:endParaRPr>
+                    </a:p>
+                  </a:txBody>
+                  <a:tcPr marL="68580" marR="68580" marT="0" marB="0">
+                    <a:lnL w="12700" cap="flat" cmpd="sng" algn="ctr">
+                      <a:solidFill>
+                        <a:schemeClr val="tx1"/>
+                      </a:solidFill>
+                      <a:prstDash val="solid"/>
+                      <a:round/>
+                      <a:headEnd type="none" w="med" len="med"/>
+                      <a:tailEnd type="none" w="med" len="med"/>
+                    </a:lnL>
+                    <a:lnR w="12700" cap="flat" cmpd="sng" algn="ctr">
+                      <a:solidFill>
+                        <a:schemeClr val="tx1"/>
+                      </a:solidFill>
+                      <a:prstDash val="solid"/>
+                      <a:round/>
+                      <a:headEnd type="none" w="med" len="med"/>
+                      <a:tailEnd type="none" w="med" len="med"/>
+                    </a:lnR>
+                    <a:lnT w="12700" cap="flat" cmpd="sng" algn="ctr">
+                      <a:solidFill>
+                        <a:schemeClr val="tx1"/>
+                      </a:solidFill>
+                      <a:prstDash val="solid"/>
+                      <a:round/>
+                      <a:headEnd type="none" w="med" len="med"/>
+                      <a:tailEnd type="none" w="med" len="med"/>
+                    </a:lnT>
+                    <a:lnB w="12700" cap="flat" cmpd="sng" algn="ctr">
+                      <a:solidFill>
+                        <a:schemeClr val="tx1"/>
+                      </a:solidFill>
+                      <a:prstDash val="solid"/>
+                      <a:round/>
+                      <a:headEnd type="none" w="med" len="med"/>
+                      <a:tailEnd type="none" w="med" len="med"/>
+                    </a:lnB>
+                    <a:noFill/>
+                  </a:tcPr>
+                </a:tc>
+                <a:tc>
+                  <a:txBody>
+                    <a:bodyPr/>
+                    <a:lstStyle/>
+                    <a:p>
+                      <a:pPr marL="0" marR="0">
+                        <a:lnSpc>
+                          <a:spcPct val="115000"/>
+                        </a:lnSpc>
+                        <a:buNone/>
+                      </a:pPr>
+                      <a:endParaRPr lang="en-US" sz="1100" kern="100">
+                        <a:effectLst/>
+                        <a:latin typeface="Aptos" panose="020B0004020202020204" pitchFamily="34" charset="0"/>
+                        <a:ea typeface="Aptos" panose="020B0004020202020204" pitchFamily="34" charset="0"/>
+                        <a:cs typeface="Aptos" panose="020B0004020202020204" pitchFamily="34" charset="0"/>
+                      </a:endParaRPr>
+                    </a:p>
+                  </a:txBody>
+                  <a:tcPr marL="68580" marR="68580" marT="0" marB="0">
+                    <a:lnL w="12700" cap="flat" cmpd="sng" algn="ctr">
+                      <a:solidFill>
+                        <a:schemeClr val="tx1"/>
+                      </a:solidFill>
+                      <a:prstDash val="solid"/>
+                      <a:round/>
+                      <a:headEnd type="none" w="med" len="med"/>
+                      <a:tailEnd type="none" w="med" len="med"/>
+                    </a:lnL>
+                    <a:lnR w="12700" cap="flat" cmpd="sng" algn="ctr">
+                      <a:solidFill>
+                        <a:schemeClr val="tx1"/>
+                      </a:solidFill>
+                      <a:prstDash val="solid"/>
+                      <a:round/>
+                      <a:headEnd type="none" w="med" len="med"/>
+                      <a:tailEnd type="none" w="med" len="med"/>
+                    </a:lnR>
+                    <a:lnT w="12700" cap="flat" cmpd="sng" algn="ctr">
+                      <a:solidFill>
+                        <a:schemeClr val="tx1"/>
+                      </a:solidFill>
+                      <a:prstDash val="solid"/>
+                      <a:round/>
+                      <a:headEnd type="none" w="med" len="med"/>
+                      <a:tailEnd type="none" w="med" len="med"/>
+                    </a:lnT>
+                    <a:lnB w="12700" cap="flat" cmpd="sng" algn="ctr">
+                      <a:solidFill>
+                        <a:schemeClr val="tx1"/>
+                      </a:solidFill>
+                      <a:prstDash val="solid"/>
+                      <a:round/>
+                      <a:headEnd type="none" w="med" len="med"/>
+                      <a:tailEnd type="none" w="med" len="med"/>
+                    </a:lnB>
+                    <a:noFill/>
+                  </a:tcPr>
+                </a:tc>
+                <a:extLst>
+                  <a:ext uri="{0D108BD9-81ED-4DB2-BD59-A6C34878D82A}">
+                    <a16:rowId xmlns:a16="http://schemas.microsoft.com/office/drawing/2014/main" val="882293557"/>
+                  </a:ext>
+                </a:extLst>
+              </a:tr>
+              <a:tr h="0">
+                <a:tc>
+                  <a:txBody>
+                    <a:bodyPr/>
+                    <a:lstStyle/>
+                    <a:p>
+                      <a:pPr marL="0" marR="0">
+                        <a:lnSpc>
+                          <a:spcPct val="115000"/>
+                        </a:lnSpc>
+                        <a:buNone/>
+                      </a:pPr>
+                      <a:endParaRPr lang="en-US" sz="1100" kern="100">
+                        <a:effectLst/>
+                        <a:latin typeface="Aptos" panose="020B0004020202020204" pitchFamily="34" charset="0"/>
+                        <a:ea typeface="Aptos" panose="020B0004020202020204" pitchFamily="34" charset="0"/>
+                        <a:cs typeface="Aptos" panose="020B0004020202020204" pitchFamily="34" charset="0"/>
+                      </a:endParaRPr>
+                    </a:p>
+                  </a:txBody>
+                  <a:tcPr marL="68580" marR="68580" marT="0" marB="0">
+                    <a:lnL w="12700" cap="flat" cmpd="sng" algn="ctr">
+                      <a:solidFill>
+                        <a:schemeClr val="tx1"/>
+                      </a:solidFill>
+                      <a:prstDash val="solid"/>
+                      <a:round/>
+                      <a:headEnd type="none" w="med" len="med"/>
+                      <a:tailEnd type="none" w="med" len="med"/>
+                    </a:lnL>
+                    <a:lnR w="12700" cap="flat" cmpd="sng" algn="ctr">
+                      <a:solidFill>
+                        <a:schemeClr val="tx1"/>
+                      </a:solidFill>
+                      <a:prstDash val="solid"/>
+                      <a:round/>
+                      <a:headEnd type="none" w="med" len="med"/>
+                      <a:tailEnd type="none" w="med" len="med"/>
+                    </a:lnR>
+                    <a:lnT w="12700" cap="flat" cmpd="sng" algn="ctr">
+                      <a:solidFill>
+                        <a:schemeClr val="tx1"/>
+                      </a:solidFill>
+                      <a:prstDash val="solid"/>
+                      <a:round/>
+                      <a:headEnd type="none" w="med" len="med"/>
+                      <a:tailEnd type="none" w="med" len="med"/>
+                    </a:lnT>
+                    <a:lnB w="12700" cap="flat" cmpd="sng" algn="ctr">
+                      <a:solidFill>
+                        <a:schemeClr val="tx1"/>
+                      </a:solidFill>
+                      <a:prstDash val="solid"/>
+                      <a:round/>
+                      <a:headEnd type="none" w="med" len="med"/>
+                      <a:tailEnd type="none" w="med" len="med"/>
+                    </a:lnB>
+                    <a:noFill/>
+                  </a:tcPr>
+                </a:tc>
+                <a:tc>
+                  <a:txBody>
+                    <a:bodyPr/>
+                    <a:lstStyle/>
+                    <a:p>
+                      <a:pPr marL="0" marR="0">
+                        <a:lnSpc>
+                          <a:spcPct val="115000"/>
+                        </a:lnSpc>
+                        <a:buNone/>
+                      </a:pPr>
+                      <a:endParaRPr lang="en-US" sz="1100" kern="100">
+                        <a:effectLst/>
+                        <a:latin typeface="Aptos" panose="020B0004020202020204" pitchFamily="34" charset="0"/>
+                        <a:ea typeface="Aptos" panose="020B0004020202020204" pitchFamily="34" charset="0"/>
+                        <a:cs typeface="Aptos" panose="020B0004020202020204" pitchFamily="34" charset="0"/>
+                      </a:endParaRPr>
+                    </a:p>
+                  </a:txBody>
+                  <a:tcPr marL="0" marR="0" marT="0" marB="0">
+                    <a:lnL w="12700" cap="flat" cmpd="sng" algn="ctr">
+                      <a:solidFill>
+                        <a:schemeClr val="tx1"/>
+                      </a:solidFill>
+                      <a:prstDash val="solid"/>
+                      <a:round/>
+                      <a:headEnd type="none" w="med" len="med"/>
+                      <a:tailEnd type="none" w="med" len="med"/>
+                    </a:lnL>
+                    <a:lnR w="12700" cap="flat" cmpd="sng" algn="ctr">
+                      <a:solidFill>
+                        <a:schemeClr val="tx1"/>
+                      </a:solidFill>
+                      <a:prstDash val="solid"/>
+                      <a:round/>
+                      <a:headEnd type="none" w="med" len="med"/>
+                      <a:tailEnd type="none" w="med" len="med"/>
+                    </a:lnR>
+                    <a:lnT w="12700" cap="flat" cmpd="sng" algn="ctr">
+                      <a:solidFill>
+                        <a:schemeClr val="tx1"/>
+                      </a:solidFill>
+                      <a:prstDash val="solid"/>
+                      <a:round/>
+                      <a:headEnd type="none" w="med" len="med"/>
+                      <a:tailEnd type="none" w="med" len="med"/>
+                    </a:lnT>
+                    <a:lnB w="12700" cap="flat" cmpd="sng" algn="ctr">
+                      <a:solidFill>
+                        <a:schemeClr val="tx1"/>
+                      </a:solidFill>
+                      <a:prstDash val="solid"/>
+                      <a:round/>
+                      <a:headEnd type="none" w="med" len="med"/>
+                      <a:tailEnd type="none" w="med" len="med"/>
+                    </a:lnB>
+                    <a:noFill/>
+                  </a:tcPr>
+                </a:tc>
+                <a:tc>
+                  <a:txBody>
+                    <a:bodyPr/>
+                    <a:lstStyle/>
+                    <a:p>
+                      <a:pPr marL="0" marR="0">
+                        <a:lnSpc>
+                          <a:spcPct val="115000"/>
+                        </a:lnSpc>
+                        <a:buNone/>
+                      </a:pPr>
+                      <a:endParaRPr lang="en-US" sz="1100" kern="100">
+                        <a:effectLst/>
+                        <a:latin typeface="Aptos" panose="020B0004020202020204" pitchFamily="34" charset="0"/>
+                        <a:ea typeface="Aptos" panose="020B0004020202020204" pitchFamily="34" charset="0"/>
+                        <a:cs typeface="Aptos" panose="020B0004020202020204" pitchFamily="34" charset="0"/>
+                      </a:endParaRPr>
+                    </a:p>
+                  </a:txBody>
+                  <a:tcPr marL="68580" marR="68580" marT="0" marB="0">
+                    <a:lnL w="12700" cap="flat" cmpd="sng" algn="ctr">
+                      <a:solidFill>
+                        <a:schemeClr val="tx1"/>
+                      </a:solidFill>
+                      <a:prstDash val="solid"/>
+                      <a:round/>
+                      <a:headEnd type="none" w="med" len="med"/>
+                      <a:tailEnd type="none" w="med" len="med"/>
+                    </a:lnL>
+                    <a:lnR w="12700" cap="flat" cmpd="sng" algn="ctr">
+                      <a:solidFill>
+                        <a:schemeClr val="tx1"/>
+                      </a:solidFill>
+                      <a:prstDash val="solid"/>
+                      <a:round/>
+                      <a:headEnd type="none" w="med" len="med"/>
+                      <a:tailEnd type="none" w="med" len="med"/>
+                    </a:lnR>
+                    <a:lnT w="12700" cap="flat" cmpd="sng" algn="ctr">
+                      <a:solidFill>
+                        <a:schemeClr val="tx1"/>
+                      </a:solidFill>
+                      <a:prstDash val="solid"/>
+                      <a:round/>
+                      <a:headEnd type="none" w="med" len="med"/>
+                      <a:tailEnd type="none" w="med" len="med"/>
+                    </a:lnT>
+                    <a:lnB w="12700" cap="flat" cmpd="sng" algn="ctr">
+                      <a:solidFill>
+                        <a:schemeClr val="tx1"/>
+                      </a:solidFill>
+                      <a:prstDash val="solid"/>
+                      <a:round/>
+                      <a:headEnd type="none" w="med" len="med"/>
+                      <a:tailEnd type="none" w="med" len="med"/>
+                    </a:lnB>
+                    <a:noFill/>
+                  </a:tcPr>
+                </a:tc>
+                <a:tc>
+                  <a:txBody>
+                    <a:bodyPr/>
+                    <a:lstStyle/>
+                    <a:p>
+                      <a:pPr marL="0" marR="0">
+                        <a:lnSpc>
+                          <a:spcPct val="115000"/>
+                        </a:lnSpc>
+                        <a:buNone/>
+                      </a:pPr>
+                      <a:endParaRPr lang="en-US" sz="1100" kern="100">
+                        <a:effectLst/>
+                        <a:latin typeface="Aptos" panose="020B0004020202020204" pitchFamily="34" charset="0"/>
+                        <a:ea typeface="Aptos" panose="020B0004020202020204" pitchFamily="34" charset="0"/>
+                        <a:cs typeface="Aptos" panose="020B0004020202020204" pitchFamily="34" charset="0"/>
+                      </a:endParaRPr>
+                    </a:p>
+                  </a:txBody>
+                  <a:tcPr marL="68580" marR="68580" marT="0" marB="0">
+                    <a:lnL w="12700" cap="flat" cmpd="sng" algn="ctr">
+                      <a:solidFill>
+                        <a:schemeClr val="tx1"/>
+                      </a:solidFill>
+                      <a:prstDash val="solid"/>
+                      <a:round/>
+                      <a:headEnd type="none" w="med" len="med"/>
+                      <a:tailEnd type="none" w="med" len="med"/>
+                    </a:lnL>
+                    <a:lnR w="12700" cap="flat" cmpd="sng" algn="ctr">
+                      <a:solidFill>
+                        <a:schemeClr val="tx1"/>
+                      </a:solidFill>
+                      <a:prstDash val="solid"/>
+                      <a:round/>
+                      <a:headEnd type="none" w="med" len="med"/>
+                      <a:tailEnd type="none" w="med" len="med"/>
+                    </a:lnR>
+                    <a:lnT w="12700" cap="flat" cmpd="sng" algn="ctr">
+                      <a:solidFill>
+                        <a:schemeClr val="tx1"/>
+                      </a:solidFill>
+                      <a:prstDash val="solid"/>
+                      <a:round/>
+                      <a:headEnd type="none" w="med" len="med"/>
+                      <a:tailEnd type="none" w="med" len="med"/>
+                    </a:lnT>
+                    <a:lnB w="12700" cap="flat" cmpd="sng" algn="ctr">
+                      <a:solidFill>
+                        <a:schemeClr val="tx1"/>
+                      </a:solidFill>
+                      <a:prstDash val="solid"/>
+                      <a:round/>
+                      <a:headEnd type="none" w="med" len="med"/>
+                      <a:tailEnd type="none" w="med" len="med"/>
+                    </a:lnB>
+                    <a:noFill/>
+                  </a:tcPr>
+                </a:tc>
+                <a:extLst>
+                  <a:ext uri="{0D108BD9-81ED-4DB2-BD59-A6C34878D82A}">
+                    <a16:rowId xmlns:a16="http://schemas.microsoft.com/office/drawing/2014/main" val="3915855345"/>
+                  </a:ext>
+                </a:extLst>
+              </a:tr>
+              <a:tr h="0">
+                <a:tc>
+                  <a:txBody>
+                    <a:bodyPr/>
+                    <a:lstStyle/>
+                    <a:p>
+                      <a:pPr marL="0" marR="0">
+                        <a:lnSpc>
+                          <a:spcPct val="115000"/>
+                        </a:lnSpc>
+                        <a:buNone/>
+                      </a:pPr>
+                      <a:r>
+                        <a:rPr lang="en-US" sz="1100" kern="100">
+                          <a:effectLst/>
+                          <a:latin typeface="Aptos" panose="020B0004020202020204" pitchFamily="34" charset="0"/>
+                          <a:ea typeface="Aptos" panose="020B0004020202020204" pitchFamily="34" charset="0"/>
+                          <a:cs typeface="Aptos" panose="020B0004020202020204" pitchFamily="34" charset="0"/>
+                        </a:rPr>
+                        <a:t> </a:t>
+                      </a:r>
+                    </a:p>
+                  </a:txBody>
+                  <a:tcPr marL="68580" marR="68580" marT="0" marB="0">
+                    <a:lnL w="12700" cap="flat" cmpd="sng" algn="ctr">
+                      <a:solidFill>
+                        <a:schemeClr val="tx1"/>
+                      </a:solidFill>
+                      <a:prstDash val="solid"/>
+                      <a:round/>
+                      <a:headEnd type="none" w="med" len="med"/>
+                      <a:tailEnd type="none" w="med" len="med"/>
+                    </a:lnL>
+                    <a:lnR w="12700" cap="flat" cmpd="sng" algn="ctr">
+                      <a:solidFill>
+                        <a:schemeClr val="tx1"/>
+                      </a:solidFill>
+                      <a:prstDash val="solid"/>
+                      <a:round/>
+                      <a:headEnd type="none" w="med" len="med"/>
+                      <a:tailEnd type="none" w="med" len="med"/>
+                    </a:lnR>
+                    <a:lnT w="12700" cap="flat" cmpd="sng" algn="ctr">
+                      <a:solidFill>
+                        <a:schemeClr val="tx1"/>
+                      </a:solidFill>
+                      <a:prstDash val="solid"/>
+                      <a:round/>
+                      <a:headEnd type="none" w="med" len="med"/>
+                      <a:tailEnd type="none" w="med" len="med"/>
+                    </a:lnT>
+                    <a:lnB w="12700" cap="flat" cmpd="sng" algn="ctr">
+                      <a:solidFill>
+                        <a:schemeClr val="tx1"/>
+                      </a:solidFill>
+                      <a:prstDash val="solid"/>
+                      <a:round/>
+                      <a:headEnd type="none" w="med" len="med"/>
+                      <a:tailEnd type="none" w="med" len="med"/>
+                    </a:lnB>
+                    <a:noFill/>
+                  </a:tcPr>
+                </a:tc>
+                <a:tc>
+                  <a:txBody>
+                    <a:bodyPr/>
+                    <a:lstStyle/>
+                    <a:p>
+                      <a:pPr marL="0" marR="0">
+                        <a:lnSpc>
+                          <a:spcPct val="115000"/>
+                        </a:lnSpc>
+                        <a:buNone/>
+                      </a:pPr>
+                      <a:r>
+                        <a:rPr lang="en-US" sz="1100" kern="100">
+                          <a:effectLst/>
+                          <a:latin typeface="Aptos" panose="020B0004020202020204" pitchFamily="34" charset="0"/>
+                          <a:ea typeface="Aptos" panose="020B0004020202020204" pitchFamily="34" charset="0"/>
+                          <a:cs typeface="Aptos" panose="020B0004020202020204" pitchFamily="34" charset="0"/>
+                        </a:rPr>
+                        <a:t> </a:t>
+                      </a:r>
+                    </a:p>
+                  </a:txBody>
+                  <a:tcPr marL="0" marR="0" marT="0" marB="0">
+                    <a:lnL w="12700" cap="flat" cmpd="sng" algn="ctr">
+                      <a:solidFill>
+                        <a:schemeClr val="tx1"/>
+                      </a:solidFill>
+                      <a:prstDash val="solid"/>
+                      <a:round/>
+                      <a:headEnd type="none" w="med" len="med"/>
+                      <a:tailEnd type="none" w="med" len="med"/>
+                    </a:lnL>
+                    <a:lnR w="12700" cap="flat" cmpd="sng" algn="ctr">
+                      <a:solidFill>
+                        <a:schemeClr val="tx1"/>
+                      </a:solidFill>
+                      <a:prstDash val="solid"/>
+                      <a:round/>
+                      <a:headEnd type="none" w="med" len="med"/>
+                      <a:tailEnd type="none" w="med" len="med"/>
+                    </a:lnR>
+                    <a:lnT w="12700" cap="flat" cmpd="sng" algn="ctr">
+                      <a:solidFill>
+                        <a:schemeClr val="tx1"/>
+                      </a:solidFill>
+                      <a:prstDash val="solid"/>
+                      <a:round/>
+                      <a:headEnd type="none" w="med" len="med"/>
+                      <a:tailEnd type="none" w="med" len="med"/>
+                    </a:lnT>
+                    <a:lnB w="12700" cap="flat" cmpd="sng" algn="ctr">
+                      <a:solidFill>
+                        <a:schemeClr val="tx1"/>
+                      </a:solidFill>
+                      <a:prstDash val="solid"/>
+                      <a:round/>
+                      <a:headEnd type="none" w="med" len="med"/>
+                      <a:tailEnd type="none" w="med" len="med"/>
+                    </a:lnB>
+                    <a:noFill/>
+                  </a:tcPr>
+                </a:tc>
+                <a:tc>
+                  <a:txBody>
+                    <a:bodyPr/>
+                    <a:lstStyle/>
+                    <a:p>
+                      <a:pPr marL="0" marR="0">
+                        <a:lnSpc>
+                          <a:spcPct val="115000"/>
+                        </a:lnSpc>
+                        <a:buNone/>
+                      </a:pPr>
+                      <a:r>
+                        <a:rPr lang="en-US" sz="1100" kern="100">
+                          <a:effectLst/>
+                          <a:latin typeface="Aptos" panose="020B0004020202020204" pitchFamily="34" charset="0"/>
+                          <a:ea typeface="Aptos" panose="020B0004020202020204" pitchFamily="34" charset="0"/>
+                          <a:cs typeface="Aptos" panose="020B0004020202020204" pitchFamily="34" charset="0"/>
+                        </a:rPr>
+                        <a:t> </a:t>
+                      </a:r>
+                    </a:p>
+                  </a:txBody>
+                  <a:tcPr marL="68580" marR="68580" marT="0" marB="0">
+                    <a:lnL w="12700" cap="flat" cmpd="sng" algn="ctr">
+                      <a:solidFill>
+                        <a:schemeClr val="tx1"/>
+                      </a:solidFill>
+                      <a:prstDash val="solid"/>
+                      <a:round/>
+                      <a:headEnd type="none" w="med" len="med"/>
+                      <a:tailEnd type="none" w="med" len="med"/>
+                    </a:lnL>
+                    <a:lnR w="12700" cap="flat" cmpd="sng" algn="ctr">
+                      <a:solidFill>
+                        <a:schemeClr val="tx1"/>
+                      </a:solidFill>
+                      <a:prstDash val="solid"/>
+                      <a:round/>
+                      <a:headEnd type="none" w="med" len="med"/>
+                      <a:tailEnd type="none" w="med" len="med"/>
+                    </a:lnR>
+                    <a:lnT w="12700" cap="flat" cmpd="sng" algn="ctr">
+                      <a:solidFill>
+                        <a:schemeClr val="tx1"/>
+                      </a:solidFill>
+                      <a:prstDash val="solid"/>
+                      <a:round/>
+                      <a:headEnd type="none" w="med" len="med"/>
+                      <a:tailEnd type="none" w="med" len="med"/>
+                    </a:lnT>
+                    <a:lnB w="12700" cap="flat" cmpd="sng" algn="ctr">
+                      <a:solidFill>
+                        <a:schemeClr val="tx1"/>
+                      </a:solidFill>
+                      <a:prstDash val="solid"/>
+                      <a:round/>
+                      <a:headEnd type="none" w="med" len="med"/>
+                      <a:tailEnd type="none" w="med" len="med"/>
+                    </a:lnB>
+                    <a:noFill/>
+                  </a:tcPr>
+                </a:tc>
+                <a:tc>
+                  <a:txBody>
+                    <a:bodyPr/>
+                    <a:lstStyle/>
+                    <a:p>
+                      <a:pPr marL="0" marR="0">
+                        <a:lnSpc>
+                          <a:spcPct val="115000"/>
+                        </a:lnSpc>
+                        <a:buNone/>
+                      </a:pPr>
+                      <a:r>
+                        <a:rPr lang="en-US" sz="1100" kern="100">
+                          <a:effectLst/>
+                          <a:latin typeface="Aptos" panose="020B0004020202020204" pitchFamily="34" charset="0"/>
+                          <a:ea typeface="Aptos" panose="020B0004020202020204" pitchFamily="34" charset="0"/>
+                          <a:cs typeface="Aptos" panose="020B0004020202020204" pitchFamily="34" charset="0"/>
+                        </a:rPr>
+                        <a:t> </a:t>
+                      </a:r>
+                    </a:p>
+                  </a:txBody>
+                  <a:tcPr marL="68580" marR="68580" marT="0" marB="0">
+                    <a:lnL w="12700" cap="flat" cmpd="sng" algn="ctr">
+                      <a:solidFill>
+                        <a:schemeClr val="tx1"/>
+                      </a:solidFill>
+                      <a:prstDash val="solid"/>
+                      <a:round/>
+                      <a:headEnd type="none" w="med" len="med"/>
+                      <a:tailEnd type="none" w="med" len="med"/>
+                    </a:lnL>
+                    <a:lnR w="12700" cap="flat" cmpd="sng" algn="ctr">
+                      <a:solidFill>
+                        <a:schemeClr val="tx1"/>
+                      </a:solidFill>
+                      <a:prstDash val="solid"/>
+                      <a:round/>
+                      <a:headEnd type="none" w="med" len="med"/>
+                      <a:tailEnd type="none" w="med" len="med"/>
+                    </a:lnR>
+                    <a:lnT w="12700" cap="flat" cmpd="sng" algn="ctr">
+                      <a:solidFill>
+                        <a:schemeClr val="tx1"/>
+                      </a:solidFill>
+                      <a:prstDash val="solid"/>
+                      <a:round/>
+                      <a:headEnd type="none" w="med" len="med"/>
+                      <a:tailEnd type="none" w="med" len="med"/>
+                    </a:lnT>
+                    <a:lnB w="12700" cap="flat" cmpd="sng" algn="ctr">
+                      <a:solidFill>
+                        <a:schemeClr val="tx1"/>
+                      </a:solidFill>
+                      <a:prstDash val="solid"/>
+                      <a:round/>
+                      <a:headEnd type="none" w="med" len="med"/>
+                      <a:tailEnd type="none" w="med" len="med"/>
+                    </a:lnB>
+                    <a:noFill/>
+                  </a:tcPr>
+                </a:tc>
+                <a:extLst>
+                  <a:ext uri="{0D108BD9-81ED-4DB2-BD59-A6C34878D82A}">
+                    <a16:rowId xmlns:a16="http://schemas.microsoft.com/office/drawing/2014/main" val="449420337"/>
+                  </a:ext>
+                </a:extLst>
+              </a:tr>
+              <a:tr h="0">
+                <a:tc>
+                  <a:txBody>
+                    <a:bodyPr/>
+                    <a:lstStyle/>
+                    <a:p>
+                      <a:pPr marL="0" marR="0">
+                        <a:lnSpc>
+                          <a:spcPct val="115000"/>
+                        </a:lnSpc>
+                        <a:buNone/>
+                      </a:pPr>
+                      <a:endParaRPr lang="en-US" sz="1100" kern="100">
+                        <a:effectLst/>
+                        <a:latin typeface="Aptos" panose="020B0004020202020204" pitchFamily="34" charset="0"/>
+                        <a:ea typeface="Aptos" panose="020B0004020202020204" pitchFamily="34" charset="0"/>
+                        <a:cs typeface="Aptos" panose="020B0004020202020204" pitchFamily="34" charset="0"/>
+                      </a:endParaRPr>
+                    </a:p>
+                  </a:txBody>
+                  <a:tcPr marL="68580" marR="68580" marT="0" marB="0">
+                    <a:lnL w="12700" cap="flat" cmpd="sng" algn="ctr">
+                      <a:solidFill>
+                        <a:schemeClr val="tx1"/>
+                      </a:solidFill>
+                      <a:prstDash val="solid"/>
+                      <a:round/>
+                      <a:headEnd type="none" w="med" len="med"/>
+                      <a:tailEnd type="none" w="med" len="med"/>
+                    </a:lnL>
+                    <a:lnR w="12700" cap="flat" cmpd="sng" algn="ctr">
+                      <a:solidFill>
+                        <a:schemeClr val="tx1"/>
+                      </a:solidFill>
+                      <a:prstDash val="solid"/>
+                      <a:round/>
+                      <a:headEnd type="none" w="med" len="med"/>
+                      <a:tailEnd type="none" w="med" len="med"/>
+                    </a:lnR>
+                    <a:lnT w="12700" cap="flat" cmpd="sng" algn="ctr">
+                      <a:solidFill>
+                        <a:schemeClr val="tx1"/>
+                      </a:solidFill>
+                      <a:prstDash val="solid"/>
+                      <a:round/>
+                      <a:headEnd type="none" w="med" len="med"/>
+                      <a:tailEnd type="none" w="med" len="med"/>
+                    </a:lnT>
+                    <a:lnB w="12700" cap="flat" cmpd="sng" algn="ctr">
+                      <a:solidFill>
+                        <a:schemeClr val="tx1"/>
+                      </a:solidFill>
+                      <a:prstDash val="solid"/>
+                      <a:round/>
+                      <a:headEnd type="none" w="med" len="med"/>
+                      <a:tailEnd type="none" w="med" len="med"/>
+                    </a:lnB>
+                    <a:noFill/>
+                  </a:tcPr>
+                </a:tc>
+                <a:tc>
+                  <a:txBody>
+                    <a:bodyPr/>
+                    <a:lstStyle/>
+                    <a:p>
+                      <a:pPr marL="0" marR="0">
+                        <a:lnSpc>
+                          <a:spcPct val="115000"/>
+                        </a:lnSpc>
+                        <a:buNone/>
+                      </a:pPr>
+                      <a:endParaRPr lang="en-US" sz="1100" kern="100">
+                        <a:effectLst/>
+                        <a:latin typeface="Aptos" panose="020B0004020202020204" pitchFamily="34" charset="0"/>
+                        <a:ea typeface="Aptos" panose="020B0004020202020204" pitchFamily="34" charset="0"/>
+                        <a:cs typeface="Aptos" panose="020B0004020202020204" pitchFamily="34" charset="0"/>
+                      </a:endParaRPr>
+                    </a:p>
+                  </a:txBody>
+                  <a:tcPr marL="0" marR="0" marT="0" marB="0">
+                    <a:lnL w="12700" cap="flat" cmpd="sng" algn="ctr">
+                      <a:solidFill>
+                        <a:schemeClr val="tx1"/>
+                      </a:solidFill>
+                      <a:prstDash val="solid"/>
+                      <a:round/>
+                      <a:headEnd type="none" w="med" len="med"/>
+                      <a:tailEnd type="none" w="med" len="med"/>
+                    </a:lnL>
+                    <a:lnR w="12700" cap="flat" cmpd="sng" algn="ctr">
+                      <a:solidFill>
+                        <a:schemeClr val="tx1"/>
+                      </a:solidFill>
+                      <a:prstDash val="solid"/>
+                      <a:round/>
+                      <a:headEnd type="none" w="med" len="med"/>
+                      <a:tailEnd type="none" w="med" len="med"/>
+                    </a:lnR>
+                    <a:lnT w="12700" cap="flat" cmpd="sng" algn="ctr">
+                      <a:solidFill>
+                        <a:schemeClr val="tx1"/>
+                      </a:solidFill>
+                      <a:prstDash val="solid"/>
+                      <a:round/>
+                      <a:headEnd type="none" w="med" len="med"/>
+                      <a:tailEnd type="none" w="med" len="med"/>
+                    </a:lnT>
+                    <a:lnB w="12700" cap="flat" cmpd="sng" algn="ctr">
+                      <a:solidFill>
+                        <a:schemeClr val="tx1"/>
+                      </a:solidFill>
+                      <a:prstDash val="solid"/>
+                      <a:round/>
+                      <a:headEnd type="none" w="med" len="med"/>
+                      <a:tailEnd type="none" w="med" len="med"/>
+                    </a:lnB>
+                    <a:noFill/>
+                  </a:tcPr>
+                </a:tc>
+                <a:tc>
+                  <a:txBody>
+                    <a:bodyPr/>
+                    <a:lstStyle/>
+                    <a:p>
+                      <a:pPr marL="0" marR="0">
+                        <a:lnSpc>
+                          <a:spcPct val="115000"/>
+                        </a:lnSpc>
+                        <a:buNone/>
+                      </a:pPr>
+                      <a:endParaRPr lang="en-US" sz="1100" kern="100">
+                        <a:effectLst/>
+                        <a:latin typeface="Aptos" panose="020B0004020202020204" pitchFamily="34" charset="0"/>
+                        <a:ea typeface="Aptos" panose="020B0004020202020204" pitchFamily="34" charset="0"/>
+                        <a:cs typeface="Aptos" panose="020B0004020202020204" pitchFamily="34" charset="0"/>
+                      </a:endParaRPr>
+                    </a:p>
+                  </a:txBody>
+                  <a:tcPr marL="68580" marR="68580" marT="0" marB="0">
+                    <a:lnL w="12700" cap="flat" cmpd="sng" algn="ctr">
+                      <a:solidFill>
+                        <a:schemeClr val="tx1"/>
+                      </a:solidFill>
+                      <a:prstDash val="solid"/>
+                      <a:round/>
+                      <a:headEnd type="none" w="med" len="med"/>
+                      <a:tailEnd type="none" w="med" len="med"/>
+                    </a:lnL>
+                    <a:lnR w="12700" cap="flat" cmpd="sng" algn="ctr">
+                      <a:solidFill>
+                        <a:schemeClr val="tx1"/>
+                      </a:solidFill>
+                      <a:prstDash val="solid"/>
+                      <a:round/>
+                      <a:headEnd type="none" w="med" len="med"/>
+                      <a:tailEnd type="none" w="med" len="med"/>
+                    </a:lnR>
+                    <a:lnT w="12700" cap="flat" cmpd="sng" algn="ctr">
+                      <a:solidFill>
+                        <a:schemeClr val="tx1"/>
+                      </a:solidFill>
+                      <a:prstDash val="solid"/>
+                      <a:round/>
+                      <a:headEnd type="none" w="med" len="med"/>
+                      <a:tailEnd type="none" w="med" len="med"/>
+                    </a:lnT>
+                    <a:lnB w="12700" cap="flat" cmpd="sng" algn="ctr">
+                      <a:solidFill>
+                        <a:schemeClr val="tx1"/>
+                      </a:solidFill>
+                      <a:prstDash val="solid"/>
+                      <a:round/>
+                      <a:headEnd type="none" w="med" len="med"/>
+                      <a:tailEnd type="none" w="med" len="med"/>
+                    </a:lnB>
+                    <a:noFill/>
+                  </a:tcPr>
+                </a:tc>
+                <a:tc>
+                  <a:txBody>
+                    <a:bodyPr/>
+                    <a:lstStyle/>
+                    <a:p>
+                      <a:pPr marL="0" marR="0">
+                        <a:lnSpc>
+                          <a:spcPct val="115000"/>
+                        </a:lnSpc>
+                        <a:buNone/>
+                      </a:pPr>
+                      <a:endParaRPr lang="en-US" sz="1100" kern="100">
+                        <a:effectLst/>
+                        <a:latin typeface="Aptos" panose="020B0004020202020204" pitchFamily="34" charset="0"/>
+                        <a:ea typeface="Aptos" panose="020B0004020202020204" pitchFamily="34" charset="0"/>
+                        <a:cs typeface="Aptos" panose="020B0004020202020204" pitchFamily="34" charset="0"/>
+                      </a:endParaRPr>
+                    </a:p>
+                  </a:txBody>
+                  <a:tcPr marL="68580" marR="68580" marT="0" marB="0">
+                    <a:lnL w="12700" cap="flat" cmpd="sng" algn="ctr">
+                      <a:solidFill>
+                        <a:schemeClr val="tx1"/>
+                      </a:solidFill>
+                      <a:prstDash val="solid"/>
+                      <a:round/>
+                      <a:headEnd type="none" w="med" len="med"/>
+                      <a:tailEnd type="none" w="med" len="med"/>
+                    </a:lnL>
+                    <a:lnR w="12700" cap="flat" cmpd="sng" algn="ctr">
+                      <a:solidFill>
+                        <a:schemeClr val="tx1"/>
+                      </a:solidFill>
+                      <a:prstDash val="solid"/>
+                      <a:round/>
+                      <a:headEnd type="none" w="med" len="med"/>
+                      <a:tailEnd type="none" w="med" len="med"/>
+                    </a:lnR>
+                    <a:lnT w="12700" cap="flat" cmpd="sng" algn="ctr">
+                      <a:solidFill>
+                        <a:schemeClr val="tx1"/>
+                      </a:solidFill>
+                      <a:prstDash val="solid"/>
+                      <a:round/>
+                      <a:headEnd type="none" w="med" len="med"/>
+                      <a:tailEnd type="none" w="med" len="med"/>
+                    </a:lnT>
+                    <a:lnB w="12700" cap="flat" cmpd="sng" algn="ctr">
+                      <a:solidFill>
+                        <a:schemeClr val="tx1"/>
+                      </a:solidFill>
+                      <a:prstDash val="solid"/>
+                      <a:round/>
+                      <a:headEnd type="none" w="med" len="med"/>
+                      <a:tailEnd type="none" w="med" len="med"/>
+                    </a:lnB>
+                    <a:noFill/>
+                  </a:tcPr>
+                </a:tc>
+                <a:extLst>
+                  <a:ext uri="{0D108BD9-81ED-4DB2-BD59-A6C34878D82A}">
+                    <a16:rowId xmlns:a16="http://schemas.microsoft.com/office/drawing/2014/main" val="3818920805"/>
+                  </a:ext>
+                </a:extLst>
+              </a:tr>
+              <a:tr h="0">
+                <a:tc>
+                  <a:txBody>
+                    <a:bodyPr/>
+                    <a:lstStyle/>
+                    <a:p>
+                      <a:pPr marL="0" marR="0">
+                        <a:lnSpc>
+                          <a:spcPct val="115000"/>
+                        </a:lnSpc>
+                        <a:buNone/>
+                      </a:pPr>
+                      <a:endParaRPr lang="en-US" sz="1100" kern="100">
+                        <a:effectLst/>
+                        <a:latin typeface="Aptos" panose="020B0004020202020204" pitchFamily="34" charset="0"/>
+                        <a:ea typeface="Aptos" panose="020B0004020202020204" pitchFamily="34" charset="0"/>
+                        <a:cs typeface="Aptos" panose="020B0004020202020204" pitchFamily="34" charset="0"/>
+                      </a:endParaRPr>
+                    </a:p>
+                  </a:txBody>
+                  <a:tcPr marL="68580" marR="68580" marT="0" marB="0">
+                    <a:lnL w="12700" cap="flat" cmpd="sng" algn="ctr">
+                      <a:solidFill>
+                        <a:schemeClr val="tx1"/>
+                      </a:solidFill>
+                      <a:prstDash val="solid"/>
+                      <a:round/>
+                      <a:headEnd type="none" w="med" len="med"/>
+                      <a:tailEnd type="none" w="med" len="med"/>
+                    </a:lnL>
+                    <a:lnR w="12700" cap="flat" cmpd="sng" algn="ctr">
+                      <a:solidFill>
+                        <a:schemeClr val="tx1"/>
+                      </a:solidFill>
+                      <a:prstDash val="solid"/>
+                      <a:round/>
+                      <a:headEnd type="none" w="med" len="med"/>
+                      <a:tailEnd type="none" w="med" len="med"/>
+                    </a:lnR>
+                    <a:lnT w="12700" cap="flat" cmpd="sng" algn="ctr">
+                      <a:solidFill>
+                        <a:schemeClr val="tx1"/>
+                      </a:solidFill>
+                      <a:prstDash val="solid"/>
+                      <a:round/>
+                      <a:headEnd type="none" w="med" len="med"/>
+                      <a:tailEnd type="none" w="med" len="med"/>
+                    </a:lnT>
+                    <a:lnB w="12700" cap="flat" cmpd="sng" algn="ctr">
+                      <a:solidFill>
+                        <a:schemeClr val="tx1"/>
+                      </a:solidFill>
+                      <a:prstDash val="solid"/>
+                      <a:round/>
+                      <a:headEnd type="none" w="med" len="med"/>
+                      <a:tailEnd type="none" w="med" len="med"/>
+                    </a:lnB>
+                    <a:noFill/>
+                  </a:tcPr>
+                </a:tc>
+                <a:tc>
+                  <a:txBody>
+                    <a:bodyPr/>
+                    <a:lstStyle/>
+                    <a:p>
+                      <a:pPr marL="0" marR="0">
+                        <a:lnSpc>
+                          <a:spcPct val="115000"/>
+                        </a:lnSpc>
+                        <a:buNone/>
+                      </a:pPr>
+                      <a:endParaRPr lang="en-US" sz="1100" kern="100">
+                        <a:effectLst/>
+                        <a:latin typeface="Aptos" panose="020B0004020202020204" pitchFamily="34" charset="0"/>
+                        <a:ea typeface="Aptos" panose="020B0004020202020204" pitchFamily="34" charset="0"/>
+                        <a:cs typeface="Aptos" panose="020B0004020202020204" pitchFamily="34" charset="0"/>
+                      </a:endParaRPr>
+                    </a:p>
+                  </a:txBody>
+                  <a:tcPr marL="0" marR="0" marT="0" marB="0">
+                    <a:lnL w="12700" cap="flat" cmpd="sng" algn="ctr">
+                      <a:solidFill>
+                        <a:schemeClr val="tx1"/>
+                      </a:solidFill>
+                      <a:prstDash val="solid"/>
+                      <a:round/>
+                      <a:headEnd type="none" w="med" len="med"/>
+                      <a:tailEnd type="none" w="med" len="med"/>
+                    </a:lnL>
+                    <a:lnR w="12700" cap="flat" cmpd="sng" algn="ctr">
+                      <a:solidFill>
+                        <a:schemeClr val="tx1"/>
+                      </a:solidFill>
+                      <a:prstDash val="solid"/>
+                      <a:round/>
+                      <a:headEnd type="none" w="med" len="med"/>
+                      <a:tailEnd type="none" w="med" len="med"/>
+                    </a:lnR>
+                    <a:lnT w="12700" cap="flat" cmpd="sng" algn="ctr">
+                      <a:solidFill>
+                        <a:schemeClr val="tx1"/>
+                      </a:solidFill>
+                      <a:prstDash val="solid"/>
+                      <a:round/>
+                      <a:headEnd type="none" w="med" len="med"/>
+                      <a:tailEnd type="none" w="med" len="med"/>
+                    </a:lnT>
+                    <a:lnB w="12700" cap="flat" cmpd="sng" algn="ctr">
+                      <a:solidFill>
+                        <a:schemeClr val="tx1"/>
+                      </a:solidFill>
+                      <a:prstDash val="solid"/>
+                      <a:round/>
+                      <a:headEnd type="none" w="med" len="med"/>
+                      <a:tailEnd type="none" w="med" len="med"/>
+                    </a:lnB>
+                    <a:noFill/>
+                  </a:tcPr>
+                </a:tc>
+                <a:tc>
+                  <a:txBody>
+                    <a:bodyPr/>
+                    <a:lstStyle/>
+                    <a:p>
+                      <a:pPr marL="0" marR="0">
+                        <a:lnSpc>
+                          <a:spcPct val="115000"/>
+                        </a:lnSpc>
+                        <a:buNone/>
+                      </a:pPr>
+                      <a:endParaRPr lang="en-US" sz="1100" kern="100">
+                        <a:effectLst/>
+                        <a:latin typeface="Aptos" panose="020B0004020202020204" pitchFamily="34" charset="0"/>
+                        <a:ea typeface="Aptos" panose="020B0004020202020204" pitchFamily="34" charset="0"/>
+                        <a:cs typeface="Aptos" panose="020B0004020202020204" pitchFamily="34" charset="0"/>
+                      </a:endParaRPr>
+                    </a:p>
+                  </a:txBody>
+                  <a:tcPr marL="68580" marR="68580" marT="0" marB="0">
+                    <a:lnL w="12700" cap="flat" cmpd="sng" algn="ctr">
+                      <a:solidFill>
+                        <a:schemeClr val="tx1"/>
+                      </a:solidFill>
+                      <a:prstDash val="solid"/>
+                      <a:round/>
+                      <a:headEnd type="none" w="med" len="med"/>
+                      <a:tailEnd type="none" w="med" len="med"/>
+                    </a:lnL>
+                    <a:lnR w="12700" cap="flat" cmpd="sng" algn="ctr">
+                      <a:solidFill>
+                        <a:schemeClr val="tx1"/>
+                      </a:solidFill>
+                      <a:prstDash val="solid"/>
+                      <a:round/>
+                      <a:headEnd type="none" w="med" len="med"/>
+                      <a:tailEnd type="none" w="med" len="med"/>
+                    </a:lnR>
+                    <a:lnT w="12700" cap="flat" cmpd="sng" algn="ctr">
+                      <a:solidFill>
+                        <a:schemeClr val="tx1"/>
+                      </a:solidFill>
+                      <a:prstDash val="solid"/>
+                      <a:round/>
+                      <a:headEnd type="none" w="med" len="med"/>
+                      <a:tailEnd type="none" w="med" len="med"/>
+                    </a:lnT>
+                    <a:lnB w="12700" cap="flat" cmpd="sng" algn="ctr">
+                      <a:solidFill>
+                        <a:schemeClr val="tx1"/>
+                      </a:solidFill>
+                      <a:prstDash val="solid"/>
+                      <a:round/>
+                      <a:headEnd type="none" w="med" len="med"/>
+                      <a:tailEnd type="none" w="med" len="med"/>
+                    </a:lnB>
+                    <a:noFill/>
+                  </a:tcPr>
+                </a:tc>
+                <a:tc>
+                  <a:txBody>
+                    <a:bodyPr/>
+                    <a:lstStyle/>
+                    <a:p>
+                      <a:pPr marL="0" marR="0">
+                        <a:lnSpc>
+                          <a:spcPct val="115000"/>
+                        </a:lnSpc>
+                        <a:buNone/>
+                      </a:pPr>
+                      <a:endParaRPr lang="en-US" sz="1100" kern="100" dirty="0">
+                        <a:effectLst/>
+                        <a:latin typeface="Aptos" panose="020B0004020202020204" pitchFamily="34" charset="0"/>
+                        <a:ea typeface="Aptos" panose="020B0004020202020204" pitchFamily="34" charset="0"/>
+                        <a:cs typeface="Aptos" panose="020B0004020202020204" pitchFamily="34" charset="0"/>
+                      </a:endParaRPr>
+                    </a:p>
+                  </a:txBody>
+                  <a:tcPr marL="68580" marR="68580" marT="0" marB="0">
+                    <a:lnL w="12700" cap="flat" cmpd="sng" algn="ctr">
+                      <a:solidFill>
+                        <a:schemeClr val="tx1"/>
+                      </a:solidFill>
+                      <a:prstDash val="solid"/>
+                      <a:round/>
+                      <a:headEnd type="none" w="med" len="med"/>
+                      <a:tailEnd type="none" w="med" len="med"/>
+                    </a:lnL>
+                    <a:lnR w="12700" cap="flat" cmpd="sng" algn="ctr">
+                      <a:solidFill>
+                        <a:schemeClr val="tx1"/>
+                      </a:solidFill>
+                      <a:prstDash val="solid"/>
+                      <a:round/>
+                      <a:headEnd type="none" w="med" len="med"/>
+                      <a:tailEnd type="none" w="med" len="med"/>
+                    </a:lnR>
+                    <a:lnT w="12700" cap="flat" cmpd="sng" algn="ctr">
+                      <a:solidFill>
+                        <a:schemeClr val="tx1"/>
+                      </a:solidFill>
+                      <a:prstDash val="solid"/>
+                      <a:round/>
+                      <a:headEnd type="none" w="med" len="med"/>
+                      <a:tailEnd type="none" w="med" len="med"/>
+                    </a:lnT>
+                    <a:lnB w="12700" cap="flat" cmpd="sng" algn="ctr">
+                      <a:solidFill>
+                        <a:schemeClr val="tx1"/>
+                      </a:solidFill>
+                      <a:prstDash val="solid"/>
+                      <a:round/>
+                      <a:headEnd type="none" w="med" len="med"/>
+                      <a:tailEnd type="none" w="med" len="med"/>
+                    </a:lnB>
+                    <a:noFill/>
+                  </a:tcPr>
+                </a:tc>
+                <a:extLst>
+                  <a:ext uri="{0D108BD9-81ED-4DB2-BD59-A6C34878D82A}">
+                    <a16:rowId xmlns:a16="http://schemas.microsoft.com/office/drawing/2014/main" val="59466315"/>
+                  </a:ext>
+                </a:extLst>
+              </a:tr>
+            </a:tbl>
+          </a:graphicData>
+        </a:graphic>
+      </p:graphicFrame>
+      <p:sp>
+        <p:nvSpPr>
+          <p:cNvPr id="7" name="TextBox 6">
+            <a:extLst>
+              <a:ext uri="{FF2B5EF4-FFF2-40B4-BE49-F238E27FC236}">
+                <a16:creationId xmlns:a16="http://schemas.microsoft.com/office/drawing/2014/main" id="{A0F2237D-0F23-4645-786B-3DA114E5B169}"/>
+              </a:ext>
+            </a:extLst>
+          </p:cNvPr>
+          <p:cNvSpPr txBox="1"/>
+          <p:nvPr/>
+        </p:nvSpPr>
+        <p:spPr>
+          <a:xfrm>
+            <a:off x="9459532" y="1287887"/>
+            <a:ext cx="2009105" cy="369332"/>
+          </a:xfrm>
+          <a:prstGeom prst="rect">
+            <a:avLst/>
+          </a:prstGeom>
+          <a:solidFill>
+            <a:schemeClr val="accent1"/>
+          </a:solidFill>
+        </p:spPr>
+        <p:txBody>
+          <a:bodyPr wrap="square" rtlCol="0">
+            <a:spAutoFit/>
+          </a:bodyPr>
+          <a:lstStyle/>
+          <a:p>
+            <a:pPr algn="ctr"/>
+            <a:r>
+              <a:rPr lang="en-US">
+                <a:solidFill>
+                  <a:schemeClr val="bg1"/>
+                </a:solidFill>
+              </a:rPr>
+              <a:t>Updated</a:t>
+            </a:r>
+          </a:p>
+        </p:txBody>
+      </p:sp>
+    </p:spTree>
+    <p:extLst>
+      <p:ext uri="{BB962C8B-B14F-4D97-AF65-F5344CB8AC3E}">
+        <p14:creationId xmlns:p14="http://schemas.microsoft.com/office/powerpoint/2010/main" val="2390166092"/>
+      </p:ext>
+    </p:extLst>
+  </p:cSld>
+  <p:clrMapOvr>
+    <a:masterClrMapping/>
+  </p:clrMapOvr>
+</p:sld>
+</file>
+
+<file path=ppt/slides/slide14.xml><?xml version="1.0" encoding="utf-8"?>
+<p:sld xmlns:a="http://schemas.openxmlformats.org/drawingml/2006/main" xmlns:r="http://schemas.openxmlformats.org/officeDocument/2006/relationships" xmlns:p="http://schemas.openxmlformats.org/presentationml/2006/main">
+  <p:cSld>
+    <p:spTree>
+      <p:nvGrpSpPr>
+        <p:cNvPr id="1" name="">
+          <a:extLst>
+            <a:ext uri="{FF2B5EF4-FFF2-40B4-BE49-F238E27FC236}">
+              <a16:creationId xmlns:a16="http://schemas.microsoft.com/office/drawing/2014/main" id="{01FC0C91-BC37-37EF-59A7-75B2B56A8E26}"/>
+            </a:ext>
+          </a:extLst>
+        </p:cNvPr>
+        <p:cNvGrpSpPr/>
+        <p:nvPr/>
+      </p:nvGrpSpPr>
+      <p:grpSpPr>
+        <a:xfrm>
+          <a:off x="0" y="0"/>
+          <a:ext cx="0" cy="0"/>
+          <a:chOff x="0" y="0"/>
+          <a:chExt cx="0" cy="0"/>
+        </a:xfrm>
+      </p:grpSpPr>
+      <p:sp>
+        <p:nvSpPr>
+          <p:cNvPr id="2" name="Title 1">
+            <a:extLst>
+              <a:ext uri="{FF2B5EF4-FFF2-40B4-BE49-F238E27FC236}">
+                <a16:creationId xmlns:a16="http://schemas.microsoft.com/office/drawing/2014/main" id="{FFE1AA94-AB99-BB22-3E3F-7E8FC7F5F6D3}"/>
+              </a:ext>
+            </a:extLst>
+          </p:cNvPr>
+          <p:cNvSpPr>
+            <a:spLocks noGrp="1"/>
+          </p:cNvSpPr>
+          <p:nvPr>
+            <p:ph type="title"/>
+          </p:nvPr>
+        </p:nvSpPr>
+        <p:spPr>
+          <a:xfrm>
+            <a:off x="2784764" y="0"/>
+            <a:ext cx="7225145" cy="670096"/>
+          </a:xfrm>
+        </p:spPr>
+        <p:txBody>
+          <a:bodyPr>
+            <a:noAutofit/>
+          </a:bodyPr>
+          <a:lstStyle/>
+          <a:p>
+            <a:r>
+              <a:rPr lang="en-US" sz="3600" dirty="0"/>
+              <a:t>HESTO Support</a:t>
+            </a:r>
+            <a:endParaRPr lang="en-US" sz="2400" dirty="0"/>
+          </a:p>
+        </p:txBody>
+      </p:sp>
+      <p:sp>
+        <p:nvSpPr>
           <p:cNvPr id="5" name="Text Placeholder 4">
             <a:extLst>
               <a:ext uri="{FF2B5EF4-FFF2-40B4-BE49-F238E27FC236}">
-                <a16:creationId xmlns:a16="http://schemas.microsoft.com/office/drawing/2014/main" id="{1C9DE632-63B2-9F34-2CA2-880BCE17E979}"/>
+                <a16:creationId xmlns:a16="http://schemas.microsoft.com/office/drawing/2014/main" id="{4B187307-2922-F404-48DA-61ADD64FEFF8}"/>
               </a:ext>
             </a:extLst>
           </p:cNvPr>
@@ -4552,7 +6782,7 @@
         </p:nvSpPr>
         <p:spPr>
           <a:xfrm>
-            <a:off x="293600" y="4745182"/>
+            <a:off x="414250" y="1214582"/>
             <a:ext cx="11115618" cy="1976293"/>
           </a:xfrm>
           <a:prstGeom prst="rect">
@@ -4747,7 +6977,7 @@
               <a:buNone/>
             </a:pPr>
             <a:r>
-              <a:rPr lang="en-US" sz="1800" b="1">
+              <a:rPr lang="en-US" sz="1800" b="1" dirty="0">
                 <a:solidFill>
                   <a:schemeClr val="tx1"/>
                 </a:solidFill>
@@ -4755,7 +6985,7 @@
               </a:rPr>
               <a:t>Requested HESTO Support</a:t>
             </a:r>
-            <a:endParaRPr lang="en-US" sz="1800">
+            <a:endParaRPr lang="en-US" sz="1800" dirty="0">
               <a:solidFill>
                 <a:schemeClr val="tx1"/>
               </a:solidFill>
@@ -4764,7 +6994,7 @@
           </a:p>
           <a:p>
             <a:r>
-              <a:rPr lang="en-US" sz="1800">
+              <a:rPr lang="en-US" sz="1800" dirty="0">
                 <a:solidFill>
                   <a:schemeClr val="tx1"/>
                 </a:solidFill>
@@ -4782,7 +7012,7 @@
               <a:buChar char="§"/>
             </a:pPr>
             <a:r>
-              <a:rPr lang="en-US" sz="1800" err="1">
+              <a:rPr lang="en-US" sz="1800" dirty="0" err="1">
                 <a:solidFill>
                   <a:schemeClr val="tx1"/>
                 </a:solidFill>
@@ -4790,7 +7020,7 @@
               </a:rPr>
               <a:t>Xxx</a:t>
             </a:r>
-            <a:endParaRPr lang="en-US" sz="1600">
+            <a:endParaRPr lang="en-US" sz="1600" dirty="0">
               <a:solidFill>
                 <a:schemeClr val="tx1"/>
               </a:solidFill>
@@ -4804,7 +7034,7 @@
           <p:cNvPr id="6" name="Slide Number Placeholder 5">
             <a:extLst>
               <a:ext uri="{FF2B5EF4-FFF2-40B4-BE49-F238E27FC236}">
-                <a16:creationId xmlns:a16="http://schemas.microsoft.com/office/drawing/2014/main" id="{2D2F8CF1-4FEB-55E6-7228-872037C533AE}"/>
+                <a16:creationId xmlns:a16="http://schemas.microsoft.com/office/drawing/2014/main" id="{144F6520-8C86-7FE5-88D4-CD9D5710C3FE}"/>
               </a:ext>
             </a:extLst>
           </p:cNvPr>
@@ -4822,2104 +7052,18 @@
           <a:p>
             <a:fld id="{88E0E29E-E225-F048-A964-380D52CA58AC}" type="slidenum">
               <a:rPr lang="en-US" smtClean="0"/>
-              <a:t>13</a:t>
+              <a:t>14</a:t>
             </a:fld>
             <a:endParaRPr lang="en-US"/>
           </a:p>
         </p:txBody>
       </p:sp>
-      <p:graphicFrame>
-        <p:nvGraphicFramePr>
-          <p:cNvPr id="3" name="Table 2">
-            <a:extLst>
-              <a:ext uri="{FF2B5EF4-FFF2-40B4-BE49-F238E27FC236}">
-                <a16:creationId xmlns:a16="http://schemas.microsoft.com/office/drawing/2014/main" id="{E58A4940-6014-DF40-5DE5-5C9C39AA2223}"/>
-              </a:ext>
-            </a:extLst>
-          </p:cNvPr>
-          <p:cNvGraphicFramePr>
-            <a:graphicFrameLocks noGrp="1"/>
-          </p:cNvGraphicFramePr>
-          <p:nvPr>
-            <p:extLst>
-              <p:ext uri="{D42A27DB-BD31-4B8C-83A1-F6EECF244321}">
-                <p14:modId xmlns:p14="http://schemas.microsoft.com/office/powerpoint/2010/main" val="4158225514"/>
-              </p:ext>
-            </p:extLst>
-          </p:nvPr>
-        </p:nvGraphicFramePr>
-        <p:xfrm>
-          <a:off x="401781" y="2592765"/>
-          <a:ext cx="10515600" cy="1761490"/>
-        </p:xfrm>
-        <a:graphic>
-          <a:graphicData uri="http://schemas.openxmlformats.org/drawingml/2006/table">
-            <a:tbl>
-              <a:tblPr firstRow="1" firstCol="1" bandRow="1"/>
-              <a:tblGrid>
-                <a:gridCol w="2667231">
-                  <a:extLst>
-                    <a:ext uri="{9D8B030D-6E8A-4147-A177-3AD203B41FA5}">
-                      <a16:colId xmlns:a16="http://schemas.microsoft.com/office/drawing/2014/main" val="1666455828"/>
-                    </a:ext>
-                  </a:extLst>
-                </a:gridCol>
-                <a:gridCol w="2654455">
-                  <a:extLst>
-                    <a:ext uri="{9D8B030D-6E8A-4147-A177-3AD203B41FA5}">
-                      <a16:colId xmlns:a16="http://schemas.microsoft.com/office/drawing/2014/main" val="4024254451"/>
-                    </a:ext>
-                  </a:extLst>
-                </a:gridCol>
-                <a:gridCol w="2536265">
-                  <a:extLst>
-                    <a:ext uri="{9D8B030D-6E8A-4147-A177-3AD203B41FA5}">
-                      <a16:colId xmlns:a16="http://schemas.microsoft.com/office/drawing/2014/main" val="1475550422"/>
-                    </a:ext>
-                  </a:extLst>
-                </a:gridCol>
-                <a:gridCol w="2657649">
-                  <a:extLst>
-                    <a:ext uri="{9D8B030D-6E8A-4147-A177-3AD203B41FA5}">
-                      <a16:colId xmlns:a16="http://schemas.microsoft.com/office/drawing/2014/main" val="918896136"/>
-                    </a:ext>
-                  </a:extLst>
-                </a:gridCol>
-              </a:tblGrid>
-              <a:tr h="0">
-                <a:tc>
-                  <a:txBody>
-                    <a:bodyPr/>
-                    <a:lstStyle/>
-                    <a:p>
-                      <a:pPr marL="0" marR="0">
-                        <a:lnSpc>
-                          <a:spcPct val="115000"/>
-                        </a:lnSpc>
-                        <a:buNone/>
-                      </a:pPr>
-                      <a:r>
-                        <a:rPr lang="en-US" sz="1400" kern="100">
-                          <a:solidFill>
-                            <a:srgbClr val="000000"/>
-                          </a:solidFill>
-                          <a:effectLst/>
-                          <a:latin typeface="Aptos"/>
-                          <a:ea typeface="Aptos" panose="020B0004020202020204" pitchFamily="34" charset="0"/>
-                          <a:cs typeface="Aptos" panose="020B0004020202020204" pitchFamily="34" charset="0"/>
-                        </a:rPr>
-                        <a:t>Student Name (first last)</a:t>
-                      </a:r>
-                      <a:endParaRPr lang="en-US" sz="1400" kern="100">
-                        <a:effectLst/>
-                        <a:latin typeface="Aptos" panose="020B0004020202020204" pitchFamily="34" charset="0"/>
-                        <a:ea typeface="Aptos" panose="020B0004020202020204" pitchFamily="34" charset="0"/>
-                        <a:cs typeface="Aptos" panose="020B0004020202020204" pitchFamily="34" charset="0"/>
-                      </a:endParaRPr>
-                    </a:p>
-                  </a:txBody>
-                  <a:tcPr marL="68580" marR="68580" marT="0" marB="0">
-                    <a:lnL w="12700" cap="flat" cmpd="sng" algn="ctr">
-                      <a:solidFill>
-                        <a:schemeClr val="tx1"/>
-                      </a:solidFill>
-                      <a:prstDash val="solid"/>
-                      <a:round/>
-                      <a:headEnd type="none" w="med" len="med"/>
-                      <a:tailEnd type="none" w="med" len="med"/>
-                    </a:lnL>
-                    <a:lnR w="12700" cap="flat" cmpd="sng" algn="ctr">
-                      <a:solidFill>
-                        <a:schemeClr val="tx1"/>
-                      </a:solidFill>
-                      <a:prstDash val="solid"/>
-                      <a:round/>
-                      <a:headEnd type="none" w="med" len="med"/>
-                      <a:tailEnd type="none" w="med" len="med"/>
-                    </a:lnR>
-                    <a:lnT w="12700" cap="flat" cmpd="sng" algn="ctr">
-                      <a:solidFill>
-                        <a:schemeClr val="tx1"/>
-                      </a:solidFill>
-                      <a:prstDash val="solid"/>
-                      <a:round/>
-                      <a:headEnd type="none" w="med" len="med"/>
-                      <a:tailEnd type="none" w="med" len="med"/>
-                    </a:lnT>
-                    <a:lnB w="12700" cap="flat" cmpd="sng" algn="ctr">
-                      <a:solidFill>
-                        <a:schemeClr val="tx1"/>
-                      </a:solidFill>
-                      <a:prstDash val="solid"/>
-                      <a:round/>
-                      <a:headEnd type="none" w="med" len="med"/>
-                      <a:tailEnd type="none" w="med" len="med"/>
-                    </a:lnB>
-                    <a:solidFill>
-                      <a:srgbClr val="E8E8E8"/>
-                    </a:solidFill>
-                  </a:tcPr>
-                </a:tc>
-                <a:tc>
-                  <a:txBody>
-                    <a:bodyPr/>
-                    <a:lstStyle/>
-                    <a:p>
-                      <a:pPr marL="0" marR="0">
-                        <a:lnSpc>
-                          <a:spcPct val="115000"/>
-                        </a:lnSpc>
-                        <a:buNone/>
-                      </a:pPr>
-                      <a:r>
-                        <a:rPr lang="en-US" sz="1400" kern="100">
-                          <a:solidFill>
-                            <a:srgbClr val="000000"/>
-                          </a:solidFill>
-                          <a:effectLst/>
-                          <a:latin typeface="Aptos" panose="020B0004020202020204" pitchFamily="34" charset="0"/>
-                          <a:ea typeface="Aptos" panose="020B0004020202020204" pitchFamily="34" charset="0"/>
-                          <a:cs typeface="Aptos" panose="020B0004020202020204" pitchFamily="34" charset="0"/>
-                        </a:rPr>
-                        <a:t>Major</a:t>
-                      </a:r>
-                      <a:endParaRPr lang="en-US" sz="1400" kern="100">
-                        <a:effectLst/>
-                        <a:latin typeface="Aptos" panose="020B0004020202020204" pitchFamily="34" charset="0"/>
-                        <a:ea typeface="Aptos" panose="020B0004020202020204" pitchFamily="34" charset="0"/>
-                        <a:cs typeface="Aptos" panose="020B0004020202020204" pitchFamily="34" charset="0"/>
-                      </a:endParaRPr>
-                    </a:p>
-                  </a:txBody>
-                  <a:tcPr marL="0" marR="0" marT="0" marB="0">
-                    <a:lnL w="12700" cap="flat" cmpd="sng" algn="ctr">
-                      <a:solidFill>
-                        <a:schemeClr val="tx1"/>
-                      </a:solidFill>
-                      <a:prstDash val="solid"/>
-                      <a:round/>
-                      <a:headEnd type="none" w="med" len="med"/>
-                      <a:tailEnd type="none" w="med" len="med"/>
-                    </a:lnL>
-                    <a:lnR w="12700" cap="flat" cmpd="sng" algn="ctr">
-                      <a:solidFill>
-                        <a:schemeClr val="tx1"/>
-                      </a:solidFill>
-                      <a:prstDash val="solid"/>
-                      <a:round/>
-                      <a:headEnd type="none" w="med" len="med"/>
-                      <a:tailEnd type="none" w="med" len="med"/>
-                    </a:lnR>
-                    <a:lnT w="12700" cap="flat" cmpd="sng" algn="ctr">
-                      <a:solidFill>
-                        <a:schemeClr val="tx1"/>
-                      </a:solidFill>
-                      <a:prstDash val="solid"/>
-                      <a:round/>
-                      <a:headEnd type="none" w="med" len="med"/>
-                      <a:tailEnd type="none" w="med" len="med"/>
-                    </a:lnT>
-                    <a:lnB w="12700" cap="flat" cmpd="sng" algn="ctr">
-                      <a:solidFill>
-                        <a:schemeClr val="tx1"/>
-                      </a:solidFill>
-                      <a:prstDash val="solid"/>
-                      <a:round/>
-                      <a:headEnd type="none" w="med" len="med"/>
-                      <a:tailEnd type="none" w="med" len="med"/>
-                    </a:lnB>
-                    <a:solidFill>
-                      <a:srgbClr val="E8E8E8"/>
-                    </a:solidFill>
-                  </a:tcPr>
-                </a:tc>
-                <a:tc>
-                  <a:txBody>
-                    <a:bodyPr/>
-                    <a:lstStyle/>
-                    <a:p>
-                      <a:pPr marL="0" marR="0">
-                        <a:lnSpc>
-                          <a:spcPct val="115000"/>
-                        </a:lnSpc>
-                        <a:buNone/>
-                      </a:pPr>
-                      <a:r>
-                        <a:rPr lang="en-US" sz="1400" kern="100">
-                          <a:solidFill>
-                            <a:srgbClr val="000000"/>
-                          </a:solidFill>
-                          <a:effectLst/>
-                          <a:latin typeface="Aptos" panose="020B0004020202020204" pitchFamily="34" charset="0"/>
-                          <a:ea typeface="Aptos" panose="020B0004020202020204" pitchFamily="34" charset="0"/>
-                          <a:cs typeface="Aptos" panose="020B0004020202020204" pitchFamily="34" charset="0"/>
-                        </a:rPr>
-                        <a:t>Affiliation (School, University, etc.)</a:t>
-                      </a:r>
-                      <a:endParaRPr lang="en-US" sz="1400" kern="100">
-                        <a:effectLst/>
-                        <a:latin typeface="Aptos" panose="020B0004020202020204" pitchFamily="34" charset="0"/>
-                        <a:ea typeface="Aptos" panose="020B0004020202020204" pitchFamily="34" charset="0"/>
-                        <a:cs typeface="Aptos" panose="020B0004020202020204" pitchFamily="34" charset="0"/>
-                      </a:endParaRPr>
-                    </a:p>
-                  </a:txBody>
-                  <a:tcPr marL="68580" marR="68580" marT="0" marB="0">
-                    <a:lnL w="12700" cap="flat" cmpd="sng" algn="ctr">
-                      <a:solidFill>
-                        <a:schemeClr val="tx1"/>
-                      </a:solidFill>
-                      <a:prstDash val="solid"/>
-                      <a:round/>
-                      <a:headEnd type="none" w="med" len="med"/>
-                      <a:tailEnd type="none" w="med" len="med"/>
-                    </a:lnL>
-                    <a:lnR w="12700" cap="flat" cmpd="sng" algn="ctr">
-                      <a:solidFill>
-                        <a:schemeClr val="tx1"/>
-                      </a:solidFill>
-                      <a:prstDash val="solid"/>
-                      <a:round/>
-                      <a:headEnd type="none" w="med" len="med"/>
-                      <a:tailEnd type="none" w="med" len="med"/>
-                    </a:lnR>
-                    <a:lnT w="12700" cap="flat" cmpd="sng" algn="ctr">
-                      <a:solidFill>
-                        <a:schemeClr val="tx1"/>
-                      </a:solidFill>
-                      <a:prstDash val="solid"/>
-                      <a:round/>
-                      <a:headEnd type="none" w="med" len="med"/>
-                      <a:tailEnd type="none" w="med" len="med"/>
-                    </a:lnT>
-                    <a:lnB w="12700" cap="flat" cmpd="sng" algn="ctr">
-                      <a:solidFill>
-                        <a:schemeClr val="tx1"/>
-                      </a:solidFill>
-                      <a:prstDash val="solid"/>
-                      <a:round/>
-                      <a:headEnd type="none" w="med" len="med"/>
-                      <a:tailEnd type="none" w="med" len="med"/>
-                    </a:lnB>
-                    <a:solidFill>
-                      <a:srgbClr val="E8E8E8"/>
-                    </a:solidFill>
-                  </a:tcPr>
-                </a:tc>
-                <a:tc>
-                  <a:txBody>
-                    <a:bodyPr/>
-                    <a:lstStyle/>
-                    <a:p>
-                      <a:pPr marL="0" marR="0">
-                        <a:lnSpc>
-                          <a:spcPct val="115000"/>
-                        </a:lnSpc>
-                        <a:buNone/>
-                      </a:pPr>
-                      <a:r>
-                        <a:rPr lang="en-US" sz="1400" kern="100">
-                          <a:solidFill>
-                            <a:srgbClr val="000000"/>
-                          </a:solidFill>
-                          <a:effectLst/>
-                          <a:latin typeface="Aptos" panose="020B0004020202020204" pitchFamily="34" charset="0"/>
-                          <a:ea typeface="Aptos" panose="020B0004020202020204" pitchFamily="34" charset="0"/>
-                          <a:cs typeface="Aptos" panose="020B0004020202020204" pitchFamily="34" charset="0"/>
-                        </a:rPr>
-                        <a:t>Level (High School, Undergrad, Grad, PhD)</a:t>
-                      </a:r>
-                      <a:endParaRPr lang="en-US" sz="1400" kern="100">
-                        <a:effectLst/>
-                        <a:latin typeface="Aptos" panose="020B0004020202020204" pitchFamily="34" charset="0"/>
-                        <a:ea typeface="Aptos" panose="020B0004020202020204" pitchFamily="34" charset="0"/>
-                        <a:cs typeface="Aptos" panose="020B0004020202020204" pitchFamily="34" charset="0"/>
-                      </a:endParaRPr>
-                    </a:p>
-                  </a:txBody>
-                  <a:tcPr marL="68580" marR="68580" marT="0" marB="0">
-                    <a:lnL w="12700" cap="flat" cmpd="sng" algn="ctr">
-                      <a:solidFill>
-                        <a:schemeClr val="tx1"/>
-                      </a:solidFill>
-                      <a:prstDash val="solid"/>
-                      <a:round/>
-                      <a:headEnd type="none" w="med" len="med"/>
-                      <a:tailEnd type="none" w="med" len="med"/>
-                    </a:lnL>
-                    <a:lnR w="12700" cap="flat" cmpd="sng" algn="ctr">
-                      <a:solidFill>
-                        <a:schemeClr val="tx1"/>
-                      </a:solidFill>
-                      <a:prstDash val="solid"/>
-                      <a:round/>
-                      <a:headEnd type="none" w="med" len="med"/>
-                      <a:tailEnd type="none" w="med" len="med"/>
-                    </a:lnR>
-                    <a:lnT w="12700" cap="flat" cmpd="sng" algn="ctr">
-                      <a:solidFill>
-                        <a:schemeClr val="tx1"/>
-                      </a:solidFill>
-                      <a:prstDash val="solid"/>
-                      <a:round/>
-                      <a:headEnd type="none" w="med" len="med"/>
-                      <a:tailEnd type="none" w="med" len="med"/>
-                    </a:lnT>
-                    <a:lnB w="12700" cap="flat" cmpd="sng" algn="ctr">
-                      <a:solidFill>
-                        <a:schemeClr val="tx1"/>
-                      </a:solidFill>
-                      <a:prstDash val="solid"/>
-                      <a:round/>
-                      <a:headEnd type="none" w="med" len="med"/>
-                      <a:tailEnd type="none" w="med" len="med"/>
-                    </a:lnB>
-                    <a:solidFill>
-                      <a:srgbClr val="E8E8E8"/>
-                    </a:solidFill>
-                  </a:tcPr>
-                </a:tc>
-                <a:extLst>
-                  <a:ext uri="{0D108BD9-81ED-4DB2-BD59-A6C34878D82A}">
-                    <a16:rowId xmlns:a16="http://schemas.microsoft.com/office/drawing/2014/main" val="2818315040"/>
-                  </a:ext>
-                </a:extLst>
-              </a:tr>
-              <a:tr h="0">
-                <a:tc>
-                  <a:txBody>
-                    <a:bodyPr/>
-                    <a:lstStyle/>
-                    <a:p>
-                      <a:pPr marL="0" marR="0">
-                        <a:lnSpc>
-                          <a:spcPct val="115000"/>
-                        </a:lnSpc>
-                        <a:buNone/>
-                      </a:pPr>
-                      <a:r>
-                        <a:rPr lang="en-US" sz="1100" kern="100" dirty="0">
-                          <a:effectLst/>
-                          <a:latin typeface="Aptos" panose="020B0004020202020204" pitchFamily="34" charset="0"/>
-                          <a:ea typeface="Aptos" panose="020B0004020202020204" pitchFamily="34" charset="0"/>
-                          <a:cs typeface="Aptos" panose="020B0004020202020204" pitchFamily="34" charset="0"/>
-                        </a:rPr>
-                        <a:t>John Doe</a:t>
-                      </a:r>
-                    </a:p>
-                  </a:txBody>
-                  <a:tcPr marL="68580" marR="68580" marT="0" marB="0">
-                    <a:lnL w="12700" cap="flat" cmpd="sng" algn="ctr">
-                      <a:solidFill>
-                        <a:schemeClr val="tx1"/>
-                      </a:solidFill>
-                      <a:prstDash val="solid"/>
-                      <a:round/>
-                      <a:headEnd type="none" w="med" len="med"/>
-                      <a:tailEnd type="none" w="med" len="med"/>
-                    </a:lnL>
-                    <a:lnR w="12700" cap="flat" cmpd="sng" algn="ctr">
-                      <a:solidFill>
-                        <a:schemeClr val="tx1"/>
-                      </a:solidFill>
-                      <a:prstDash val="solid"/>
-                      <a:round/>
-                      <a:headEnd type="none" w="med" len="med"/>
-                      <a:tailEnd type="none" w="med" len="med"/>
-                    </a:lnR>
-                    <a:lnT w="12700" cap="flat" cmpd="sng" algn="ctr">
-                      <a:solidFill>
-                        <a:schemeClr val="tx1"/>
-                      </a:solidFill>
-                      <a:prstDash val="solid"/>
-                      <a:round/>
-                      <a:headEnd type="none" w="med" len="med"/>
-                      <a:tailEnd type="none" w="med" len="med"/>
-                    </a:lnT>
-                    <a:lnB w="12700" cap="flat" cmpd="sng" algn="ctr">
-                      <a:solidFill>
-                        <a:schemeClr val="tx1"/>
-                      </a:solidFill>
-                      <a:prstDash val="solid"/>
-                      <a:round/>
-                      <a:headEnd type="none" w="med" len="med"/>
-                      <a:tailEnd type="none" w="med" len="med"/>
-                    </a:lnB>
-                    <a:noFill/>
-                  </a:tcPr>
-                </a:tc>
-                <a:tc>
-                  <a:txBody>
-                    <a:bodyPr/>
-                    <a:lstStyle/>
-                    <a:p>
-                      <a:pPr marL="0" marR="0">
-                        <a:lnSpc>
-                          <a:spcPct val="115000"/>
-                        </a:lnSpc>
-                        <a:buNone/>
-                      </a:pPr>
-                      <a:r>
-                        <a:rPr lang="en-US" sz="1100" kern="100" dirty="0">
-                          <a:effectLst/>
-                          <a:latin typeface="Aptos" panose="020B0004020202020204" pitchFamily="34" charset="0"/>
-                          <a:ea typeface="Aptos" panose="020B0004020202020204" pitchFamily="34" charset="0"/>
-                          <a:cs typeface="Aptos" panose="020B0004020202020204" pitchFamily="34" charset="0"/>
-                        </a:rPr>
-                        <a:t>Physics</a:t>
-                      </a:r>
-                    </a:p>
-                  </a:txBody>
-                  <a:tcPr marL="0" marR="0" marT="0" marB="0">
-                    <a:lnL w="12700" cap="flat" cmpd="sng" algn="ctr">
-                      <a:solidFill>
-                        <a:schemeClr val="tx1"/>
-                      </a:solidFill>
-                      <a:prstDash val="solid"/>
-                      <a:round/>
-                      <a:headEnd type="none" w="med" len="med"/>
-                      <a:tailEnd type="none" w="med" len="med"/>
-                    </a:lnL>
-                    <a:lnR w="12700" cap="flat" cmpd="sng" algn="ctr">
-                      <a:solidFill>
-                        <a:schemeClr val="tx1"/>
-                      </a:solidFill>
-                      <a:prstDash val="solid"/>
-                      <a:round/>
-                      <a:headEnd type="none" w="med" len="med"/>
-                      <a:tailEnd type="none" w="med" len="med"/>
-                    </a:lnR>
-                    <a:lnT w="12700" cap="flat" cmpd="sng" algn="ctr">
-                      <a:solidFill>
-                        <a:schemeClr val="tx1"/>
-                      </a:solidFill>
-                      <a:prstDash val="solid"/>
-                      <a:round/>
-                      <a:headEnd type="none" w="med" len="med"/>
-                      <a:tailEnd type="none" w="med" len="med"/>
-                    </a:lnT>
-                    <a:lnB w="12700" cap="flat" cmpd="sng" algn="ctr">
-                      <a:solidFill>
-                        <a:schemeClr val="tx1"/>
-                      </a:solidFill>
-                      <a:prstDash val="solid"/>
-                      <a:round/>
-                      <a:headEnd type="none" w="med" len="med"/>
-                      <a:tailEnd type="none" w="med" len="med"/>
-                    </a:lnB>
-                    <a:noFill/>
-                  </a:tcPr>
-                </a:tc>
-                <a:tc>
-                  <a:txBody>
-                    <a:bodyPr/>
-                    <a:lstStyle/>
-                    <a:p>
-                      <a:pPr marL="0" marR="0">
-                        <a:lnSpc>
-                          <a:spcPct val="115000"/>
-                        </a:lnSpc>
-                        <a:buNone/>
-                      </a:pPr>
-                      <a:r>
-                        <a:rPr lang="en-US" sz="1100" kern="100" dirty="0">
-                          <a:effectLst/>
-                          <a:latin typeface="Aptos" panose="020B0004020202020204" pitchFamily="34" charset="0"/>
-                          <a:ea typeface="Aptos" panose="020B0004020202020204" pitchFamily="34" charset="0"/>
-                          <a:cs typeface="Aptos" panose="020B0004020202020204" pitchFamily="34" charset="0"/>
-                        </a:rPr>
-                        <a:t>University of Alabama</a:t>
-                      </a:r>
-                    </a:p>
-                  </a:txBody>
-                  <a:tcPr marL="68580" marR="68580" marT="0" marB="0">
-                    <a:lnL w="12700" cap="flat" cmpd="sng" algn="ctr">
-                      <a:solidFill>
-                        <a:schemeClr val="tx1"/>
-                      </a:solidFill>
-                      <a:prstDash val="solid"/>
-                      <a:round/>
-                      <a:headEnd type="none" w="med" len="med"/>
-                      <a:tailEnd type="none" w="med" len="med"/>
-                    </a:lnL>
-                    <a:lnR w="12700" cap="flat" cmpd="sng" algn="ctr">
-                      <a:solidFill>
-                        <a:schemeClr val="tx1"/>
-                      </a:solidFill>
-                      <a:prstDash val="solid"/>
-                      <a:round/>
-                      <a:headEnd type="none" w="med" len="med"/>
-                      <a:tailEnd type="none" w="med" len="med"/>
-                    </a:lnR>
-                    <a:lnT w="12700" cap="flat" cmpd="sng" algn="ctr">
-                      <a:solidFill>
-                        <a:schemeClr val="tx1"/>
-                      </a:solidFill>
-                      <a:prstDash val="solid"/>
-                      <a:round/>
-                      <a:headEnd type="none" w="med" len="med"/>
-                      <a:tailEnd type="none" w="med" len="med"/>
-                    </a:lnT>
-                    <a:lnB w="12700" cap="flat" cmpd="sng" algn="ctr">
-                      <a:solidFill>
-                        <a:schemeClr val="tx1"/>
-                      </a:solidFill>
-                      <a:prstDash val="solid"/>
-                      <a:round/>
-                      <a:headEnd type="none" w="med" len="med"/>
-                      <a:tailEnd type="none" w="med" len="med"/>
-                    </a:lnB>
-                    <a:noFill/>
-                  </a:tcPr>
-                </a:tc>
-                <a:tc>
-                  <a:txBody>
-                    <a:bodyPr/>
-                    <a:lstStyle/>
-                    <a:p>
-                      <a:pPr marL="0" marR="0">
-                        <a:lnSpc>
-                          <a:spcPct val="115000"/>
-                        </a:lnSpc>
-                        <a:buNone/>
-                      </a:pPr>
-                      <a:r>
-                        <a:rPr lang="en-US" sz="1100" kern="100" dirty="0">
-                          <a:effectLst/>
-                          <a:latin typeface="Aptos" panose="020B0004020202020204" pitchFamily="34" charset="0"/>
-                          <a:ea typeface="Aptos" panose="020B0004020202020204" pitchFamily="34" charset="0"/>
-                          <a:cs typeface="Aptos" panose="020B0004020202020204" pitchFamily="34" charset="0"/>
-                        </a:rPr>
-                        <a:t>Undergrad</a:t>
-                      </a:r>
-                    </a:p>
-                  </a:txBody>
-                  <a:tcPr marL="68580" marR="68580" marT="0" marB="0">
-                    <a:lnL w="12700" cap="flat" cmpd="sng" algn="ctr">
-                      <a:solidFill>
-                        <a:schemeClr val="tx1"/>
-                      </a:solidFill>
-                      <a:prstDash val="solid"/>
-                      <a:round/>
-                      <a:headEnd type="none" w="med" len="med"/>
-                      <a:tailEnd type="none" w="med" len="med"/>
-                    </a:lnL>
-                    <a:lnR w="12700" cap="flat" cmpd="sng" algn="ctr">
-                      <a:solidFill>
-                        <a:schemeClr val="tx1"/>
-                      </a:solidFill>
-                      <a:prstDash val="solid"/>
-                      <a:round/>
-                      <a:headEnd type="none" w="med" len="med"/>
-                      <a:tailEnd type="none" w="med" len="med"/>
-                    </a:lnR>
-                    <a:lnT w="12700" cap="flat" cmpd="sng" algn="ctr">
-                      <a:solidFill>
-                        <a:schemeClr val="tx1"/>
-                      </a:solidFill>
-                      <a:prstDash val="solid"/>
-                      <a:round/>
-                      <a:headEnd type="none" w="med" len="med"/>
-                      <a:tailEnd type="none" w="med" len="med"/>
-                    </a:lnT>
-                    <a:lnB w="12700" cap="flat" cmpd="sng" algn="ctr">
-                      <a:solidFill>
-                        <a:schemeClr val="tx1"/>
-                      </a:solidFill>
-                      <a:prstDash val="solid"/>
-                      <a:round/>
-                      <a:headEnd type="none" w="med" len="med"/>
-                      <a:tailEnd type="none" w="med" len="med"/>
-                    </a:lnB>
-                    <a:noFill/>
-                  </a:tcPr>
-                </a:tc>
-                <a:extLst>
-                  <a:ext uri="{0D108BD9-81ED-4DB2-BD59-A6C34878D82A}">
-                    <a16:rowId xmlns:a16="http://schemas.microsoft.com/office/drawing/2014/main" val="3253294115"/>
-                  </a:ext>
-                </a:extLst>
-              </a:tr>
-              <a:tr h="0">
-                <a:tc>
-                  <a:txBody>
-                    <a:bodyPr/>
-                    <a:lstStyle/>
-                    <a:p>
-                      <a:pPr marL="0" marR="0">
-                        <a:lnSpc>
-                          <a:spcPct val="115000"/>
-                        </a:lnSpc>
-                        <a:buNone/>
-                      </a:pPr>
-                      <a:endParaRPr lang="en-US" sz="1100" kern="100">
-                        <a:effectLst/>
-                        <a:latin typeface="Aptos" panose="020B0004020202020204" pitchFamily="34" charset="0"/>
-                        <a:ea typeface="Aptos" panose="020B0004020202020204" pitchFamily="34" charset="0"/>
-                        <a:cs typeface="Aptos" panose="020B0004020202020204" pitchFamily="34" charset="0"/>
-                      </a:endParaRPr>
-                    </a:p>
-                  </a:txBody>
-                  <a:tcPr marL="68580" marR="68580" marT="0" marB="0">
-                    <a:lnL w="12700" cap="flat" cmpd="sng" algn="ctr">
-                      <a:solidFill>
-                        <a:schemeClr val="tx1"/>
-                      </a:solidFill>
-                      <a:prstDash val="solid"/>
-                      <a:round/>
-                      <a:headEnd type="none" w="med" len="med"/>
-                      <a:tailEnd type="none" w="med" len="med"/>
-                    </a:lnL>
-                    <a:lnR w="12700" cap="flat" cmpd="sng" algn="ctr">
-                      <a:solidFill>
-                        <a:schemeClr val="tx1"/>
-                      </a:solidFill>
-                      <a:prstDash val="solid"/>
-                      <a:round/>
-                      <a:headEnd type="none" w="med" len="med"/>
-                      <a:tailEnd type="none" w="med" len="med"/>
-                    </a:lnR>
-                    <a:lnT w="12700" cap="flat" cmpd="sng" algn="ctr">
-                      <a:solidFill>
-                        <a:schemeClr val="tx1"/>
-                      </a:solidFill>
-                      <a:prstDash val="solid"/>
-                      <a:round/>
-                      <a:headEnd type="none" w="med" len="med"/>
-                      <a:tailEnd type="none" w="med" len="med"/>
-                    </a:lnT>
-                    <a:lnB w="12700" cap="flat" cmpd="sng" algn="ctr">
-                      <a:solidFill>
-                        <a:schemeClr val="tx1"/>
-                      </a:solidFill>
-                      <a:prstDash val="solid"/>
-                      <a:round/>
-                      <a:headEnd type="none" w="med" len="med"/>
-                      <a:tailEnd type="none" w="med" len="med"/>
-                    </a:lnB>
-                    <a:noFill/>
-                  </a:tcPr>
-                </a:tc>
-                <a:tc>
-                  <a:txBody>
-                    <a:bodyPr/>
-                    <a:lstStyle/>
-                    <a:p>
-                      <a:pPr marL="0" marR="0">
-                        <a:lnSpc>
-                          <a:spcPct val="115000"/>
-                        </a:lnSpc>
-                        <a:buNone/>
-                      </a:pPr>
-                      <a:endParaRPr lang="en-US" sz="1100" kern="100">
-                        <a:effectLst/>
-                        <a:latin typeface="Aptos" panose="020B0004020202020204" pitchFamily="34" charset="0"/>
-                        <a:ea typeface="Aptos" panose="020B0004020202020204" pitchFamily="34" charset="0"/>
-                        <a:cs typeface="Aptos" panose="020B0004020202020204" pitchFamily="34" charset="0"/>
-                      </a:endParaRPr>
-                    </a:p>
-                  </a:txBody>
-                  <a:tcPr marL="0" marR="0" marT="0" marB="0">
-                    <a:lnL w="12700" cap="flat" cmpd="sng" algn="ctr">
-                      <a:solidFill>
-                        <a:schemeClr val="tx1"/>
-                      </a:solidFill>
-                      <a:prstDash val="solid"/>
-                      <a:round/>
-                      <a:headEnd type="none" w="med" len="med"/>
-                      <a:tailEnd type="none" w="med" len="med"/>
-                    </a:lnL>
-                    <a:lnR w="12700" cap="flat" cmpd="sng" algn="ctr">
-                      <a:solidFill>
-                        <a:schemeClr val="tx1"/>
-                      </a:solidFill>
-                      <a:prstDash val="solid"/>
-                      <a:round/>
-                      <a:headEnd type="none" w="med" len="med"/>
-                      <a:tailEnd type="none" w="med" len="med"/>
-                    </a:lnR>
-                    <a:lnT w="12700" cap="flat" cmpd="sng" algn="ctr">
-                      <a:solidFill>
-                        <a:schemeClr val="tx1"/>
-                      </a:solidFill>
-                      <a:prstDash val="solid"/>
-                      <a:round/>
-                      <a:headEnd type="none" w="med" len="med"/>
-                      <a:tailEnd type="none" w="med" len="med"/>
-                    </a:lnT>
-                    <a:lnB w="12700" cap="flat" cmpd="sng" algn="ctr">
-                      <a:solidFill>
-                        <a:schemeClr val="tx1"/>
-                      </a:solidFill>
-                      <a:prstDash val="solid"/>
-                      <a:round/>
-                      <a:headEnd type="none" w="med" len="med"/>
-                      <a:tailEnd type="none" w="med" len="med"/>
-                    </a:lnB>
-                    <a:noFill/>
-                  </a:tcPr>
-                </a:tc>
-                <a:tc>
-                  <a:txBody>
-                    <a:bodyPr/>
-                    <a:lstStyle/>
-                    <a:p>
-                      <a:pPr marL="0" marR="0">
-                        <a:lnSpc>
-                          <a:spcPct val="115000"/>
-                        </a:lnSpc>
-                        <a:buNone/>
-                      </a:pPr>
-                      <a:endParaRPr lang="en-US" sz="1100" kern="100">
-                        <a:effectLst/>
-                        <a:latin typeface="Aptos" panose="020B0004020202020204" pitchFamily="34" charset="0"/>
-                        <a:ea typeface="Aptos" panose="020B0004020202020204" pitchFamily="34" charset="0"/>
-                        <a:cs typeface="Aptos" panose="020B0004020202020204" pitchFamily="34" charset="0"/>
-                      </a:endParaRPr>
-                    </a:p>
-                  </a:txBody>
-                  <a:tcPr marL="68580" marR="68580" marT="0" marB="0">
-                    <a:lnL w="12700" cap="flat" cmpd="sng" algn="ctr">
-                      <a:solidFill>
-                        <a:schemeClr val="tx1"/>
-                      </a:solidFill>
-                      <a:prstDash val="solid"/>
-                      <a:round/>
-                      <a:headEnd type="none" w="med" len="med"/>
-                      <a:tailEnd type="none" w="med" len="med"/>
-                    </a:lnL>
-                    <a:lnR w="12700" cap="flat" cmpd="sng" algn="ctr">
-                      <a:solidFill>
-                        <a:schemeClr val="tx1"/>
-                      </a:solidFill>
-                      <a:prstDash val="solid"/>
-                      <a:round/>
-                      <a:headEnd type="none" w="med" len="med"/>
-                      <a:tailEnd type="none" w="med" len="med"/>
-                    </a:lnR>
-                    <a:lnT w="12700" cap="flat" cmpd="sng" algn="ctr">
-                      <a:solidFill>
-                        <a:schemeClr val="tx1"/>
-                      </a:solidFill>
-                      <a:prstDash val="solid"/>
-                      <a:round/>
-                      <a:headEnd type="none" w="med" len="med"/>
-                      <a:tailEnd type="none" w="med" len="med"/>
-                    </a:lnT>
-                    <a:lnB w="12700" cap="flat" cmpd="sng" algn="ctr">
-                      <a:solidFill>
-                        <a:schemeClr val="tx1"/>
-                      </a:solidFill>
-                      <a:prstDash val="solid"/>
-                      <a:round/>
-                      <a:headEnd type="none" w="med" len="med"/>
-                      <a:tailEnd type="none" w="med" len="med"/>
-                    </a:lnB>
-                    <a:noFill/>
-                  </a:tcPr>
-                </a:tc>
-                <a:tc>
-                  <a:txBody>
-                    <a:bodyPr/>
-                    <a:lstStyle/>
-                    <a:p>
-                      <a:pPr marL="0" marR="0">
-                        <a:lnSpc>
-                          <a:spcPct val="115000"/>
-                        </a:lnSpc>
-                        <a:buNone/>
-                      </a:pPr>
-                      <a:endParaRPr lang="en-US" sz="1100" kern="100">
-                        <a:effectLst/>
-                        <a:latin typeface="Aptos" panose="020B0004020202020204" pitchFamily="34" charset="0"/>
-                        <a:ea typeface="Aptos" panose="020B0004020202020204" pitchFamily="34" charset="0"/>
-                        <a:cs typeface="Aptos" panose="020B0004020202020204" pitchFamily="34" charset="0"/>
-                      </a:endParaRPr>
-                    </a:p>
-                  </a:txBody>
-                  <a:tcPr marL="68580" marR="68580" marT="0" marB="0">
-                    <a:lnL w="12700" cap="flat" cmpd="sng" algn="ctr">
-                      <a:solidFill>
-                        <a:schemeClr val="tx1"/>
-                      </a:solidFill>
-                      <a:prstDash val="solid"/>
-                      <a:round/>
-                      <a:headEnd type="none" w="med" len="med"/>
-                      <a:tailEnd type="none" w="med" len="med"/>
-                    </a:lnL>
-                    <a:lnR w="12700" cap="flat" cmpd="sng" algn="ctr">
-                      <a:solidFill>
-                        <a:schemeClr val="tx1"/>
-                      </a:solidFill>
-                      <a:prstDash val="solid"/>
-                      <a:round/>
-                      <a:headEnd type="none" w="med" len="med"/>
-                      <a:tailEnd type="none" w="med" len="med"/>
-                    </a:lnR>
-                    <a:lnT w="12700" cap="flat" cmpd="sng" algn="ctr">
-                      <a:solidFill>
-                        <a:schemeClr val="tx1"/>
-                      </a:solidFill>
-                      <a:prstDash val="solid"/>
-                      <a:round/>
-                      <a:headEnd type="none" w="med" len="med"/>
-                      <a:tailEnd type="none" w="med" len="med"/>
-                    </a:lnT>
-                    <a:lnB w="12700" cap="flat" cmpd="sng" algn="ctr">
-                      <a:solidFill>
-                        <a:schemeClr val="tx1"/>
-                      </a:solidFill>
-                      <a:prstDash val="solid"/>
-                      <a:round/>
-                      <a:headEnd type="none" w="med" len="med"/>
-                      <a:tailEnd type="none" w="med" len="med"/>
-                    </a:lnB>
-                    <a:noFill/>
-                  </a:tcPr>
-                </a:tc>
-                <a:extLst>
-                  <a:ext uri="{0D108BD9-81ED-4DB2-BD59-A6C34878D82A}">
-                    <a16:rowId xmlns:a16="http://schemas.microsoft.com/office/drawing/2014/main" val="1375515884"/>
-                  </a:ext>
-                </a:extLst>
-              </a:tr>
-              <a:tr h="0">
-                <a:tc>
-                  <a:txBody>
-                    <a:bodyPr/>
-                    <a:lstStyle/>
-                    <a:p>
-                      <a:pPr marL="0" marR="0">
-                        <a:lnSpc>
-                          <a:spcPct val="115000"/>
-                        </a:lnSpc>
-                        <a:buNone/>
-                      </a:pPr>
-                      <a:endParaRPr lang="en-US" sz="1100" kern="100">
-                        <a:effectLst/>
-                        <a:latin typeface="Aptos" panose="020B0004020202020204" pitchFamily="34" charset="0"/>
-                        <a:ea typeface="Aptos" panose="020B0004020202020204" pitchFamily="34" charset="0"/>
-                        <a:cs typeface="Aptos" panose="020B0004020202020204" pitchFamily="34" charset="0"/>
-                      </a:endParaRPr>
-                    </a:p>
-                  </a:txBody>
-                  <a:tcPr marL="68580" marR="68580" marT="0" marB="0">
-                    <a:lnL w="12700" cap="flat" cmpd="sng" algn="ctr">
-                      <a:solidFill>
-                        <a:schemeClr val="tx1"/>
-                      </a:solidFill>
-                      <a:prstDash val="solid"/>
-                      <a:round/>
-                      <a:headEnd type="none" w="med" len="med"/>
-                      <a:tailEnd type="none" w="med" len="med"/>
-                    </a:lnL>
-                    <a:lnR w="12700" cap="flat" cmpd="sng" algn="ctr">
-                      <a:solidFill>
-                        <a:schemeClr val="tx1"/>
-                      </a:solidFill>
-                      <a:prstDash val="solid"/>
-                      <a:round/>
-                      <a:headEnd type="none" w="med" len="med"/>
-                      <a:tailEnd type="none" w="med" len="med"/>
-                    </a:lnR>
-                    <a:lnT w="12700" cap="flat" cmpd="sng" algn="ctr">
-                      <a:solidFill>
-                        <a:schemeClr val="tx1"/>
-                      </a:solidFill>
-                      <a:prstDash val="solid"/>
-                      <a:round/>
-                      <a:headEnd type="none" w="med" len="med"/>
-                      <a:tailEnd type="none" w="med" len="med"/>
-                    </a:lnT>
-                    <a:lnB w="12700" cap="flat" cmpd="sng" algn="ctr">
-                      <a:solidFill>
-                        <a:schemeClr val="tx1"/>
-                      </a:solidFill>
-                      <a:prstDash val="solid"/>
-                      <a:round/>
-                      <a:headEnd type="none" w="med" len="med"/>
-                      <a:tailEnd type="none" w="med" len="med"/>
-                    </a:lnB>
-                    <a:noFill/>
-                  </a:tcPr>
-                </a:tc>
-                <a:tc>
-                  <a:txBody>
-                    <a:bodyPr/>
-                    <a:lstStyle/>
-                    <a:p>
-                      <a:pPr marL="0" marR="0">
-                        <a:lnSpc>
-                          <a:spcPct val="115000"/>
-                        </a:lnSpc>
-                        <a:buNone/>
-                      </a:pPr>
-                      <a:endParaRPr lang="en-US" sz="1100" kern="100">
-                        <a:effectLst/>
-                        <a:latin typeface="Aptos" panose="020B0004020202020204" pitchFamily="34" charset="0"/>
-                        <a:ea typeface="Aptos" panose="020B0004020202020204" pitchFamily="34" charset="0"/>
-                        <a:cs typeface="Aptos" panose="020B0004020202020204" pitchFamily="34" charset="0"/>
-                      </a:endParaRPr>
-                    </a:p>
-                  </a:txBody>
-                  <a:tcPr marL="0" marR="0" marT="0" marB="0">
-                    <a:lnL w="12700" cap="flat" cmpd="sng" algn="ctr">
-                      <a:solidFill>
-                        <a:schemeClr val="tx1"/>
-                      </a:solidFill>
-                      <a:prstDash val="solid"/>
-                      <a:round/>
-                      <a:headEnd type="none" w="med" len="med"/>
-                      <a:tailEnd type="none" w="med" len="med"/>
-                    </a:lnL>
-                    <a:lnR w="12700" cap="flat" cmpd="sng" algn="ctr">
-                      <a:solidFill>
-                        <a:schemeClr val="tx1"/>
-                      </a:solidFill>
-                      <a:prstDash val="solid"/>
-                      <a:round/>
-                      <a:headEnd type="none" w="med" len="med"/>
-                      <a:tailEnd type="none" w="med" len="med"/>
-                    </a:lnR>
-                    <a:lnT w="12700" cap="flat" cmpd="sng" algn="ctr">
-                      <a:solidFill>
-                        <a:schemeClr val="tx1"/>
-                      </a:solidFill>
-                      <a:prstDash val="solid"/>
-                      <a:round/>
-                      <a:headEnd type="none" w="med" len="med"/>
-                      <a:tailEnd type="none" w="med" len="med"/>
-                    </a:lnT>
-                    <a:lnB w="12700" cap="flat" cmpd="sng" algn="ctr">
-                      <a:solidFill>
-                        <a:schemeClr val="tx1"/>
-                      </a:solidFill>
-                      <a:prstDash val="solid"/>
-                      <a:round/>
-                      <a:headEnd type="none" w="med" len="med"/>
-                      <a:tailEnd type="none" w="med" len="med"/>
-                    </a:lnB>
-                    <a:noFill/>
-                  </a:tcPr>
-                </a:tc>
-                <a:tc>
-                  <a:txBody>
-                    <a:bodyPr/>
-                    <a:lstStyle/>
-                    <a:p>
-                      <a:pPr marL="0" marR="0">
-                        <a:lnSpc>
-                          <a:spcPct val="115000"/>
-                        </a:lnSpc>
-                        <a:buNone/>
-                      </a:pPr>
-                      <a:endParaRPr lang="en-US" sz="1100" kern="100">
-                        <a:effectLst/>
-                        <a:latin typeface="Aptos" panose="020B0004020202020204" pitchFamily="34" charset="0"/>
-                        <a:ea typeface="Aptos" panose="020B0004020202020204" pitchFamily="34" charset="0"/>
-                        <a:cs typeface="Aptos" panose="020B0004020202020204" pitchFamily="34" charset="0"/>
-                      </a:endParaRPr>
-                    </a:p>
-                  </a:txBody>
-                  <a:tcPr marL="68580" marR="68580" marT="0" marB="0">
-                    <a:lnL w="12700" cap="flat" cmpd="sng" algn="ctr">
-                      <a:solidFill>
-                        <a:schemeClr val="tx1"/>
-                      </a:solidFill>
-                      <a:prstDash val="solid"/>
-                      <a:round/>
-                      <a:headEnd type="none" w="med" len="med"/>
-                      <a:tailEnd type="none" w="med" len="med"/>
-                    </a:lnL>
-                    <a:lnR w="12700" cap="flat" cmpd="sng" algn="ctr">
-                      <a:solidFill>
-                        <a:schemeClr val="tx1"/>
-                      </a:solidFill>
-                      <a:prstDash val="solid"/>
-                      <a:round/>
-                      <a:headEnd type="none" w="med" len="med"/>
-                      <a:tailEnd type="none" w="med" len="med"/>
-                    </a:lnR>
-                    <a:lnT w="12700" cap="flat" cmpd="sng" algn="ctr">
-                      <a:solidFill>
-                        <a:schemeClr val="tx1"/>
-                      </a:solidFill>
-                      <a:prstDash val="solid"/>
-                      <a:round/>
-                      <a:headEnd type="none" w="med" len="med"/>
-                      <a:tailEnd type="none" w="med" len="med"/>
-                    </a:lnT>
-                    <a:lnB w="12700" cap="flat" cmpd="sng" algn="ctr">
-                      <a:solidFill>
-                        <a:schemeClr val="tx1"/>
-                      </a:solidFill>
-                      <a:prstDash val="solid"/>
-                      <a:round/>
-                      <a:headEnd type="none" w="med" len="med"/>
-                      <a:tailEnd type="none" w="med" len="med"/>
-                    </a:lnB>
-                    <a:noFill/>
-                  </a:tcPr>
-                </a:tc>
-                <a:tc>
-                  <a:txBody>
-                    <a:bodyPr/>
-                    <a:lstStyle/>
-                    <a:p>
-                      <a:pPr marL="0" marR="0">
-                        <a:lnSpc>
-                          <a:spcPct val="115000"/>
-                        </a:lnSpc>
-                        <a:buNone/>
-                      </a:pPr>
-                      <a:endParaRPr lang="en-US" sz="1100" kern="100">
-                        <a:effectLst/>
-                        <a:latin typeface="Aptos" panose="020B0004020202020204" pitchFamily="34" charset="0"/>
-                        <a:ea typeface="Aptos" panose="020B0004020202020204" pitchFamily="34" charset="0"/>
-                        <a:cs typeface="Aptos" panose="020B0004020202020204" pitchFamily="34" charset="0"/>
-                      </a:endParaRPr>
-                    </a:p>
-                  </a:txBody>
-                  <a:tcPr marL="68580" marR="68580" marT="0" marB="0">
-                    <a:lnL w="12700" cap="flat" cmpd="sng" algn="ctr">
-                      <a:solidFill>
-                        <a:schemeClr val="tx1"/>
-                      </a:solidFill>
-                      <a:prstDash val="solid"/>
-                      <a:round/>
-                      <a:headEnd type="none" w="med" len="med"/>
-                      <a:tailEnd type="none" w="med" len="med"/>
-                    </a:lnL>
-                    <a:lnR w="12700" cap="flat" cmpd="sng" algn="ctr">
-                      <a:solidFill>
-                        <a:schemeClr val="tx1"/>
-                      </a:solidFill>
-                      <a:prstDash val="solid"/>
-                      <a:round/>
-                      <a:headEnd type="none" w="med" len="med"/>
-                      <a:tailEnd type="none" w="med" len="med"/>
-                    </a:lnR>
-                    <a:lnT w="12700" cap="flat" cmpd="sng" algn="ctr">
-                      <a:solidFill>
-                        <a:schemeClr val="tx1"/>
-                      </a:solidFill>
-                      <a:prstDash val="solid"/>
-                      <a:round/>
-                      <a:headEnd type="none" w="med" len="med"/>
-                      <a:tailEnd type="none" w="med" len="med"/>
-                    </a:lnT>
-                    <a:lnB w="12700" cap="flat" cmpd="sng" algn="ctr">
-                      <a:solidFill>
-                        <a:schemeClr val="tx1"/>
-                      </a:solidFill>
-                      <a:prstDash val="solid"/>
-                      <a:round/>
-                      <a:headEnd type="none" w="med" len="med"/>
-                      <a:tailEnd type="none" w="med" len="med"/>
-                    </a:lnB>
-                    <a:noFill/>
-                  </a:tcPr>
-                </a:tc>
-                <a:extLst>
-                  <a:ext uri="{0D108BD9-81ED-4DB2-BD59-A6C34878D82A}">
-                    <a16:rowId xmlns:a16="http://schemas.microsoft.com/office/drawing/2014/main" val="882293557"/>
-                  </a:ext>
-                </a:extLst>
-              </a:tr>
-              <a:tr h="0">
-                <a:tc>
-                  <a:txBody>
-                    <a:bodyPr/>
-                    <a:lstStyle/>
-                    <a:p>
-                      <a:pPr marL="0" marR="0">
-                        <a:lnSpc>
-                          <a:spcPct val="115000"/>
-                        </a:lnSpc>
-                        <a:buNone/>
-                      </a:pPr>
-                      <a:endParaRPr lang="en-US" sz="1100" kern="100">
-                        <a:effectLst/>
-                        <a:latin typeface="Aptos" panose="020B0004020202020204" pitchFamily="34" charset="0"/>
-                        <a:ea typeface="Aptos" panose="020B0004020202020204" pitchFamily="34" charset="0"/>
-                        <a:cs typeface="Aptos" panose="020B0004020202020204" pitchFamily="34" charset="0"/>
-                      </a:endParaRPr>
-                    </a:p>
-                  </a:txBody>
-                  <a:tcPr marL="68580" marR="68580" marT="0" marB="0">
-                    <a:lnL w="12700" cap="flat" cmpd="sng" algn="ctr">
-                      <a:solidFill>
-                        <a:schemeClr val="tx1"/>
-                      </a:solidFill>
-                      <a:prstDash val="solid"/>
-                      <a:round/>
-                      <a:headEnd type="none" w="med" len="med"/>
-                      <a:tailEnd type="none" w="med" len="med"/>
-                    </a:lnL>
-                    <a:lnR w="12700" cap="flat" cmpd="sng" algn="ctr">
-                      <a:solidFill>
-                        <a:schemeClr val="tx1"/>
-                      </a:solidFill>
-                      <a:prstDash val="solid"/>
-                      <a:round/>
-                      <a:headEnd type="none" w="med" len="med"/>
-                      <a:tailEnd type="none" w="med" len="med"/>
-                    </a:lnR>
-                    <a:lnT w="12700" cap="flat" cmpd="sng" algn="ctr">
-                      <a:solidFill>
-                        <a:schemeClr val="tx1"/>
-                      </a:solidFill>
-                      <a:prstDash val="solid"/>
-                      <a:round/>
-                      <a:headEnd type="none" w="med" len="med"/>
-                      <a:tailEnd type="none" w="med" len="med"/>
-                    </a:lnT>
-                    <a:lnB w="12700" cap="flat" cmpd="sng" algn="ctr">
-                      <a:solidFill>
-                        <a:schemeClr val="tx1"/>
-                      </a:solidFill>
-                      <a:prstDash val="solid"/>
-                      <a:round/>
-                      <a:headEnd type="none" w="med" len="med"/>
-                      <a:tailEnd type="none" w="med" len="med"/>
-                    </a:lnB>
-                    <a:noFill/>
-                  </a:tcPr>
-                </a:tc>
-                <a:tc>
-                  <a:txBody>
-                    <a:bodyPr/>
-                    <a:lstStyle/>
-                    <a:p>
-                      <a:pPr marL="0" marR="0">
-                        <a:lnSpc>
-                          <a:spcPct val="115000"/>
-                        </a:lnSpc>
-                        <a:buNone/>
-                      </a:pPr>
-                      <a:endParaRPr lang="en-US" sz="1100" kern="100">
-                        <a:effectLst/>
-                        <a:latin typeface="Aptos" panose="020B0004020202020204" pitchFamily="34" charset="0"/>
-                        <a:ea typeface="Aptos" panose="020B0004020202020204" pitchFamily="34" charset="0"/>
-                        <a:cs typeface="Aptos" panose="020B0004020202020204" pitchFamily="34" charset="0"/>
-                      </a:endParaRPr>
-                    </a:p>
-                  </a:txBody>
-                  <a:tcPr marL="0" marR="0" marT="0" marB="0">
-                    <a:lnL w="12700" cap="flat" cmpd="sng" algn="ctr">
-                      <a:solidFill>
-                        <a:schemeClr val="tx1"/>
-                      </a:solidFill>
-                      <a:prstDash val="solid"/>
-                      <a:round/>
-                      <a:headEnd type="none" w="med" len="med"/>
-                      <a:tailEnd type="none" w="med" len="med"/>
-                    </a:lnL>
-                    <a:lnR w="12700" cap="flat" cmpd="sng" algn="ctr">
-                      <a:solidFill>
-                        <a:schemeClr val="tx1"/>
-                      </a:solidFill>
-                      <a:prstDash val="solid"/>
-                      <a:round/>
-                      <a:headEnd type="none" w="med" len="med"/>
-                      <a:tailEnd type="none" w="med" len="med"/>
-                    </a:lnR>
-                    <a:lnT w="12700" cap="flat" cmpd="sng" algn="ctr">
-                      <a:solidFill>
-                        <a:schemeClr val="tx1"/>
-                      </a:solidFill>
-                      <a:prstDash val="solid"/>
-                      <a:round/>
-                      <a:headEnd type="none" w="med" len="med"/>
-                      <a:tailEnd type="none" w="med" len="med"/>
-                    </a:lnT>
-                    <a:lnB w="12700" cap="flat" cmpd="sng" algn="ctr">
-                      <a:solidFill>
-                        <a:schemeClr val="tx1"/>
-                      </a:solidFill>
-                      <a:prstDash val="solid"/>
-                      <a:round/>
-                      <a:headEnd type="none" w="med" len="med"/>
-                      <a:tailEnd type="none" w="med" len="med"/>
-                    </a:lnB>
-                    <a:noFill/>
-                  </a:tcPr>
-                </a:tc>
-                <a:tc>
-                  <a:txBody>
-                    <a:bodyPr/>
-                    <a:lstStyle/>
-                    <a:p>
-                      <a:pPr marL="0" marR="0">
-                        <a:lnSpc>
-                          <a:spcPct val="115000"/>
-                        </a:lnSpc>
-                        <a:buNone/>
-                      </a:pPr>
-                      <a:endParaRPr lang="en-US" sz="1100" kern="100">
-                        <a:effectLst/>
-                        <a:latin typeface="Aptos" panose="020B0004020202020204" pitchFamily="34" charset="0"/>
-                        <a:ea typeface="Aptos" panose="020B0004020202020204" pitchFamily="34" charset="0"/>
-                        <a:cs typeface="Aptos" panose="020B0004020202020204" pitchFamily="34" charset="0"/>
-                      </a:endParaRPr>
-                    </a:p>
-                  </a:txBody>
-                  <a:tcPr marL="68580" marR="68580" marT="0" marB="0">
-                    <a:lnL w="12700" cap="flat" cmpd="sng" algn="ctr">
-                      <a:solidFill>
-                        <a:schemeClr val="tx1"/>
-                      </a:solidFill>
-                      <a:prstDash val="solid"/>
-                      <a:round/>
-                      <a:headEnd type="none" w="med" len="med"/>
-                      <a:tailEnd type="none" w="med" len="med"/>
-                    </a:lnL>
-                    <a:lnR w="12700" cap="flat" cmpd="sng" algn="ctr">
-                      <a:solidFill>
-                        <a:schemeClr val="tx1"/>
-                      </a:solidFill>
-                      <a:prstDash val="solid"/>
-                      <a:round/>
-                      <a:headEnd type="none" w="med" len="med"/>
-                      <a:tailEnd type="none" w="med" len="med"/>
-                    </a:lnR>
-                    <a:lnT w="12700" cap="flat" cmpd="sng" algn="ctr">
-                      <a:solidFill>
-                        <a:schemeClr val="tx1"/>
-                      </a:solidFill>
-                      <a:prstDash val="solid"/>
-                      <a:round/>
-                      <a:headEnd type="none" w="med" len="med"/>
-                      <a:tailEnd type="none" w="med" len="med"/>
-                    </a:lnT>
-                    <a:lnB w="12700" cap="flat" cmpd="sng" algn="ctr">
-                      <a:solidFill>
-                        <a:schemeClr val="tx1"/>
-                      </a:solidFill>
-                      <a:prstDash val="solid"/>
-                      <a:round/>
-                      <a:headEnd type="none" w="med" len="med"/>
-                      <a:tailEnd type="none" w="med" len="med"/>
-                    </a:lnB>
-                    <a:noFill/>
-                  </a:tcPr>
-                </a:tc>
-                <a:tc>
-                  <a:txBody>
-                    <a:bodyPr/>
-                    <a:lstStyle/>
-                    <a:p>
-                      <a:pPr marL="0" marR="0">
-                        <a:lnSpc>
-                          <a:spcPct val="115000"/>
-                        </a:lnSpc>
-                        <a:buNone/>
-                      </a:pPr>
-                      <a:endParaRPr lang="en-US" sz="1100" kern="100">
-                        <a:effectLst/>
-                        <a:latin typeface="Aptos" panose="020B0004020202020204" pitchFamily="34" charset="0"/>
-                        <a:ea typeface="Aptos" panose="020B0004020202020204" pitchFamily="34" charset="0"/>
-                        <a:cs typeface="Aptos" panose="020B0004020202020204" pitchFamily="34" charset="0"/>
-                      </a:endParaRPr>
-                    </a:p>
-                  </a:txBody>
-                  <a:tcPr marL="68580" marR="68580" marT="0" marB="0">
-                    <a:lnL w="12700" cap="flat" cmpd="sng" algn="ctr">
-                      <a:solidFill>
-                        <a:schemeClr val="tx1"/>
-                      </a:solidFill>
-                      <a:prstDash val="solid"/>
-                      <a:round/>
-                      <a:headEnd type="none" w="med" len="med"/>
-                      <a:tailEnd type="none" w="med" len="med"/>
-                    </a:lnL>
-                    <a:lnR w="12700" cap="flat" cmpd="sng" algn="ctr">
-                      <a:solidFill>
-                        <a:schemeClr val="tx1"/>
-                      </a:solidFill>
-                      <a:prstDash val="solid"/>
-                      <a:round/>
-                      <a:headEnd type="none" w="med" len="med"/>
-                      <a:tailEnd type="none" w="med" len="med"/>
-                    </a:lnR>
-                    <a:lnT w="12700" cap="flat" cmpd="sng" algn="ctr">
-                      <a:solidFill>
-                        <a:schemeClr val="tx1"/>
-                      </a:solidFill>
-                      <a:prstDash val="solid"/>
-                      <a:round/>
-                      <a:headEnd type="none" w="med" len="med"/>
-                      <a:tailEnd type="none" w="med" len="med"/>
-                    </a:lnT>
-                    <a:lnB w="12700" cap="flat" cmpd="sng" algn="ctr">
-                      <a:solidFill>
-                        <a:schemeClr val="tx1"/>
-                      </a:solidFill>
-                      <a:prstDash val="solid"/>
-                      <a:round/>
-                      <a:headEnd type="none" w="med" len="med"/>
-                      <a:tailEnd type="none" w="med" len="med"/>
-                    </a:lnB>
-                    <a:noFill/>
-                  </a:tcPr>
-                </a:tc>
-                <a:extLst>
-                  <a:ext uri="{0D108BD9-81ED-4DB2-BD59-A6C34878D82A}">
-                    <a16:rowId xmlns:a16="http://schemas.microsoft.com/office/drawing/2014/main" val="3915855345"/>
-                  </a:ext>
-                </a:extLst>
-              </a:tr>
-              <a:tr h="0">
-                <a:tc>
-                  <a:txBody>
-                    <a:bodyPr/>
-                    <a:lstStyle/>
-                    <a:p>
-                      <a:pPr marL="0" marR="0">
-                        <a:lnSpc>
-                          <a:spcPct val="115000"/>
-                        </a:lnSpc>
-                        <a:buNone/>
-                      </a:pPr>
-                      <a:r>
-                        <a:rPr lang="en-US" sz="1100" kern="100">
-                          <a:effectLst/>
-                          <a:latin typeface="Aptos" panose="020B0004020202020204" pitchFamily="34" charset="0"/>
-                          <a:ea typeface="Aptos" panose="020B0004020202020204" pitchFamily="34" charset="0"/>
-                          <a:cs typeface="Aptos" panose="020B0004020202020204" pitchFamily="34" charset="0"/>
-                        </a:rPr>
-                        <a:t> </a:t>
-                      </a:r>
-                    </a:p>
-                  </a:txBody>
-                  <a:tcPr marL="68580" marR="68580" marT="0" marB="0">
-                    <a:lnL w="12700" cap="flat" cmpd="sng" algn="ctr">
-                      <a:solidFill>
-                        <a:schemeClr val="tx1"/>
-                      </a:solidFill>
-                      <a:prstDash val="solid"/>
-                      <a:round/>
-                      <a:headEnd type="none" w="med" len="med"/>
-                      <a:tailEnd type="none" w="med" len="med"/>
-                    </a:lnL>
-                    <a:lnR w="12700" cap="flat" cmpd="sng" algn="ctr">
-                      <a:solidFill>
-                        <a:schemeClr val="tx1"/>
-                      </a:solidFill>
-                      <a:prstDash val="solid"/>
-                      <a:round/>
-                      <a:headEnd type="none" w="med" len="med"/>
-                      <a:tailEnd type="none" w="med" len="med"/>
-                    </a:lnR>
-                    <a:lnT w="12700" cap="flat" cmpd="sng" algn="ctr">
-                      <a:solidFill>
-                        <a:schemeClr val="tx1"/>
-                      </a:solidFill>
-                      <a:prstDash val="solid"/>
-                      <a:round/>
-                      <a:headEnd type="none" w="med" len="med"/>
-                      <a:tailEnd type="none" w="med" len="med"/>
-                    </a:lnT>
-                    <a:lnB w="12700" cap="flat" cmpd="sng" algn="ctr">
-                      <a:solidFill>
-                        <a:schemeClr val="tx1"/>
-                      </a:solidFill>
-                      <a:prstDash val="solid"/>
-                      <a:round/>
-                      <a:headEnd type="none" w="med" len="med"/>
-                      <a:tailEnd type="none" w="med" len="med"/>
-                    </a:lnB>
-                    <a:noFill/>
-                  </a:tcPr>
-                </a:tc>
-                <a:tc>
-                  <a:txBody>
-                    <a:bodyPr/>
-                    <a:lstStyle/>
-                    <a:p>
-                      <a:pPr marL="0" marR="0">
-                        <a:lnSpc>
-                          <a:spcPct val="115000"/>
-                        </a:lnSpc>
-                        <a:buNone/>
-                      </a:pPr>
-                      <a:r>
-                        <a:rPr lang="en-US" sz="1100" kern="100">
-                          <a:effectLst/>
-                          <a:latin typeface="Aptos" panose="020B0004020202020204" pitchFamily="34" charset="0"/>
-                          <a:ea typeface="Aptos" panose="020B0004020202020204" pitchFamily="34" charset="0"/>
-                          <a:cs typeface="Aptos" panose="020B0004020202020204" pitchFamily="34" charset="0"/>
-                        </a:rPr>
-                        <a:t> </a:t>
-                      </a:r>
-                    </a:p>
-                  </a:txBody>
-                  <a:tcPr marL="0" marR="0" marT="0" marB="0">
-                    <a:lnL w="12700" cap="flat" cmpd="sng" algn="ctr">
-                      <a:solidFill>
-                        <a:schemeClr val="tx1"/>
-                      </a:solidFill>
-                      <a:prstDash val="solid"/>
-                      <a:round/>
-                      <a:headEnd type="none" w="med" len="med"/>
-                      <a:tailEnd type="none" w="med" len="med"/>
-                    </a:lnL>
-                    <a:lnR w="12700" cap="flat" cmpd="sng" algn="ctr">
-                      <a:solidFill>
-                        <a:schemeClr val="tx1"/>
-                      </a:solidFill>
-                      <a:prstDash val="solid"/>
-                      <a:round/>
-                      <a:headEnd type="none" w="med" len="med"/>
-                      <a:tailEnd type="none" w="med" len="med"/>
-                    </a:lnR>
-                    <a:lnT w="12700" cap="flat" cmpd="sng" algn="ctr">
-                      <a:solidFill>
-                        <a:schemeClr val="tx1"/>
-                      </a:solidFill>
-                      <a:prstDash val="solid"/>
-                      <a:round/>
-                      <a:headEnd type="none" w="med" len="med"/>
-                      <a:tailEnd type="none" w="med" len="med"/>
-                    </a:lnT>
-                    <a:lnB w="12700" cap="flat" cmpd="sng" algn="ctr">
-                      <a:solidFill>
-                        <a:schemeClr val="tx1"/>
-                      </a:solidFill>
-                      <a:prstDash val="solid"/>
-                      <a:round/>
-                      <a:headEnd type="none" w="med" len="med"/>
-                      <a:tailEnd type="none" w="med" len="med"/>
-                    </a:lnB>
-                    <a:noFill/>
-                  </a:tcPr>
-                </a:tc>
-                <a:tc>
-                  <a:txBody>
-                    <a:bodyPr/>
-                    <a:lstStyle/>
-                    <a:p>
-                      <a:pPr marL="0" marR="0">
-                        <a:lnSpc>
-                          <a:spcPct val="115000"/>
-                        </a:lnSpc>
-                        <a:buNone/>
-                      </a:pPr>
-                      <a:r>
-                        <a:rPr lang="en-US" sz="1100" kern="100">
-                          <a:effectLst/>
-                          <a:latin typeface="Aptos" panose="020B0004020202020204" pitchFamily="34" charset="0"/>
-                          <a:ea typeface="Aptos" panose="020B0004020202020204" pitchFamily="34" charset="0"/>
-                          <a:cs typeface="Aptos" panose="020B0004020202020204" pitchFamily="34" charset="0"/>
-                        </a:rPr>
-                        <a:t> </a:t>
-                      </a:r>
-                    </a:p>
-                  </a:txBody>
-                  <a:tcPr marL="68580" marR="68580" marT="0" marB="0">
-                    <a:lnL w="12700" cap="flat" cmpd="sng" algn="ctr">
-                      <a:solidFill>
-                        <a:schemeClr val="tx1"/>
-                      </a:solidFill>
-                      <a:prstDash val="solid"/>
-                      <a:round/>
-                      <a:headEnd type="none" w="med" len="med"/>
-                      <a:tailEnd type="none" w="med" len="med"/>
-                    </a:lnL>
-                    <a:lnR w="12700" cap="flat" cmpd="sng" algn="ctr">
-                      <a:solidFill>
-                        <a:schemeClr val="tx1"/>
-                      </a:solidFill>
-                      <a:prstDash val="solid"/>
-                      <a:round/>
-                      <a:headEnd type="none" w="med" len="med"/>
-                      <a:tailEnd type="none" w="med" len="med"/>
-                    </a:lnR>
-                    <a:lnT w="12700" cap="flat" cmpd="sng" algn="ctr">
-                      <a:solidFill>
-                        <a:schemeClr val="tx1"/>
-                      </a:solidFill>
-                      <a:prstDash val="solid"/>
-                      <a:round/>
-                      <a:headEnd type="none" w="med" len="med"/>
-                      <a:tailEnd type="none" w="med" len="med"/>
-                    </a:lnT>
-                    <a:lnB w="12700" cap="flat" cmpd="sng" algn="ctr">
-                      <a:solidFill>
-                        <a:schemeClr val="tx1"/>
-                      </a:solidFill>
-                      <a:prstDash val="solid"/>
-                      <a:round/>
-                      <a:headEnd type="none" w="med" len="med"/>
-                      <a:tailEnd type="none" w="med" len="med"/>
-                    </a:lnB>
-                    <a:noFill/>
-                  </a:tcPr>
-                </a:tc>
-                <a:tc>
-                  <a:txBody>
-                    <a:bodyPr/>
-                    <a:lstStyle/>
-                    <a:p>
-                      <a:pPr marL="0" marR="0">
-                        <a:lnSpc>
-                          <a:spcPct val="115000"/>
-                        </a:lnSpc>
-                        <a:buNone/>
-                      </a:pPr>
-                      <a:r>
-                        <a:rPr lang="en-US" sz="1100" kern="100">
-                          <a:effectLst/>
-                          <a:latin typeface="Aptos" panose="020B0004020202020204" pitchFamily="34" charset="0"/>
-                          <a:ea typeface="Aptos" panose="020B0004020202020204" pitchFamily="34" charset="0"/>
-                          <a:cs typeface="Aptos" panose="020B0004020202020204" pitchFamily="34" charset="0"/>
-                        </a:rPr>
-                        <a:t> </a:t>
-                      </a:r>
-                    </a:p>
-                  </a:txBody>
-                  <a:tcPr marL="68580" marR="68580" marT="0" marB="0">
-                    <a:lnL w="12700" cap="flat" cmpd="sng" algn="ctr">
-                      <a:solidFill>
-                        <a:schemeClr val="tx1"/>
-                      </a:solidFill>
-                      <a:prstDash val="solid"/>
-                      <a:round/>
-                      <a:headEnd type="none" w="med" len="med"/>
-                      <a:tailEnd type="none" w="med" len="med"/>
-                    </a:lnL>
-                    <a:lnR w="12700" cap="flat" cmpd="sng" algn="ctr">
-                      <a:solidFill>
-                        <a:schemeClr val="tx1"/>
-                      </a:solidFill>
-                      <a:prstDash val="solid"/>
-                      <a:round/>
-                      <a:headEnd type="none" w="med" len="med"/>
-                      <a:tailEnd type="none" w="med" len="med"/>
-                    </a:lnR>
-                    <a:lnT w="12700" cap="flat" cmpd="sng" algn="ctr">
-                      <a:solidFill>
-                        <a:schemeClr val="tx1"/>
-                      </a:solidFill>
-                      <a:prstDash val="solid"/>
-                      <a:round/>
-                      <a:headEnd type="none" w="med" len="med"/>
-                      <a:tailEnd type="none" w="med" len="med"/>
-                    </a:lnT>
-                    <a:lnB w="12700" cap="flat" cmpd="sng" algn="ctr">
-                      <a:solidFill>
-                        <a:schemeClr val="tx1"/>
-                      </a:solidFill>
-                      <a:prstDash val="solid"/>
-                      <a:round/>
-                      <a:headEnd type="none" w="med" len="med"/>
-                      <a:tailEnd type="none" w="med" len="med"/>
-                    </a:lnB>
-                    <a:noFill/>
-                  </a:tcPr>
-                </a:tc>
-                <a:extLst>
-                  <a:ext uri="{0D108BD9-81ED-4DB2-BD59-A6C34878D82A}">
-                    <a16:rowId xmlns:a16="http://schemas.microsoft.com/office/drawing/2014/main" val="449420337"/>
-                  </a:ext>
-                </a:extLst>
-              </a:tr>
-              <a:tr h="0">
-                <a:tc>
-                  <a:txBody>
-                    <a:bodyPr/>
-                    <a:lstStyle/>
-                    <a:p>
-                      <a:pPr marL="0" marR="0">
-                        <a:lnSpc>
-                          <a:spcPct val="115000"/>
-                        </a:lnSpc>
-                        <a:buNone/>
-                      </a:pPr>
-                      <a:endParaRPr lang="en-US" sz="1100" kern="100">
-                        <a:effectLst/>
-                        <a:latin typeface="Aptos" panose="020B0004020202020204" pitchFamily="34" charset="0"/>
-                        <a:ea typeface="Aptos" panose="020B0004020202020204" pitchFamily="34" charset="0"/>
-                        <a:cs typeface="Aptos" panose="020B0004020202020204" pitchFamily="34" charset="0"/>
-                      </a:endParaRPr>
-                    </a:p>
-                  </a:txBody>
-                  <a:tcPr marL="68580" marR="68580" marT="0" marB="0">
-                    <a:lnL w="12700" cap="flat" cmpd="sng" algn="ctr">
-                      <a:solidFill>
-                        <a:schemeClr val="tx1"/>
-                      </a:solidFill>
-                      <a:prstDash val="solid"/>
-                      <a:round/>
-                      <a:headEnd type="none" w="med" len="med"/>
-                      <a:tailEnd type="none" w="med" len="med"/>
-                    </a:lnL>
-                    <a:lnR w="12700" cap="flat" cmpd="sng" algn="ctr">
-                      <a:solidFill>
-                        <a:schemeClr val="tx1"/>
-                      </a:solidFill>
-                      <a:prstDash val="solid"/>
-                      <a:round/>
-                      <a:headEnd type="none" w="med" len="med"/>
-                      <a:tailEnd type="none" w="med" len="med"/>
-                    </a:lnR>
-                    <a:lnT w="12700" cap="flat" cmpd="sng" algn="ctr">
-                      <a:solidFill>
-                        <a:schemeClr val="tx1"/>
-                      </a:solidFill>
-                      <a:prstDash val="solid"/>
-                      <a:round/>
-                      <a:headEnd type="none" w="med" len="med"/>
-                      <a:tailEnd type="none" w="med" len="med"/>
-                    </a:lnT>
-                    <a:lnB w="12700" cap="flat" cmpd="sng" algn="ctr">
-                      <a:solidFill>
-                        <a:schemeClr val="tx1"/>
-                      </a:solidFill>
-                      <a:prstDash val="solid"/>
-                      <a:round/>
-                      <a:headEnd type="none" w="med" len="med"/>
-                      <a:tailEnd type="none" w="med" len="med"/>
-                    </a:lnB>
-                    <a:noFill/>
-                  </a:tcPr>
-                </a:tc>
-                <a:tc>
-                  <a:txBody>
-                    <a:bodyPr/>
-                    <a:lstStyle/>
-                    <a:p>
-                      <a:pPr marL="0" marR="0">
-                        <a:lnSpc>
-                          <a:spcPct val="115000"/>
-                        </a:lnSpc>
-                        <a:buNone/>
-                      </a:pPr>
-                      <a:endParaRPr lang="en-US" sz="1100" kern="100">
-                        <a:effectLst/>
-                        <a:latin typeface="Aptos" panose="020B0004020202020204" pitchFamily="34" charset="0"/>
-                        <a:ea typeface="Aptos" panose="020B0004020202020204" pitchFamily="34" charset="0"/>
-                        <a:cs typeface="Aptos" panose="020B0004020202020204" pitchFamily="34" charset="0"/>
-                      </a:endParaRPr>
-                    </a:p>
-                  </a:txBody>
-                  <a:tcPr marL="0" marR="0" marT="0" marB="0">
-                    <a:lnL w="12700" cap="flat" cmpd="sng" algn="ctr">
-                      <a:solidFill>
-                        <a:schemeClr val="tx1"/>
-                      </a:solidFill>
-                      <a:prstDash val="solid"/>
-                      <a:round/>
-                      <a:headEnd type="none" w="med" len="med"/>
-                      <a:tailEnd type="none" w="med" len="med"/>
-                    </a:lnL>
-                    <a:lnR w="12700" cap="flat" cmpd="sng" algn="ctr">
-                      <a:solidFill>
-                        <a:schemeClr val="tx1"/>
-                      </a:solidFill>
-                      <a:prstDash val="solid"/>
-                      <a:round/>
-                      <a:headEnd type="none" w="med" len="med"/>
-                      <a:tailEnd type="none" w="med" len="med"/>
-                    </a:lnR>
-                    <a:lnT w="12700" cap="flat" cmpd="sng" algn="ctr">
-                      <a:solidFill>
-                        <a:schemeClr val="tx1"/>
-                      </a:solidFill>
-                      <a:prstDash val="solid"/>
-                      <a:round/>
-                      <a:headEnd type="none" w="med" len="med"/>
-                      <a:tailEnd type="none" w="med" len="med"/>
-                    </a:lnT>
-                    <a:lnB w="12700" cap="flat" cmpd="sng" algn="ctr">
-                      <a:solidFill>
-                        <a:schemeClr val="tx1"/>
-                      </a:solidFill>
-                      <a:prstDash val="solid"/>
-                      <a:round/>
-                      <a:headEnd type="none" w="med" len="med"/>
-                      <a:tailEnd type="none" w="med" len="med"/>
-                    </a:lnB>
-                    <a:noFill/>
-                  </a:tcPr>
-                </a:tc>
-                <a:tc>
-                  <a:txBody>
-                    <a:bodyPr/>
-                    <a:lstStyle/>
-                    <a:p>
-                      <a:pPr marL="0" marR="0">
-                        <a:lnSpc>
-                          <a:spcPct val="115000"/>
-                        </a:lnSpc>
-                        <a:buNone/>
-                      </a:pPr>
-                      <a:endParaRPr lang="en-US" sz="1100" kern="100">
-                        <a:effectLst/>
-                        <a:latin typeface="Aptos" panose="020B0004020202020204" pitchFamily="34" charset="0"/>
-                        <a:ea typeface="Aptos" panose="020B0004020202020204" pitchFamily="34" charset="0"/>
-                        <a:cs typeface="Aptos" panose="020B0004020202020204" pitchFamily="34" charset="0"/>
-                      </a:endParaRPr>
-                    </a:p>
-                  </a:txBody>
-                  <a:tcPr marL="68580" marR="68580" marT="0" marB="0">
-                    <a:lnL w="12700" cap="flat" cmpd="sng" algn="ctr">
-                      <a:solidFill>
-                        <a:schemeClr val="tx1"/>
-                      </a:solidFill>
-                      <a:prstDash val="solid"/>
-                      <a:round/>
-                      <a:headEnd type="none" w="med" len="med"/>
-                      <a:tailEnd type="none" w="med" len="med"/>
-                    </a:lnL>
-                    <a:lnR w="12700" cap="flat" cmpd="sng" algn="ctr">
-                      <a:solidFill>
-                        <a:schemeClr val="tx1"/>
-                      </a:solidFill>
-                      <a:prstDash val="solid"/>
-                      <a:round/>
-                      <a:headEnd type="none" w="med" len="med"/>
-                      <a:tailEnd type="none" w="med" len="med"/>
-                    </a:lnR>
-                    <a:lnT w="12700" cap="flat" cmpd="sng" algn="ctr">
-                      <a:solidFill>
-                        <a:schemeClr val="tx1"/>
-                      </a:solidFill>
-                      <a:prstDash val="solid"/>
-                      <a:round/>
-                      <a:headEnd type="none" w="med" len="med"/>
-                      <a:tailEnd type="none" w="med" len="med"/>
-                    </a:lnT>
-                    <a:lnB w="12700" cap="flat" cmpd="sng" algn="ctr">
-                      <a:solidFill>
-                        <a:schemeClr val="tx1"/>
-                      </a:solidFill>
-                      <a:prstDash val="solid"/>
-                      <a:round/>
-                      <a:headEnd type="none" w="med" len="med"/>
-                      <a:tailEnd type="none" w="med" len="med"/>
-                    </a:lnB>
-                    <a:noFill/>
-                  </a:tcPr>
-                </a:tc>
-                <a:tc>
-                  <a:txBody>
-                    <a:bodyPr/>
-                    <a:lstStyle/>
-                    <a:p>
-                      <a:pPr marL="0" marR="0">
-                        <a:lnSpc>
-                          <a:spcPct val="115000"/>
-                        </a:lnSpc>
-                        <a:buNone/>
-                      </a:pPr>
-                      <a:endParaRPr lang="en-US" sz="1100" kern="100">
-                        <a:effectLst/>
-                        <a:latin typeface="Aptos" panose="020B0004020202020204" pitchFamily="34" charset="0"/>
-                        <a:ea typeface="Aptos" panose="020B0004020202020204" pitchFamily="34" charset="0"/>
-                        <a:cs typeface="Aptos" panose="020B0004020202020204" pitchFamily="34" charset="0"/>
-                      </a:endParaRPr>
-                    </a:p>
-                  </a:txBody>
-                  <a:tcPr marL="68580" marR="68580" marT="0" marB="0">
-                    <a:lnL w="12700" cap="flat" cmpd="sng" algn="ctr">
-                      <a:solidFill>
-                        <a:schemeClr val="tx1"/>
-                      </a:solidFill>
-                      <a:prstDash val="solid"/>
-                      <a:round/>
-                      <a:headEnd type="none" w="med" len="med"/>
-                      <a:tailEnd type="none" w="med" len="med"/>
-                    </a:lnL>
-                    <a:lnR w="12700" cap="flat" cmpd="sng" algn="ctr">
-                      <a:solidFill>
-                        <a:schemeClr val="tx1"/>
-                      </a:solidFill>
-                      <a:prstDash val="solid"/>
-                      <a:round/>
-                      <a:headEnd type="none" w="med" len="med"/>
-                      <a:tailEnd type="none" w="med" len="med"/>
-                    </a:lnR>
-                    <a:lnT w="12700" cap="flat" cmpd="sng" algn="ctr">
-                      <a:solidFill>
-                        <a:schemeClr val="tx1"/>
-                      </a:solidFill>
-                      <a:prstDash val="solid"/>
-                      <a:round/>
-                      <a:headEnd type="none" w="med" len="med"/>
-                      <a:tailEnd type="none" w="med" len="med"/>
-                    </a:lnT>
-                    <a:lnB w="12700" cap="flat" cmpd="sng" algn="ctr">
-                      <a:solidFill>
-                        <a:schemeClr val="tx1"/>
-                      </a:solidFill>
-                      <a:prstDash val="solid"/>
-                      <a:round/>
-                      <a:headEnd type="none" w="med" len="med"/>
-                      <a:tailEnd type="none" w="med" len="med"/>
-                    </a:lnB>
-                    <a:noFill/>
-                  </a:tcPr>
-                </a:tc>
-                <a:extLst>
-                  <a:ext uri="{0D108BD9-81ED-4DB2-BD59-A6C34878D82A}">
-                    <a16:rowId xmlns:a16="http://schemas.microsoft.com/office/drawing/2014/main" val="3818920805"/>
-                  </a:ext>
-                </a:extLst>
-              </a:tr>
-              <a:tr h="0">
-                <a:tc>
-                  <a:txBody>
-                    <a:bodyPr/>
-                    <a:lstStyle/>
-                    <a:p>
-                      <a:pPr marL="0" marR="0">
-                        <a:lnSpc>
-                          <a:spcPct val="115000"/>
-                        </a:lnSpc>
-                        <a:buNone/>
-                      </a:pPr>
-                      <a:endParaRPr lang="en-US" sz="1100" kern="100">
-                        <a:effectLst/>
-                        <a:latin typeface="Aptos" panose="020B0004020202020204" pitchFamily="34" charset="0"/>
-                        <a:ea typeface="Aptos" panose="020B0004020202020204" pitchFamily="34" charset="0"/>
-                        <a:cs typeface="Aptos" panose="020B0004020202020204" pitchFamily="34" charset="0"/>
-                      </a:endParaRPr>
-                    </a:p>
-                  </a:txBody>
-                  <a:tcPr marL="68580" marR="68580" marT="0" marB="0">
-                    <a:lnL w="12700" cap="flat" cmpd="sng" algn="ctr">
-                      <a:solidFill>
-                        <a:schemeClr val="tx1"/>
-                      </a:solidFill>
-                      <a:prstDash val="solid"/>
-                      <a:round/>
-                      <a:headEnd type="none" w="med" len="med"/>
-                      <a:tailEnd type="none" w="med" len="med"/>
-                    </a:lnL>
-                    <a:lnR w="12700" cap="flat" cmpd="sng" algn="ctr">
-                      <a:solidFill>
-                        <a:schemeClr val="tx1"/>
-                      </a:solidFill>
-                      <a:prstDash val="solid"/>
-                      <a:round/>
-                      <a:headEnd type="none" w="med" len="med"/>
-                      <a:tailEnd type="none" w="med" len="med"/>
-                    </a:lnR>
-                    <a:lnT w="12700" cap="flat" cmpd="sng" algn="ctr">
-                      <a:solidFill>
-                        <a:schemeClr val="tx1"/>
-                      </a:solidFill>
-                      <a:prstDash val="solid"/>
-                      <a:round/>
-                      <a:headEnd type="none" w="med" len="med"/>
-                      <a:tailEnd type="none" w="med" len="med"/>
-                    </a:lnT>
-                    <a:lnB w="12700" cap="flat" cmpd="sng" algn="ctr">
-                      <a:solidFill>
-                        <a:schemeClr val="tx1"/>
-                      </a:solidFill>
-                      <a:prstDash val="solid"/>
-                      <a:round/>
-                      <a:headEnd type="none" w="med" len="med"/>
-                      <a:tailEnd type="none" w="med" len="med"/>
-                    </a:lnB>
-                    <a:noFill/>
-                  </a:tcPr>
-                </a:tc>
-                <a:tc>
-                  <a:txBody>
-                    <a:bodyPr/>
-                    <a:lstStyle/>
-                    <a:p>
-                      <a:pPr marL="0" marR="0">
-                        <a:lnSpc>
-                          <a:spcPct val="115000"/>
-                        </a:lnSpc>
-                        <a:buNone/>
-                      </a:pPr>
-                      <a:endParaRPr lang="en-US" sz="1100" kern="100">
-                        <a:effectLst/>
-                        <a:latin typeface="Aptos" panose="020B0004020202020204" pitchFamily="34" charset="0"/>
-                        <a:ea typeface="Aptos" panose="020B0004020202020204" pitchFamily="34" charset="0"/>
-                        <a:cs typeface="Aptos" panose="020B0004020202020204" pitchFamily="34" charset="0"/>
-                      </a:endParaRPr>
-                    </a:p>
-                  </a:txBody>
-                  <a:tcPr marL="0" marR="0" marT="0" marB="0">
-                    <a:lnL w="12700" cap="flat" cmpd="sng" algn="ctr">
-                      <a:solidFill>
-                        <a:schemeClr val="tx1"/>
-                      </a:solidFill>
-                      <a:prstDash val="solid"/>
-                      <a:round/>
-                      <a:headEnd type="none" w="med" len="med"/>
-                      <a:tailEnd type="none" w="med" len="med"/>
-                    </a:lnL>
-                    <a:lnR w="12700" cap="flat" cmpd="sng" algn="ctr">
-                      <a:solidFill>
-                        <a:schemeClr val="tx1"/>
-                      </a:solidFill>
-                      <a:prstDash val="solid"/>
-                      <a:round/>
-                      <a:headEnd type="none" w="med" len="med"/>
-                      <a:tailEnd type="none" w="med" len="med"/>
-                    </a:lnR>
-                    <a:lnT w="12700" cap="flat" cmpd="sng" algn="ctr">
-                      <a:solidFill>
-                        <a:schemeClr val="tx1"/>
-                      </a:solidFill>
-                      <a:prstDash val="solid"/>
-                      <a:round/>
-                      <a:headEnd type="none" w="med" len="med"/>
-                      <a:tailEnd type="none" w="med" len="med"/>
-                    </a:lnT>
-                    <a:lnB w="12700" cap="flat" cmpd="sng" algn="ctr">
-                      <a:solidFill>
-                        <a:schemeClr val="tx1"/>
-                      </a:solidFill>
-                      <a:prstDash val="solid"/>
-                      <a:round/>
-                      <a:headEnd type="none" w="med" len="med"/>
-                      <a:tailEnd type="none" w="med" len="med"/>
-                    </a:lnB>
-                    <a:noFill/>
-                  </a:tcPr>
-                </a:tc>
-                <a:tc>
-                  <a:txBody>
-                    <a:bodyPr/>
-                    <a:lstStyle/>
-                    <a:p>
-                      <a:pPr marL="0" marR="0">
-                        <a:lnSpc>
-                          <a:spcPct val="115000"/>
-                        </a:lnSpc>
-                        <a:buNone/>
-                      </a:pPr>
-                      <a:endParaRPr lang="en-US" sz="1100" kern="100">
-                        <a:effectLst/>
-                        <a:latin typeface="Aptos" panose="020B0004020202020204" pitchFamily="34" charset="0"/>
-                        <a:ea typeface="Aptos" panose="020B0004020202020204" pitchFamily="34" charset="0"/>
-                        <a:cs typeface="Aptos" panose="020B0004020202020204" pitchFamily="34" charset="0"/>
-                      </a:endParaRPr>
-                    </a:p>
-                  </a:txBody>
-                  <a:tcPr marL="68580" marR="68580" marT="0" marB="0">
-                    <a:lnL w="12700" cap="flat" cmpd="sng" algn="ctr">
-                      <a:solidFill>
-                        <a:schemeClr val="tx1"/>
-                      </a:solidFill>
-                      <a:prstDash val="solid"/>
-                      <a:round/>
-                      <a:headEnd type="none" w="med" len="med"/>
-                      <a:tailEnd type="none" w="med" len="med"/>
-                    </a:lnL>
-                    <a:lnR w="12700" cap="flat" cmpd="sng" algn="ctr">
-                      <a:solidFill>
-                        <a:schemeClr val="tx1"/>
-                      </a:solidFill>
-                      <a:prstDash val="solid"/>
-                      <a:round/>
-                      <a:headEnd type="none" w="med" len="med"/>
-                      <a:tailEnd type="none" w="med" len="med"/>
-                    </a:lnR>
-                    <a:lnT w="12700" cap="flat" cmpd="sng" algn="ctr">
-                      <a:solidFill>
-                        <a:schemeClr val="tx1"/>
-                      </a:solidFill>
-                      <a:prstDash val="solid"/>
-                      <a:round/>
-                      <a:headEnd type="none" w="med" len="med"/>
-                      <a:tailEnd type="none" w="med" len="med"/>
-                    </a:lnT>
-                    <a:lnB w="12700" cap="flat" cmpd="sng" algn="ctr">
-                      <a:solidFill>
-                        <a:schemeClr val="tx1"/>
-                      </a:solidFill>
-                      <a:prstDash val="solid"/>
-                      <a:round/>
-                      <a:headEnd type="none" w="med" len="med"/>
-                      <a:tailEnd type="none" w="med" len="med"/>
-                    </a:lnB>
-                    <a:noFill/>
-                  </a:tcPr>
-                </a:tc>
-                <a:tc>
-                  <a:txBody>
-                    <a:bodyPr/>
-                    <a:lstStyle/>
-                    <a:p>
-                      <a:pPr marL="0" marR="0">
-                        <a:lnSpc>
-                          <a:spcPct val="115000"/>
-                        </a:lnSpc>
-                        <a:buNone/>
-                      </a:pPr>
-                      <a:endParaRPr lang="en-US" sz="1100" kern="100" dirty="0">
-                        <a:effectLst/>
-                        <a:latin typeface="Aptos" panose="020B0004020202020204" pitchFamily="34" charset="0"/>
-                        <a:ea typeface="Aptos" panose="020B0004020202020204" pitchFamily="34" charset="0"/>
-                        <a:cs typeface="Aptos" panose="020B0004020202020204" pitchFamily="34" charset="0"/>
-                      </a:endParaRPr>
-                    </a:p>
-                  </a:txBody>
-                  <a:tcPr marL="68580" marR="68580" marT="0" marB="0">
-                    <a:lnL w="12700" cap="flat" cmpd="sng" algn="ctr">
-                      <a:solidFill>
-                        <a:schemeClr val="tx1"/>
-                      </a:solidFill>
-                      <a:prstDash val="solid"/>
-                      <a:round/>
-                      <a:headEnd type="none" w="med" len="med"/>
-                      <a:tailEnd type="none" w="med" len="med"/>
-                    </a:lnL>
-                    <a:lnR w="12700" cap="flat" cmpd="sng" algn="ctr">
-                      <a:solidFill>
-                        <a:schemeClr val="tx1"/>
-                      </a:solidFill>
-                      <a:prstDash val="solid"/>
-                      <a:round/>
-                      <a:headEnd type="none" w="med" len="med"/>
-                      <a:tailEnd type="none" w="med" len="med"/>
-                    </a:lnR>
-                    <a:lnT w="12700" cap="flat" cmpd="sng" algn="ctr">
-                      <a:solidFill>
-                        <a:schemeClr val="tx1"/>
-                      </a:solidFill>
-                      <a:prstDash val="solid"/>
-                      <a:round/>
-                      <a:headEnd type="none" w="med" len="med"/>
-                      <a:tailEnd type="none" w="med" len="med"/>
-                    </a:lnT>
-                    <a:lnB w="12700" cap="flat" cmpd="sng" algn="ctr">
-                      <a:solidFill>
-                        <a:schemeClr val="tx1"/>
-                      </a:solidFill>
-                      <a:prstDash val="solid"/>
-                      <a:round/>
-                      <a:headEnd type="none" w="med" len="med"/>
-                      <a:tailEnd type="none" w="med" len="med"/>
-                    </a:lnB>
-                    <a:noFill/>
-                  </a:tcPr>
-                </a:tc>
-                <a:extLst>
-                  <a:ext uri="{0D108BD9-81ED-4DB2-BD59-A6C34878D82A}">
-                    <a16:rowId xmlns:a16="http://schemas.microsoft.com/office/drawing/2014/main" val="59466315"/>
-                  </a:ext>
-                </a:extLst>
-              </a:tr>
-            </a:tbl>
-          </a:graphicData>
-        </a:graphic>
-      </p:graphicFrame>
       <p:sp>
         <p:nvSpPr>
           <p:cNvPr id="7" name="TextBox 6">
             <a:extLst>
               <a:ext uri="{FF2B5EF4-FFF2-40B4-BE49-F238E27FC236}">
-                <a16:creationId xmlns:a16="http://schemas.microsoft.com/office/drawing/2014/main" id="{A0F2237D-0F23-4645-786B-3DA114E5B169}"/>
+                <a16:creationId xmlns:a16="http://schemas.microsoft.com/office/drawing/2014/main" id="{BE62D75C-5871-DBF0-B36D-B1D9792D2152}"/>
               </a:ext>
             </a:extLst>
           </p:cNvPr>
@@ -6959,7 +7103,7 @@
     </p:spTree>
     <p:extLst>
       <p:ext uri="{BB962C8B-B14F-4D97-AF65-F5344CB8AC3E}">
-        <p14:creationId xmlns:p14="http://schemas.microsoft.com/office/powerpoint/2010/main" val="2390166092"/>
+        <p14:creationId xmlns:p14="http://schemas.microsoft.com/office/powerpoint/2010/main" val="2260075267"/>
       </p:ext>
     </p:extLst>
   </p:cSld>
@@ -6969,7 +7113,7 @@
 </p:sld>
 </file>
 
-<file path=ppt/slides/slide14.xml><?xml version="1.0" encoding="utf-8"?>
+<file path=ppt/slides/slide15.xml><?xml version="1.0" encoding="utf-8"?>
 <p:sld xmlns:a="http://schemas.openxmlformats.org/drawingml/2006/main" xmlns:r="http://schemas.openxmlformats.org/officeDocument/2006/relationships" xmlns:p="http://schemas.openxmlformats.org/presentationml/2006/main">
   <p:cSld>
     <p:spTree>
@@ -11009,7 +11153,7 @@
           <a:p>
             <a:fld id="{88E0E29E-E225-F048-A964-380D52CA58AC}" type="slidenum">
               <a:rPr lang="en-US" smtClean="0"/>
-              <a:t>14</a:t>
+              <a:t>15</a:t>
             </a:fld>
             <a:endParaRPr lang="en-US"/>
           </a:p>
@@ -11108,7 +11252,7 @@
 </p:sld>
 </file>
 
-<file path=ppt/slides/slide15.xml><?xml version="1.0" encoding="utf-8"?>
+<file path=ppt/slides/slide16.xml><?xml version="1.0" encoding="utf-8"?>
 <p:sld xmlns:a="http://schemas.openxmlformats.org/drawingml/2006/main" xmlns:r="http://schemas.openxmlformats.org/officeDocument/2006/relationships" xmlns:p="http://schemas.openxmlformats.org/presentationml/2006/main">
   <p:cSld>
     <p:spTree>
@@ -12917,7 +13061,7 @@
           <a:p>
             <a:fld id="{88E0E29E-E225-F048-A964-380D52CA58AC}" type="slidenum">
               <a:rPr lang="en-US" smtClean="0"/>
-              <a:t>15</a:t>
+              <a:t>16</a:t>
             </a:fld>
             <a:endParaRPr lang="en-US"/>
           </a:p>
@@ -13042,7 +13186,7 @@
 </p:sld>
 </file>
 
-<file path=ppt/slides/slide16.xml><?xml version="1.0" encoding="utf-8"?>
+<file path=ppt/slides/slide17.xml><?xml version="1.0" encoding="utf-8"?>
 <p:sld xmlns:a="http://schemas.openxmlformats.org/drawingml/2006/main" xmlns:r="http://schemas.openxmlformats.org/officeDocument/2006/relationships" xmlns:p="http://schemas.openxmlformats.org/presentationml/2006/main">
   <p:cSld>
     <p:spTree>
@@ -14907,7 +15051,7 @@
           <a:p>
             <a:fld id="{88E0E29E-E225-F048-A964-380D52CA58AC}" type="slidenum">
               <a:rPr lang="en-US" smtClean="0"/>
-              <a:t>16</a:t>
+              <a:t>17</a:t>
             </a:fld>
             <a:endParaRPr lang="en-US"/>
           </a:p>
@@ -14968,7 +15112,7 @@
 </p:sld>
 </file>
 
-<file path=ppt/slides/slide17.xml><?xml version="1.0" encoding="utf-8"?>
+<file path=ppt/slides/slide18.xml><?xml version="1.0" encoding="utf-8"?>
 <p:sld xmlns:a="http://schemas.openxmlformats.org/drawingml/2006/main" xmlns:r="http://schemas.openxmlformats.org/officeDocument/2006/relationships" xmlns:p="http://schemas.openxmlformats.org/presentationml/2006/main">
   <p:cSld>
     <p:spTree>
@@ -15520,7 +15664,7 @@
           <a:p>
             <a:fld id="{88E0E29E-E225-F048-A964-380D52CA58AC}" type="slidenum">
               <a:rPr lang="en-US" smtClean="0"/>
-              <a:t>17</a:t>
+              <a:t>18</a:t>
             </a:fld>
             <a:endParaRPr lang="en-US"/>
           </a:p>
@@ -15574,7 +15718,7 @@
 </p:sld>
 </file>
 
-<file path=ppt/slides/slide18.xml><?xml version="1.0" encoding="utf-8"?>
+<file path=ppt/slides/slide19.xml><?xml version="1.0" encoding="utf-8"?>
 <p:sld xmlns:a="http://schemas.openxmlformats.org/drawingml/2006/main" xmlns:r="http://schemas.openxmlformats.org/officeDocument/2006/relationships" xmlns:p="http://schemas.openxmlformats.org/presentationml/2006/main">
   <p:cSld>
     <p:spTree>
@@ -15750,7 +15894,7 @@
           <a:p>
             <a:fld id="{88E0E29E-E225-F048-A964-380D52CA58AC}" type="slidenum">
               <a:rPr lang="en-US" smtClean="0"/>
-              <a:t>18</a:t>
+              <a:t>19</a:t>
             </a:fld>
             <a:endParaRPr lang="en-US"/>
           </a:p>
@@ -15802,388 +15946,6 @@
     <p:extLst>
       <p:ext uri="{BB962C8B-B14F-4D97-AF65-F5344CB8AC3E}">
         <p14:creationId xmlns:p14="http://schemas.microsoft.com/office/powerpoint/2010/main" val="249717310"/>
-      </p:ext>
-    </p:extLst>
-  </p:cSld>
-  <p:clrMapOvr>
-    <a:masterClrMapping/>
-  </p:clrMapOvr>
-</p:sld>
-</file>
-
-<file path=ppt/slides/slide19.xml><?xml version="1.0" encoding="utf-8"?>
-<p:sld xmlns:a="http://schemas.openxmlformats.org/drawingml/2006/main" xmlns:r="http://schemas.openxmlformats.org/officeDocument/2006/relationships" xmlns:p="http://schemas.openxmlformats.org/presentationml/2006/main">
-  <p:cSld>
-    <p:spTree>
-      <p:nvGrpSpPr>
-        <p:cNvPr id="1" name=""/>
-        <p:cNvGrpSpPr/>
-        <p:nvPr/>
-      </p:nvGrpSpPr>
-      <p:grpSpPr>
-        <a:xfrm>
-          <a:off x="0" y="0"/>
-          <a:ext cx="0" cy="0"/>
-          <a:chOff x="0" y="0"/>
-          <a:chExt cx="0" cy="0"/>
-        </a:xfrm>
-      </p:grpSpPr>
-      <p:sp>
-        <p:nvSpPr>
-          <p:cNvPr id="2" name="Title 1">
-            <a:extLst>
-              <a:ext uri="{FF2B5EF4-FFF2-40B4-BE49-F238E27FC236}">
-                <a16:creationId xmlns:a16="http://schemas.microsoft.com/office/drawing/2014/main" id="{A8DC355E-70B6-97C4-E00C-3E02B7D3B230}"/>
-              </a:ext>
-            </a:extLst>
-          </p:cNvPr>
-          <p:cNvSpPr>
-            <a:spLocks noGrp="1"/>
-          </p:cNvSpPr>
-          <p:nvPr>
-            <p:ph type="title"/>
-          </p:nvPr>
-        </p:nvSpPr>
-        <p:spPr/>
-        <p:txBody>
-          <a:bodyPr/>
-          <a:lstStyle/>
-          <a:p>
-            <a:r>
-              <a:rPr lang="en-US" sz="3500"/>
-              <a:t>Content for TechPort</a:t>
-            </a:r>
-          </a:p>
-        </p:txBody>
-      </p:sp>
-      <p:sp>
-        <p:nvSpPr>
-          <p:cNvPr id="3" name="Text Placeholder 2">
-            <a:extLst>
-              <a:ext uri="{FF2B5EF4-FFF2-40B4-BE49-F238E27FC236}">
-                <a16:creationId xmlns:a16="http://schemas.microsoft.com/office/drawing/2014/main" id="{A6AB0532-23B8-CF0B-3359-6B5281A98E4A}"/>
-              </a:ext>
-            </a:extLst>
-          </p:cNvPr>
-          <p:cNvSpPr>
-            <a:spLocks noGrp="1"/>
-          </p:cNvSpPr>
-          <p:nvPr>
-            <p:ph type="body" idx="1"/>
-          </p:nvPr>
-        </p:nvSpPr>
-        <p:spPr>
-          <a:xfrm>
-            <a:off x="839107" y="1124465"/>
-            <a:ext cx="10515600" cy="4899871"/>
-          </a:xfrm>
-        </p:spPr>
-        <p:txBody>
-          <a:bodyPr vert="horz" lIns="91440" tIns="45720" rIns="91440" bIns="45720" rtlCol="0" anchor="t">
-            <a:normAutofit/>
-          </a:bodyPr>
-          <a:lstStyle/>
-          <a:p>
-            <a:pPr marL="285750" indent="-285750">
-              <a:buFont typeface="Arial"/>
-              <a:buChar char="•"/>
-            </a:pPr>
-            <a:r>
-              <a:rPr lang="en-US" b="1">
-                <a:ea typeface="+mn-lt"/>
-                <a:cs typeface="+mn-lt"/>
-              </a:rPr>
-              <a:t>Final TRL:</a:t>
-            </a:r>
-          </a:p>
-          <a:p>
-            <a:pPr marL="285750" indent="-285750">
-              <a:buFont typeface="Arial"/>
-              <a:buChar char="•"/>
-            </a:pPr>
-            <a:r>
-              <a:rPr lang="en-US" b="1">
-                <a:ea typeface="+mn-lt"/>
-                <a:cs typeface="+mn-lt"/>
-              </a:rPr>
-              <a:t>TRL justification</a:t>
-            </a:r>
-            <a:br>
-              <a:rPr lang="en-US">
-                <a:ea typeface="+mn-lt"/>
-                <a:cs typeface="+mn-lt"/>
-              </a:rPr>
-            </a:br>
-            <a:r>
-              <a:rPr lang="en-US">
-                <a:ea typeface="+mn-lt"/>
-                <a:cs typeface="+mn-lt"/>
-              </a:rPr>
-              <a:t>Provide a narrative description of your current TRL. Provide a table of tests including the date at which they occurred.</a:t>
-            </a:r>
-            <a:endParaRPr lang="en-US"/>
-          </a:p>
-          <a:p>
-            <a:pPr marL="285750" indent="-285750">
-              <a:buFont typeface="Arial"/>
-              <a:buChar char="•"/>
-            </a:pPr>
-            <a:r>
-              <a:rPr lang="en-US" b="1"/>
-              <a:t>Performance</a:t>
-            </a:r>
-            <a:br>
-              <a:rPr lang="en-US"/>
-            </a:br>
-            <a:br>
-              <a:rPr lang="en-US"/>
-            </a:br>
-            <a:br>
-              <a:rPr lang="en-US"/>
-            </a:br>
-            <a:endParaRPr lang="en-US"/>
-          </a:p>
-        </p:txBody>
-      </p:sp>
-      <p:sp>
-        <p:nvSpPr>
-          <p:cNvPr id="4" name="Slide Number Placeholder 3">
-            <a:extLst>
-              <a:ext uri="{FF2B5EF4-FFF2-40B4-BE49-F238E27FC236}">
-                <a16:creationId xmlns:a16="http://schemas.microsoft.com/office/drawing/2014/main" id="{775AD024-F3AB-E795-6EF6-3B29E0A1686B}"/>
-              </a:ext>
-            </a:extLst>
-          </p:cNvPr>
-          <p:cNvSpPr>
-            <a:spLocks noGrp="1"/>
-          </p:cNvSpPr>
-          <p:nvPr>
-            <p:ph type="sldNum" sz="quarter" idx="12"/>
-          </p:nvPr>
-        </p:nvSpPr>
-        <p:spPr/>
-        <p:txBody>
-          <a:bodyPr/>
-          <a:lstStyle/>
-          <a:p>
-            <a:fld id="{88E0E29E-E225-F048-A964-380D52CA58AC}" type="slidenum">
-              <a:rPr lang="en-US" smtClean="0"/>
-              <a:t>19</a:t>
-            </a:fld>
-            <a:endParaRPr lang="en-US"/>
-          </a:p>
-        </p:txBody>
-      </p:sp>
-      <p:graphicFrame>
-        <p:nvGraphicFramePr>
-          <p:cNvPr id="7" name="Table 6">
-            <a:extLst>
-              <a:ext uri="{FF2B5EF4-FFF2-40B4-BE49-F238E27FC236}">
-                <a16:creationId xmlns:a16="http://schemas.microsoft.com/office/drawing/2014/main" id="{6E5AD7D8-2D0E-8908-73CF-C68A54E5603B}"/>
-              </a:ext>
-            </a:extLst>
-          </p:cNvPr>
-          <p:cNvGraphicFramePr>
-            <a:graphicFrameLocks noGrp="1"/>
-          </p:cNvGraphicFramePr>
-          <p:nvPr>
-            <p:extLst>
-              <p:ext uri="{D42A27DB-BD31-4B8C-83A1-F6EECF244321}">
-                <p14:modId xmlns:p14="http://schemas.microsoft.com/office/powerpoint/2010/main" val="3238025674"/>
-              </p:ext>
-            </p:extLst>
-          </p:nvPr>
-        </p:nvGraphicFramePr>
-        <p:xfrm>
-          <a:off x="2248518" y="3183430"/>
-          <a:ext cx="8168640" cy="1483360"/>
-        </p:xfrm>
-        <a:graphic>
-          <a:graphicData uri="http://schemas.openxmlformats.org/drawingml/2006/table">
-            <a:tbl>
-              <a:tblPr firstRow="1" bandRow="1">
-                <a:tableStyleId>{5C22544A-7EE6-4342-B048-85BDC9FD1C3A}</a:tableStyleId>
-              </a:tblPr>
-              <a:tblGrid>
-                <a:gridCol w="4084320">
-                  <a:extLst>
-                    <a:ext uri="{9D8B030D-6E8A-4147-A177-3AD203B41FA5}">
-                      <a16:colId xmlns:a16="http://schemas.microsoft.com/office/drawing/2014/main" val="1801936206"/>
-                    </a:ext>
-                  </a:extLst>
-                </a:gridCol>
-                <a:gridCol w="4084320">
-                  <a:extLst>
-                    <a:ext uri="{9D8B030D-6E8A-4147-A177-3AD203B41FA5}">
-                      <a16:colId xmlns:a16="http://schemas.microsoft.com/office/drawing/2014/main" val="1730509007"/>
-                    </a:ext>
-                  </a:extLst>
-                </a:gridCol>
-              </a:tblGrid>
-              <a:tr h="370840">
-                <a:tc>
-                  <a:txBody>
-                    <a:bodyPr/>
-                    <a:lstStyle/>
-                    <a:p>
-                      <a:r>
-                        <a:rPr lang="en-US"/>
-                        <a:t>Parameter (e.g., Range, Resolution)</a:t>
-                      </a:r>
-                    </a:p>
-                  </a:txBody>
-                  <a:tcPr/>
-                </a:tc>
-                <a:tc>
-                  <a:txBody>
-                    <a:bodyPr/>
-                    <a:lstStyle/>
-                    <a:p>
-                      <a:r>
-                        <a:rPr lang="en-US"/>
-                        <a:t>Final Performance</a:t>
-                      </a:r>
-                    </a:p>
-                  </a:txBody>
-                  <a:tcPr/>
-                </a:tc>
-                <a:extLst>
-                  <a:ext uri="{0D108BD9-81ED-4DB2-BD59-A6C34878D82A}">
-                    <a16:rowId xmlns:a16="http://schemas.microsoft.com/office/drawing/2014/main" val="685339146"/>
-                  </a:ext>
-                </a:extLst>
-              </a:tr>
-              <a:tr h="370840">
-                <a:tc>
-                  <a:txBody>
-                    <a:bodyPr/>
-                    <a:lstStyle/>
-                    <a:p>
-                      <a:endParaRPr lang="en-US"/>
-                    </a:p>
-                  </a:txBody>
-                  <a:tcPr/>
-                </a:tc>
-                <a:tc>
-                  <a:txBody>
-                    <a:bodyPr/>
-                    <a:lstStyle/>
-                    <a:p>
-                      <a:endParaRPr lang="en-US"/>
-                    </a:p>
-                  </a:txBody>
-                  <a:tcPr/>
-                </a:tc>
-                <a:extLst>
-                  <a:ext uri="{0D108BD9-81ED-4DB2-BD59-A6C34878D82A}">
-                    <a16:rowId xmlns:a16="http://schemas.microsoft.com/office/drawing/2014/main" val="1735087140"/>
-                  </a:ext>
-                </a:extLst>
-              </a:tr>
-              <a:tr h="370840">
-                <a:tc>
-                  <a:txBody>
-                    <a:bodyPr/>
-                    <a:lstStyle/>
-                    <a:p>
-                      <a:endParaRPr lang="en-US"/>
-                    </a:p>
-                  </a:txBody>
-                  <a:tcPr/>
-                </a:tc>
-                <a:tc>
-                  <a:txBody>
-                    <a:bodyPr/>
-                    <a:lstStyle/>
-                    <a:p>
-                      <a:endParaRPr lang="en-US"/>
-                    </a:p>
-                  </a:txBody>
-                  <a:tcPr/>
-                </a:tc>
-                <a:extLst>
-                  <a:ext uri="{0D108BD9-81ED-4DB2-BD59-A6C34878D82A}">
-                    <a16:rowId xmlns:a16="http://schemas.microsoft.com/office/drawing/2014/main" val="1250948392"/>
-                  </a:ext>
-                </a:extLst>
-              </a:tr>
-              <a:tr h="370840">
-                <a:tc>
-                  <a:txBody>
-                    <a:bodyPr/>
-                    <a:lstStyle/>
-                    <a:p>
-                      <a:endParaRPr lang="en-US"/>
-                    </a:p>
-                  </a:txBody>
-                  <a:tcPr/>
-                </a:tc>
-                <a:tc>
-                  <a:txBody>
-                    <a:bodyPr/>
-                    <a:lstStyle/>
-                    <a:p>
-                      <a:endParaRPr lang="en-US"/>
-                    </a:p>
-                  </a:txBody>
-                  <a:tcPr/>
-                </a:tc>
-                <a:extLst>
-                  <a:ext uri="{0D108BD9-81ED-4DB2-BD59-A6C34878D82A}">
-                    <a16:rowId xmlns:a16="http://schemas.microsoft.com/office/drawing/2014/main" val="3268759614"/>
-                  </a:ext>
-                </a:extLst>
-              </a:tr>
-            </a:tbl>
-          </a:graphicData>
-        </a:graphic>
-      </p:graphicFrame>
-      <p:sp>
-        <p:nvSpPr>
-          <p:cNvPr id="5" name="TextBox 4">
-            <a:extLst>
-              <a:ext uri="{FF2B5EF4-FFF2-40B4-BE49-F238E27FC236}">
-                <a16:creationId xmlns:a16="http://schemas.microsoft.com/office/drawing/2014/main" id="{AFC7F1AE-8AE7-93D6-DAD1-31BCBE2453A6}"/>
-              </a:ext>
-            </a:extLst>
-          </p:cNvPr>
-          <p:cNvSpPr txBox="1"/>
-          <p:nvPr/>
-        </p:nvSpPr>
-        <p:spPr>
-          <a:xfrm>
-            <a:off x="9351045" y="857765"/>
-            <a:ext cx="2009105" cy="369332"/>
-          </a:xfrm>
-          <a:prstGeom prst="rect">
-            <a:avLst/>
-          </a:prstGeom>
-          <a:solidFill>
-            <a:schemeClr val="accent1"/>
-          </a:solidFill>
-        </p:spPr>
-        <p:txBody>
-          <a:bodyPr wrap="square" rtlCol="0">
-            <a:spAutoFit/>
-          </a:bodyPr>
-          <a:lstStyle/>
-          <a:p>
-            <a:pPr algn="ctr"/>
-            <a:r>
-              <a:rPr lang="en-US">
-                <a:solidFill>
-                  <a:schemeClr val="bg1"/>
-                </a:solidFill>
-              </a:rPr>
-              <a:t>New Slide</a:t>
-            </a:r>
-          </a:p>
-        </p:txBody>
-      </p:sp>
-    </p:spTree>
-    <p:extLst>
-      <p:ext uri="{BB962C8B-B14F-4D97-AF65-F5344CB8AC3E}">
-        <p14:creationId xmlns:p14="http://schemas.microsoft.com/office/powerpoint/2010/main" val="2383515617"/>
       </p:ext>
     </p:extLst>
   </p:cSld>
@@ -18159,6 +17921,388 @@
           <p:cNvPr id="2" name="Title 1">
             <a:extLst>
               <a:ext uri="{FF2B5EF4-FFF2-40B4-BE49-F238E27FC236}">
+                <a16:creationId xmlns:a16="http://schemas.microsoft.com/office/drawing/2014/main" id="{A8DC355E-70B6-97C4-E00C-3E02B7D3B230}"/>
+              </a:ext>
+            </a:extLst>
+          </p:cNvPr>
+          <p:cNvSpPr>
+            <a:spLocks noGrp="1"/>
+          </p:cNvSpPr>
+          <p:nvPr>
+            <p:ph type="title"/>
+          </p:nvPr>
+        </p:nvSpPr>
+        <p:spPr/>
+        <p:txBody>
+          <a:bodyPr/>
+          <a:lstStyle/>
+          <a:p>
+            <a:r>
+              <a:rPr lang="en-US" sz="3500"/>
+              <a:t>Content for TechPort</a:t>
+            </a:r>
+          </a:p>
+        </p:txBody>
+      </p:sp>
+      <p:sp>
+        <p:nvSpPr>
+          <p:cNvPr id="3" name="Text Placeholder 2">
+            <a:extLst>
+              <a:ext uri="{FF2B5EF4-FFF2-40B4-BE49-F238E27FC236}">
+                <a16:creationId xmlns:a16="http://schemas.microsoft.com/office/drawing/2014/main" id="{A6AB0532-23B8-CF0B-3359-6B5281A98E4A}"/>
+              </a:ext>
+            </a:extLst>
+          </p:cNvPr>
+          <p:cNvSpPr>
+            <a:spLocks noGrp="1"/>
+          </p:cNvSpPr>
+          <p:nvPr>
+            <p:ph type="body" idx="1"/>
+          </p:nvPr>
+        </p:nvSpPr>
+        <p:spPr>
+          <a:xfrm>
+            <a:off x="839107" y="1124465"/>
+            <a:ext cx="10515600" cy="4899871"/>
+          </a:xfrm>
+        </p:spPr>
+        <p:txBody>
+          <a:bodyPr vert="horz" lIns="91440" tIns="45720" rIns="91440" bIns="45720" rtlCol="0" anchor="t">
+            <a:normAutofit/>
+          </a:bodyPr>
+          <a:lstStyle/>
+          <a:p>
+            <a:pPr marL="285750" indent="-285750">
+              <a:buFont typeface="Arial"/>
+              <a:buChar char="•"/>
+            </a:pPr>
+            <a:r>
+              <a:rPr lang="en-US" b="1">
+                <a:ea typeface="+mn-lt"/>
+                <a:cs typeface="+mn-lt"/>
+              </a:rPr>
+              <a:t>Final TRL:</a:t>
+            </a:r>
+          </a:p>
+          <a:p>
+            <a:pPr marL="285750" indent="-285750">
+              <a:buFont typeface="Arial"/>
+              <a:buChar char="•"/>
+            </a:pPr>
+            <a:r>
+              <a:rPr lang="en-US" b="1">
+                <a:ea typeface="+mn-lt"/>
+                <a:cs typeface="+mn-lt"/>
+              </a:rPr>
+              <a:t>TRL justification</a:t>
+            </a:r>
+            <a:br>
+              <a:rPr lang="en-US">
+                <a:ea typeface="+mn-lt"/>
+                <a:cs typeface="+mn-lt"/>
+              </a:rPr>
+            </a:br>
+            <a:r>
+              <a:rPr lang="en-US">
+                <a:ea typeface="+mn-lt"/>
+                <a:cs typeface="+mn-lt"/>
+              </a:rPr>
+              <a:t>Provide a narrative description of your current TRL. Provide a table of tests including the date at which they occurred.</a:t>
+            </a:r>
+            <a:endParaRPr lang="en-US"/>
+          </a:p>
+          <a:p>
+            <a:pPr marL="285750" indent="-285750">
+              <a:buFont typeface="Arial"/>
+              <a:buChar char="•"/>
+            </a:pPr>
+            <a:r>
+              <a:rPr lang="en-US" b="1"/>
+              <a:t>Performance</a:t>
+            </a:r>
+            <a:br>
+              <a:rPr lang="en-US"/>
+            </a:br>
+            <a:br>
+              <a:rPr lang="en-US"/>
+            </a:br>
+            <a:br>
+              <a:rPr lang="en-US"/>
+            </a:br>
+            <a:endParaRPr lang="en-US"/>
+          </a:p>
+        </p:txBody>
+      </p:sp>
+      <p:sp>
+        <p:nvSpPr>
+          <p:cNvPr id="4" name="Slide Number Placeholder 3">
+            <a:extLst>
+              <a:ext uri="{FF2B5EF4-FFF2-40B4-BE49-F238E27FC236}">
+                <a16:creationId xmlns:a16="http://schemas.microsoft.com/office/drawing/2014/main" id="{775AD024-F3AB-E795-6EF6-3B29E0A1686B}"/>
+              </a:ext>
+            </a:extLst>
+          </p:cNvPr>
+          <p:cNvSpPr>
+            <a:spLocks noGrp="1"/>
+          </p:cNvSpPr>
+          <p:nvPr>
+            <p:ph type="sldNum" sz="quarter" idx="12"/>
+          </p:nvPr>
+        </p:nvSpPr>
+        <p:spPr/>
+        <p:txBody>
+          <a:bodyPr/>
+          <a:lstStyle/>
+          <a:p>
+            <a:fld id="{88E0E29E-E225-F048-A964-380D52CA58AC}" type="slidenum">
+              <a:rPr lang="en-US" smtClean="0"/>
+              <a:t>20</a:t>
+            </a:fld>
+            <a:endParaRPr lang="en-US"/>
+          </a:p>
+        </p:txBody>
+      </p:sp>
+      <p:graphicFrame>
+        <p:nvGraphicFramePr>
+          <p:cNvPr id="7" name="Table 6">
+            <a:extLst>
+              <a:ext uri="{FF2B5EF4-FFF2-40B4-BE49-F238E27FC236}">
+                <a16:creationId xmlns:a16="http://schemas.microsoft.com/office/drawing/2014/main" id="{6E5AD7D8-2D0E-8908-73CF-C68A54E5603B}"/>
+              </a:ext>
+            </a:extLst>
+          </p:cNvPr>
+          <p:cNvGraphicFramePr>
+            <a:graphicFrameLocks noGrp="1"/>
+          </p:cNvGraphicFramePr>
+          <p:nvPr>
+            <p:extLst>
+              <p:ext uri="{D42A27DB-BD31-4B8C-83A1-F6EECF244321}">
+                <p14:modId xmlns:p14="http://schemas.microsoft.com/office/powerpoint/2010/main" val="3238025674"/>
+              </p:ext>
+            </p:extLst>
+          </p:nvPr>
+        </p:nvGraphicFramePr>
+        <p:xfrm>
+          <a:off x="2248518" y="3183430"/>
+          <a:ext cx="8168640" cy="1483360"/>
+        </p:xfrm>
+        <a:graphic>
+          <a:graphicData uri="http://schemas.openxmlformats.org/drawingml/2006/table">
+            <a:tbl>
+              <a:tblPr firstRow="1" bandRow="1">
+                <a:tableStyleId>{5C22544A-7EE6-4342-B048-85BDC9FD1C3A}</a:tableStyleId>
+              </a:tblPr>
+              <a:tblGrid>
+                <a:gridCol w="4084320">
+                  <a:extLst>
+                    <a:ext uri="{9D8B030D-6E8A-4147-A177-3AD203B41FA5}">
+                      <a16:colId xmlns:a16="http://schemas.microsoft.com/office/drawing/2014/main" val="1801936206"/>
+                    </a:ext>
+                  </a:extLst>
+                </a:gridCol>
+                <a:gridCol w="4084320">
+                  <a:extLst>
+                    <a:ext uri="{9D8B030D-6E8A-4147-A177-3AD203B41FA5}">
+                      <a16:colId xmlns:a16="http://schemas.microsoft.com/office/drawing/2014/main" val="1730509007"/>
+                    </a:ext>
+                  </a:extLst>
+                </a:gridCol>
+              </a:tblGrid>
+              <a:tr h="370840">
+                <a:tc>
+                  <a:txBody>
+                    <a:bodyPr/>
+                    <a:lstStyle/>
+                    <a:p>
+                      <a:r>
+                        <a:rPr lang="en-US"/>
+                        <a:t>Parameter (e.g., Range, Resolution)</a:t>
+                      </a:r>
+                    </a:p>
+                  </a:txBody>
+                  <a:tcPr/>
+                </a:tc>
+                <a:tc>
+                  <a:txBody>
+                    <a:bodyPr/>
+                    <a:lstStyle/>
+                    <a:p>
+                      <a:r>
+                        <a:rPr lang="en-US"/>
+                        <a:t>Final Performance</a:t>
+                      </a:r>
+                    </a:p>
+                  </a:txBody>
+                  <a:tcPr/>
+                </a:tc>
+                <a:extLst>
+                  <a:ext uri="{0D108BD9-81ED-4DB2-BD59-A6C34878D82A}">
+                    <a16:rowId xmlns:a16="http://schemas.microsoft.com/office/drawing/2014/main" val="685339146"/>
+                  </a:ext>
+                </a:extLst>
+              </a:tr>
+              <a:tr h="370840">
+                <a:tc>
+                  <a:txBody>
+                    <a:bodyPr/>
+                    <a:lstStyle/>
+                    <a:p>
+                      <a:endParaRPr lang="en-US"/>
+                    </a:p>
+                  </a:txBody>
+                  <a:tcPr/>
+                </a:tc>
+                <a:tc>
+                  <a:txBody>
+                    <a:bodyPr/>
+                    <a:lstStyle/>
+                    <a:p>
+                      <a:endParaRPr lang="en-US"/>
+                    </a:p>
+                  </a:txBody>
+                  <a:tcPr/>
+                </a:tc>
+                <a:extLst>
+                  <a:ext uri="{0D108BD9-81ED-4DB2-BD59-A6C34878D82A}">
+                    <a16:rowId xmlns:a16="http://schemas.microsoft.com/office/drawing/2014/main" val="1735087140"/>
+                  </a:ext>
+                </a:extLst>
+              </a:tr>
+              <a:tr h="370840">
+                <a:tc>
+                  <a:txBody>
+                    <a:bodyPr/>
+                    <a:lstStyle/>
+                    <a:p>
+                      <a:endParaRPr lang="en-US"/>
+                    </a:p>
+                  </a:txBody>
+                  <a:tcPr/>
+                </a:tc>
+                <a:tc>
+                  <a:txBody>
+                    <a:bodyPr/>
+                    <a:lstStyle/>
+                    <a:p>
+                      <a:endParaRPr lang="en-US"/>
+                    </a:p>
+                  </a:txBody>
+                  <a:tcPr/>
+                </a:tc>
+                <a:extLst>
+                  <a:ext uri="{0D108BD9-81ED-4DB2-BD59-A6C34878D82A}">
+                    <a16:rowId xmlns:a16="http://schemas.microsoft.com/office/drawing/2014/main" val="1250948392"/>
+                  </a:ext>
+                </a:extLst>
+              </a:tr>
+              <a:tr h="370840">
+                <a:tc>
+                  <a:txBody>
+                    <a:bodyPr/>
+                    <a:lstStyle/>
+                    <a:p>
+                      <a:endParaRPr lang="en-US"/>
+                    </a:p>
+                  </a:txBody>
+                  <a:tcPr/>
+                </a:tc>
+                <a:tc>
+                  <a:txBody>
+                    <a:bodyPr/>
+                    <a:lstStyle/>
+                    <a:p>
+                      <a:endParaRPr lang="en-US"/>
+                    </a:p>
+                  </a:txBody>
+                  <a:tcPr/>
+                </a:tc>
+                <a:extLst>
+                  <a:ext uri="{0D108BD9-81ED-4DB2-BD59-A6C34878D82A}">
+                    <a16:rowId xmlns:a16="http://schemas.microsoft.com/office/drawing/2014/main" val="3268759614"/>
+                  </a:ext>
+                </a:extLst>
+              </a:tr>
+            </a:tbl>
+          </a:graphicData>
+        </a:graphic>
+      </p:graphicFrame>
+      <p:sp>
+        <p:nvSpPr>
+          <p:cNvPr id="5" name="TextBox 4">
+            <a:extLst>
+              <a:ext uri="{FF2B5EF4-FFF2-40B4-BE49-F238E27FC236}">
+                <a16:creationId xmlns:a16="http://schemas.microsoft.com/office/drawing/2014/main" id="{AFC7F1AE-8AE7-93D6-DAD1-31BCBE2453A6}"/>
+              </a:ext>
+            </a:extLst>
+          </p:cNvPr>
+          <p:cNvSpPr txBox="1"/>
+          <p:nvPr/>
+        </p:nvSpPr>
+        <p:spPr>
+          <a:xfrm>
+            <a:off x="9351045" y="857765"/>
+            <a:ext cx="2009105" cy="369332"/>
+          </a:xfrm>
+          <a:prstGeom prst="rect">
+            <a:avLst/>
+          </a:prstGeom>
+          <a:solidFill>
+            <a:schemeClr val="accent1"/>
+          </a:solidFill>
+        </p:spPr>
+        <p:txBody>
+          <a:bodyPr wrap="square" rtlCol="0">
+            <a:spAutoFit/>
+          </a:bodyPr>
+          <a:lstStyle/>
+          <a:p>
+            <a:pPr algn="ctr"/>
+            <a:r>
+              <a:rPr lang="en-US">
+                <a:solidFill>
+                  <a:schemeClr val="bg1"/>
+                </a:solidFill>
+              </a:rPr>
+              <a:t>New Slide</a:t>
+            </a:r>
+          </a:p>
+        </p:txBody>
+      </p:sp>
+    </p:spTree>
+    <p:extLst>
+      <p:ext uri="{BB962C8B-B14F-4D97-AF65-F5344CB8AC3E}">
+        <p14:creationId xmlns:p14="http://schemas.microsoft.com/office/powerpoint/2010/main" val="2383515617"/>
+      </p:ext>
+    </p:extLst>
+  </p:cSld>
+  <p:clrMapOvr>
+    <a:masterClrMapping/>
+  </p:clrMapOvr>
+</p:sld>
+</file>
+
+<file path=ppt/slides/slide21.xml><?xml version="1.0" encoding="utf-8"?>
+<p:sld xmlns:a="http://schemas.openxmlformats.org/drawingml/2006/main" xmlns:r="http://schemas.openxmlformats.org/officeDocument/2006/relationships" xmlns:p="http://schemas.openxmlformats.org/presentationml/2006/main">
+  <p:cSld>
+    <p:spTree>
+      <p:nvGrpSpPr>
+        <p:cNvPr id="1" name=""/>
+        <p:cNvGrpSpPr/>
+        <p:nvPr/>
+      </p:nvGrpSpPr>
+      <p:grpSpPr>
+        <a:xfrm>
+          <a:off x="0" y="0"/>
+          <a:ext cx="0" cy="0"/>
+          <a:chOff x="0" y="0"/>
+          <a:chExt cx="0" cy="0"/>
+        </a:xfrm>
+      </p:grpSpPr>
+      <p:sp>
+        <p:nvSpPr>
+          <p:cNvPr id="2" name="Title 1">
+            <a:extLst>
+              <a:ext uri="{FF2B5EF4-FFF2-40B4-BE49-F238E27FC236}">
                 <a16:creationId xmlns:a16="http://schemas.microsoft.com/office/drawing/2014/main" id="{947CB423-B171-36D2-C5B8-E3E6CA44E190}"/>
               </a:ext>
             </a:extLst>
@@ -18205,7 +18349,7 @@
           <a:p>
             <a:fld id="{88E0E29E-E225-F048-A964-380D52CA58AC}" type="slidenum">
               <a:rPr lang="en-US" smtClean="0"/>
-              <a:t>20</a:t>
+              <a:t>21</a:t>
             </a:fld>
             <a:endParaRPr lang="en-US"/>
           </a:p>
@@ -18224,7 +18368,7 @@
 </p:sld>
 </file>
 
-<file path=ppt/slides/slide21.xml><?xml version="1.0" encoding="utf-8"?>
+<file path=ppt/slides/slide22.xml><?xml version="1.0" encoding="utf-8"?>
 <p:sld xmlns:a="http://schemas.openxmlformats.org/drawingml/2006/main" xmlns:r="http://schemas.openxmlformats.org/officeDocument/2006/relationships" xmlns:p="http://schemas.openxmlformats.org/presentationml/2006/main">
   <p:cSld>
     <p:spTree>
@@ -18607,7 +18751,7 @@
           <a:p>
             <a:fld id="{88E0E29E-E225-F048-A964-380D52CA58AC}" type="slidenum">
               <a:rPr lang="en-US" smtClean="0"/>
-              <a:t>21</a:t>
+              <a:t>22</a:t>
             </a:fld>
             <a:endParaRPr lang="en-US"/>
           </a:p>
@@ -18694,7 +18838,7 @@
 </p:sld>
 </file>
 
-<file path=ppt/slides/slide22.xml><?xml version="1.0" encoding="utf-8"?>
+<file path=ppt/slides/slide23.xml><?xml version="1.0" encoding="utf-8"?>
 <p:sld xmlns:a="http://schemas.openxmlformats.org/drawingml/2006/main" xmlns:r="http://schemas.openxmlformats.org/officeDocument/2006/relationships" xmlns:p="http://schemas.openxmlformats.org/presentationml/2006/main">
   <p:cSld>
     <p:spTree>
@@ -18822,7 +18966,7 @@
           <a:p>
             <a:fld id="{88E0E29E-E225-F048-A964-380D52CA58AC}" type="slidenum">
               <a:rPr lang="en-US" smtClean="0"/>
-              <a:t>22</a:t>
+              <a:t>23</a:t>
             </a:fld>
             <a:endParaRPr lang="en-US"/>
           </a:p>
@@ -18841,7 +18985,7 @@
 </p:sld>
 </file>
 
-<file path=ppt/slides/slide23.xml><?xml version="1.0" encoding="utf-8"?>
+<file path=ppt/slides/slide24.xml><?xml version="1.0" encoding="utf-8"?>
 <p:sld xmlns:a="http://schemas.openxmlformats.org/drawingml/2006/main" xmlns:r="http://schemas.openxmlformats.org/officeDocument/2006/relationships" xmlns:p="http://schemas.openxmlformats.org/presentationml/2006/main">
   <p:cSld>
     <p:spTree>
@@ -18909,7 +19053,7 @@
           <a:p>
             <a:fld id="{88E0E29E-E225-F048-A964-380D52CA58AC}" type="slidenum">
               <a:rPr lang="en-US" smtClean="0"/>
-              <a:t>23</a:t>
+              <a:t>24</a:t>
             </a:fld>
             <a:endParaRPr lang="en-US"/>
           </a:p>
@@ -18928,7 +19072,7 @@
 </p:sld>
 </file>
 
-<file path=ppt/slides/slide24.xml><?xml version="1.0" encoding="utf-8"?>
+<file path=ppt/slides/slide25.xml><?xml version="1.0" encoding="utf-8"?>
 <p:sld xmlns:a="http://schemas.openxmlformats.org/drawingml/2006/main" xmlns:r="http://schemas.openxmlformats.org/officeDocument/2006/relationships" xmlns:p="http://schemas.openxmlformats.org/presentationml/2006/main">
   <p:cSld>
     <p:spTree>
@@ -19040,7 +19184,7 @@
           <a:p>
             <a:fld id="{88E0E29E-E225-F048-A964-380D52CA58AC}" type="slidenum">
               <a:rPr lang="en-US" smtClean="0"/>
-              <a:t>24</a:t>
+              <a:t>25</a:t>
             </a:fld>
             <a:endParaRPr lang="en-US"/>
           </a:p>
@@ -19101,7 +19245,7 @@
 </p:sld>
 </file>
 
-<file path=ppt/slides/slide25.xml><?xml version="1.0" encoding="utf-8"?>
+<file path=ppt/slides/slide26.xml><?xml version="1.0" encoding="utf-8"?>
 <p:sld xmlns:a="http://schemas.openxmlformats.org/drawingml/2006/main" xmlns:r="http://schemas.openxmlformats.org/officeDocument/2006/relationships" xmlns:p="http://schemas.openxmlformats.org/presentationml/2006/main">
   <p:cSld>
     <p:spTree>
@@ -19304,7 +19448,7 @@
           <a:p>
             <a:fld id="{88E0E29E-E225-F048-A964-380D52CA58AC}" type="slidenum">
               <a:rPr lang="en-US" smtClean="0"/>
-              <a:t>25</a:t>
+              <a:t>26</a:t>
             </a:fld>
             <a:endParaRPr lang="en-US"/>
           </a:p>
@@ -19323,7 +19467,7 @@
 </p:sld>
 </file>
 
-<file path=ppt/slides/slide26.xml><?xml version="1.0" encoding="utf-8"?>
+<file path=ppt/slides/slide27.xml><?xml version="1.0" encoding="utf-8"?>
 <p:sld xmlns:a="http://schemas.openxmlformats.org/drawingml/2006/main" xmlns:r="http://schemas.openxmlformats.org/officeDocument/2006/relationships" xmlns:p="http://schemas.openxmlformats.org/presentationml/2006/main">
   <p:cSld>
     <p:spTree>
@@ -19555,7 +19699,7 @@
           <a:p>
             <a:fld id="{88E0E29E-E225-F048-A964-380D52CA58AC}" type="slidenum">
               <a:rPr lang="en-US" smtClean="0"/>
-              <a:t>26</a:t>
+              <a:t>27</a:t>
             </a:fld>
             <a:endParaRPr lang="en-US"/>
           </a:p>
@@ -19574,7 +19718,7 @@
 </p:sld>
 </file>
 
-<file path=ppt/slides/slide27.xml><?xml version="1.0" encoding="utf-8"?>
+<file path=ppt/slides/slide28.xml><?xml version="1.0" encoding="utf-8"?>
 <p:sld xmlns:a="http://schemas.openxmlformats.org/drawingml/2006/main" xmlns:r="http://schemas.openxmlformats.org/officeDocument/2006/relationships" xmlns:p="http://schemas.openxmlformats.org/presentationml/2006/main">
   <p:cSld>
     <p:spTree>
@@ -19722,7 +19866,7 @@
           <a:p>
             <a:fld id="{88E0E29E-E225-F048-A964-380D52CA58AC}" type="slidenum">
               <a:rPr lang="en-US" smtClean="0"/>
-              <a:t>27</a:t>
+              <a:t>28</a:t>
             </a:fld>
             <a:endParaRPr lang="en-US"/>
           </a:p>
@@ -19741,7 +19885,7 @@
 </p:sld>
 </file>
 
-<file path=ppt/slides/slide28.xml><?xml version="1.0" encoding="utf-8"?>
+<file path=ppt/slides/slide29.xml><?xml version="1.0" encoding="utf-8"?>
 <p:sld xmlns:a="http://schemas.openxmlformats.org/drawingml/2006/main" xmlns:r="http://schemas.openxmlformats.org/officeDocument/2006/relationships" xmlns:p="http://schemas.openxmlformats.org/presentationml/2006/main">
   <p:cSld>
     <p:spTree>
@@ -20030,7 +20174,7 @@
           <a:p>
             <a:fld id="{88E0E29E-E225-F048-A964-380D52CA58AC}" type="slidenum">
               <a:rPr lang="en-US" smtClean="0"/>
-              <a:t>28</a:t>
+              <a:t>29</a:t>
             </a:fld>
             <a:endParaRPr lang="en-US"/>
           </a:p>
@@ -20091,7 +20235,410 @@
 </p:sld>
 </file>
 
-<file path=ppt/slides/slide29.xml><?xml version="1.0" encoding="utf-8"?>
+<file path=ppt/slides/slide3.xml><?xml version="1.0" encoding="utf-8"?>
+<p:sld xmlns:a="http://schemas.openxmlformats.org/drawingml/2006/main" xmlns:r="http://schemas.openxmlformats.org/officeDocument/2006/relationships" xmlns:p="http://schemas.openxmlformats.org/presentationml/2006/main">
+  <p:cSld>
+    <p:spTree>
+      <p:nvGrpSpPr>
+        <p:cNvPr id="1" name=""/>
+        <p:cNvGrpSpPr/>
+        <p:nvPr/>
+      </p:nvGrpSpPr>
+      <p:grpSpPr>
+        <a:xfrm>
+          <a:off x="0" y="0"/>
+          <a:ext cx="0" cy="0"/>
+          <a:chOff x="0" y="0"/>
+          <a:chExt cx="0" cy="0"/>
+        </a:xfrm>
+      </p:grpSpPr>
+      <p:sp>
+        <p:nvSpPr>
+          <p:cNvPr id="2" name="Title 1">
+            <a:extLst>
+              <a:ext uri="{FF2B5EF4-FFF2-40B4-BE49-F238E27FC236}">
+                <a16:creationId xmlns:a16="http://schemas.microsoft.com/office/drawing/2014/main" id="{EF7D0176-77A5-85D5-0D94-40DE2AD9C603}"/>
+              </a:ext>
+            </a:extLst>
+          </p:cNvPr>
+          <p:cNvSpPr>
+            <a:spLocks noGrp="1"/>
+          </p:cNvSpPr>
+          <p:nvPr>
+            <p:ph type="title"/>
+          </p:nvPr>
+        </p:nvSpPr>
+        <p:spPr>
+          <a:xfrm>
+            <a:off x="2796988" y="0"/>
+            <a:ext cx="7301753" cy="670096"/>
+          </a:xfrm>
+        </p:spPr>
+        <p:txBody>
+          <a:bodyPr/>
+          <a:lstStyle/>
+          <a:p>
+            <a:r>
+              <a:rPr lang="en-US" dirty="0"/>
+              <a:t>    </a:t>
+            </a:r>
+            <a:r>
+              <a:rPr lang="en-US" sz="3200" dirty="0"/>
+              <a:t>Project’s Relevance and Impact </a:t>
+            </a:r>
+            <a:endParaRPr lang="en-US" sz="1800" dirty="0"/>
+          </a:p>
+        </p:txBody>
+      </p:sp>
+      <p:sp>
+        <p:nvSpPr>
+          <p:cNvPr id="4" name="Text Placeholder 4">
+            <a:extLst>
+              <a:ext uri="{FF2B5EF4-FFF2-40B4-BE49-F238E27FC236}">
+                <a16:creationId xmlns:a16="http://schemas.microsoft.com/office/drawing/2014/main" id="{F93C2E02-CFC0-C203-BE34-5A74BFDE9BE4}"/>
+              </a:ext>
+            </a:extLst>
+          </p:cNvPr>
+          <p:cNvSpPr>
+            <a:spLocks noGrp="1"/>
+          </p:cNvSpPr>
+          <p:nvPr>
+            <p:ph type="body" idx="1"/>
+          </p:nvPr>
+        </p:nvSpPr>
+        <p:spPr>
+          <a:xfrm>
+            <a:off x="293599" y="1207314"/>
+            <a:ext cx="11540591" cy="5443541"/>
+          </a:xfrm>
+          <a:ln>
+            <a:noFill/>
+          </a:ln>
+        </p:spPr>
+        <p:txBody>
+          <a:bodyPr vert="horz" lIns="91440" tIns="45720" rIns="91440" bIns="45720" numCol="1" spcCol="182880" rtlCol="0" anchor="t">
+            <a:normAutofit/>
+          </a:bodyPr>
+          <a:lstStyle/>
+          <a:p>
+            <a:pPr marL="342900" indent="-342900">
+              <a:buFont typeface="Arial" panose="020B0604020202020204" pitchFamily="34" charset="0"/>
+              <a:buChar char="•"/>
+            </a:pPr>
+            <a:r>
+              <a:rPr lang="en-US" sz="2400">
+                <a:solidFill>
+                  <a:schemeClr val="tx1"/>
+                </a:solidFill>
+              </a:rPr>
+              <a:t>NASA Science Goals and Objectives</a:t>
+            </a:r>
+          </a:p>
+          <a:p>
+            <a:pPr marL="742950" lvl="1" indent="-285750">
+              <a:buClr>
+                <a:schemeClr val="accent2"/>
+              </a:buClr>
+              <a:buFont typeface="Wingdings" pitchFamily="2" charset="2"/>
+              <a:buChar char="§"/>
+            </a:pPr>
+            <a:r>
+              <a:rPr lang="en-US" sz="1800">
+                <a:solidFill>
+                  <a:schemeClr val="tx1"/>
+                </a:solidFill>
+              </a:rPr>
+              <a:t>Describe the science goals and objectives this technology can address </a:t>
+            </a:r>
+          </a:p>
+          <a:p>
+            <a:pPr marL="742950" lvl="1" indent="-285750">
+              <a:buClr>
+                <a:schemeClr val="accent2"/>
+              </a:buClr>
+              <a:buFont typeface="Wingdings" pitchFamily="2" charset="2"/>
+              <a:buChar char="§"/>
+            </a:pPr>
+            <a:r>
+              <a:rPr lang="en-US" sz="1800">
+                <a:solidFill>
+                  <a:schemeClr val="tx1"/>
+                </a:solidFill>
+              </a:rPr>
+              <a:t>List future NASA missions that would benefit from this technology</a:t>
+            </a:r>
+          </a:p>
+          <a:p>
+            <a:pPr marL="742950" lvl="1" indent="-285750">
+              <a:buClr>
+                <a:schemeClr val="accent2"/>
+              </a:buClr>
+              <a:buFont typeface="Wingdings" pitchFamily="2" charset="2"/>
+              <a:buChar char="§"/>
+            </a:pPr>
+            <a:r>
+              <a:rPr lang="en-US" sz="1800">
+                <a:solidFill>
+                  <a:schemeClr val="tx1"/>
+                </a:solidFill>
+              </a:rPr>
+              <a:t>Describe how your technology improves upon existing approaches and how it may expand the science goals and objectives of a future NASA mission</a:t>
+            </a:r>
+          </a:p>
+          <a:p>
+            <a:pPr marL="114300" indent="-342900">
+              <a:buFont typeface="Arial" panose="020B0604020202020204" pitchFamily="34" charset="0"/>
+              <a:buChar char="•"/>
+            </a:pPr>
+            <a:r>
+              <a:rPr lang="en-US">
+                <a:solidFill>
+                  <a:schemeClr val="tx1"/>
+                </a:solidFill>
+              </a:rPr>
+              <a:t>NASA Agency Goals and Objectives</a:t>
+            </a:r>
+          </a:p>
+          <a:p>
+            <a:pPr marL="742950" lvl="1" indent="-285750">
+              <a:buClr>
+                <a:schemeClr val="accent2"/>
+              </a:buClr>
+              <a:buFont typeface="Wingdings" pitchFamily="2" charset="2"/>
+              <a:buChar char="§"/>
+            </a:pPr>
+            <a:r>
+              <a:rPr lang="en-US" sz="1800">
+                <a:solidFill>
+                  <a:schemeClr val="tx1"/>
+                </a:solidFill>
+              </a:rPr>
+              <a:t>Describe how your technology could benefit NASA objectives (e.g., returning to the Moon, going to Mars, space weather forecasting/nowcasting, etc.) </a:t>
+            </a:r>
+          </a:p>
+          <a:p>
+            <a:pPr marL="342900" indent="-342900">
+              <a:buFont typeface="Arial" panose="020B0604020202020204" pitchFamily="34" charset="0"/>
+              <a:buChar char="•"/>
+            </a:pPr>
+            <a:r>
+              <a:rPr lang="en-US" sz="2400">
+                <a:solidFill>
+                  <a:schemeClr val="tx1"/>
+                </a:solidFill>
+              </a:rPr>
+              <a:t>Benefit to </a:t>
+            </a:r>
+            <a:r>
+              <a:rPr lang="en-US"/>
+              <a:t>the Country</a:t>
+            </a:r>
+            <a:endParaRPr lang="en-US" sz="2400">
+              <a:solidFill>
+                <a:schemeClr val="tx1"/>
+              </a:solidFill>
+            </a:endParaRPr>
+          </a:p>
+          <a:p>
+            <a:pPr marL="742950" lvl="1" indent="-285750">
+              <a:buClr>
+                <a:schemeClr val="accent2"/>
+              </a:buClr>
+              <a:buFont typeface="Wingdings" pitchFamily="2" charset="2"/>
+              <a:buChar char="§"/>
+            </a:pPr>
+            <a:r>
+              <a:rPr lang="en-US" sz="1800">
+                <a:solidFill>
+                  <a:schemeClr val="tx1"/>
+                </a:solidFill>
+              </a:rPr>
+              <a:t>Describe how your technology could provide benefits more broadly, beyond NASA or the US Government</a:t>
+            </a:r>
+          </a:p>
+          <a:p>
+            <a:pPr marL="742950" lvl="1" indent="-285750">
+              <a:buClr>
+                <a:schemeClr val="accent2"/>
+              </a:buClr>
+              <a:buFont typeface="Wingdings" pitchFamily="2" charset="2"/>
+              <a:buChar char="§"/>
+            </a:pPr>
+            <a:r>
+              <a:rPr lang="en-US" sz="1800">
+                <a:solidFill>
+                  <a:schemeClr val="tx1"/>
+                </a:solidFill>
+              </a:rPr>
+              <a:t>Why should the average US taxpayer be excited about this new technology? </a:t>
+            </a:r>
+          </a:p>
+          <a:p>
+            <a:pPr marL="742950" lvl="1" indent="-285750">
+              <a:buClr>
+                <a:schemeClr val="accent2"/>
+              </a:buClr>
+              <a:buFont typeface="Wingdings" pitchFamily="2" charset="2"/>
+              <a:buChar char="§"/>
+            </a:pPr>
+            <a:r>
+              <a:rPr lang="en-US" sz="1800">
+                <a:solidFill>
+                  <a:schemeClr val="tx1"/>
+                </a:solidFill>
+              </a:rPr>
+              <a:t>Where and how could the commercial sector or US industry apply your technology?</a:t>
+            </a:r>
+            <a:endParaRPr lang="en-US">
+              <a:solidFill>
+                <a:schemeClr val="tx1"/>
+              </a:solidFill>
+            </a:endParaRPr>
+          </a:p>
+          <a:p>
+            <a:endParaRPr lang="en-US">
+              <a:solidFill>
+                <a:schemeClr val="tx1"/>
+              </a:solidFill>
+            </a:endParaRPr>
+          </a:p>
+        </p:txBody>
+      </p:sp>
+      <p:sp>
+        <p:nvSpPr>
+          <p:cNvPr id="5" name="Slide Number Placeholder 4">
+            <a:extLst>
+              <a:ext uri="{FF2B5EF4-FFF2-40B4-BE49-F238E27FC236}">
+                <a16:creationId xmlns:a16="http://schemas.microsoft.com/office/drawing/2014/main" id="{173A7DCD-C6D4-A2ED-D26B-A7DA768376CA}"/>
+              </a:ext>
+            </a:extLst>
+          </p:cNvPr>
+          <p:cNvSpPr>
+            <a:spLocks noGrp="1"/>
+          </p:cNvSpPr>
+          <p:nvPr>
+            <p:ph type="sldNum" sz="quarter" idx="12"/>
+          </p:nvPr>
+        </p:nvSpPr>
+        <p:spPr/>
+        <p:txBody>
+          <a:bodyPr/>
+          <a:lstStyle/>
+          <a:p>
+            <a:fld id="{88E0E29E-E225-F048-A964-380D52CA58AC}" type="slidenum">
+              <a:rPr lang="en-US" smtClean="0"/>
+              <a:t>3</a:t>
+            </a:fld>
+            <a:endParaRPr lang="en-US"/>
+          </a:p>
+        </p:txBody>
+      </p:sp>
+      <p:sp>
+        <p:nvSpPr>
+          <p:cNvPr id="3" name="TextBox 2">
+            <a:extLst>
+              <a:ext uri="{FF2B5EF4-FFF2-40B4-BE49-F238E27FC236}">
+                <a16:creationId xmlns:a16="http://schemas.microsoft.com/office/drawing/2014/main" id="{C4477E3D-06CF-0E8B-C7EB-7E988424969B}"/>
+              </a:ext>
+            </a:extLst>
+          </p:cNvPr>
+          <p:cNvSpPr txBox="1"/>
+          <p:nvPr/>
+        </p:nvSpPr>
+        <p:spPr>
+          <a:xfrm>
+            <a:off x="741218" y="5980091"/>
+            <a:ext cx="10515599" cy="369332"/>
+          </a:xfrm>
+          <a:prstGeom prst="rect">
+            <a:avLst/>
+          </a:prstGeom>
+          <a:solidFill>
+            <a:schemeClr val="accent1"/>
+          </a:solidFill>
+        </p:spPr>
+        <p:txBody>
+          <a:bodyPr wrap="square" lIns="91440" tIns="45720" rIns="91440" bIns="45720" rtlCol="0" anchor="t">
+            <a:spAutoFit/>
+          </a:bodyPr>
+          <a:lstStyle/>
+          <a:p>
+            <a:pPr algn="ctr"/>
+            <a:r>
+              <a:rPr lang="en-US" dirty="0">
+                <a:solidFill>
+                  <a:schemeClr val="bg1"/>
+                </a:solidFill>
+              </a:rPr>
+              <a:t>See example on slide 28, </a:t>
+            </a:r>
+            <a:r>
+              <a:rPr lang="en-US" b="1" dirty="0">
+                <a:solidFill>
+                  <a:schemeClr val="bg1"/>
+                </a:solidFill>
+              </a:rPr>
+              <a:t>To be published on TechPort</a:t>
+            </a:r>
+          </a:p>
+        </p:txBody>
+      </p:sp>
+      <p:sp>
+        <p:nvSpPr>
+          <p:cNvPr id="6" name="TextBox 5">
+            <a:extLst>
+              <a:ext uri="{FF2B5EF4-FFF2-40B4-BE49-F238E27FC236}">
+                <a16:creationId xmlns:a16="http://schemas.microsoft.com/office/drawing/2014/main" id="{682E5543-5326-F87B-41C6-91E72A7D3517}"/>
+              </a:ext>
+            </a:extLst>
+          </p:cNvPr>
+          <p:cNvSpPr txBox="1"/>
+          <p:nvPr/>
+        </p:nvSpPr>
+        <p:spPr>
+          <a:xfrm>
+            <a:off x="9459532" y="1287887"/>
+            <a:ext cx="2009105" cy="369332"/>
+          </a:xfrm>
+          <a:prstGeom prst="rect">
+            <a:avLst/>
+          </a:prstGeom>
+          <a:solidFill>
+            <a:schemeClr val="accent1"/>
+          </a:solidFill>
+        </p:spPr>
+        <p:txBody>
+          <a:bodyPr wrap="square" rtlCol="0">
+            <a:spAutoFit/>
+          </a:bodyPr>
+          <a:lstStyle/>
+          <a:p>
+            <a:pPr algn="ctr"/>
+            <a:r>
+              <a:rPr lang="en-US">
+                <a:solidFill>
+                  <a:schemeClr val="bg1"/>
+                </a:solidFill>
+              </a:rPr>
+              <a:t>Updated</a:t>
+            </a:r>
+          </a:p>
+        </p:txBody>
+      </p:sp>
+    </p:spTree>
+    <p:extLst>
+      <p:ext uri="{BB962C8B-B14F-4D97-AF65-F5344CB8AC3E}">
+        <p14:creationId xmlns:p14="http://schemas.microsoft.com/office/powerpoint/2010/main" val="3574870474"/>
+      </p:ext>
+    </p:extLst>
+  </p:cSld>
+  <p:clrMapOvr>
+    <a:masterClrMapping/>
+  </p:clrMapOvr>
+</p:sld>
+</file>
+
+<file path=ppt/slides/slide30.xml><?xml version="1.0" encoding="utf-8"?>
 <p:sld xmlns:a="http://schemas.openxmlformats.org/drawingml/2006/main" xmlns:r="http://schemas.openxmlformats.org/officeDocument/2006/relationships" xmlns:p="http://schemas.openxmlformats.org/presentationml/2006/main">
   <p:cSld>
     <p:spTree>
@@ -21119,7 +21666,7 @@
           <a:p>
             <a:fld id="{88E0E29E-E225-F048-A964-380D52CA58AC}" type="slidenum">
               <a:rPr lang="en-US" smtClean="0"/>
-              <a:t>29</a:t>
+              <a:t>30</a:t>
             </a:fld>
             <a:endParaRPr lang="en-US"/>
           </a:p>
@@ -21138,410 +21685,7 @@
 </p:sld>
 </file>
 
-<file path=ppt/slides/slide3.xml><?xml version="1.0" encoding="utf-8"?>
-<p:sld xmlns:a="http://schemas.openxmlformats.org/drawingml/2006/main" xmlns:r="http://schemas.openxmlformats.org/officeDocument/2006/relationships" xmlns:p="http://schemas.openxmlformats.org/presentationml/2006/main">
-  <p:cSld>
-    <p:spTree>
-      <p:nvGrpSpPr>
-        <p:cNvPr id="1" name=""/>
-        <p:cNvGrpSpPr/>
-        <p:nvPr/>
-      </p:nvGrpSpPr>
-      <p:grpSpPr>
-        <a:xfrm>
-          <a:off x="0" y="0"/>
-          <a:ext cx="0" cy="0"/>
-          <a:chOff x="0" y="0"/>
-          <a:chExt cx="0" cy="0"/>
-        </a:xfrm>
-      </p:grpSpPr>
-      <p:sp>
-        <p:nvSpPr>
-          <p:cNvPr id="2" name="Title 1">
-            <a:extLst>
-              <a:ext uri="{FF2B5EF4-FFF2-40B4-BE49-F238E27FC236}">
-                <a16:creationId xmlns:a16="http://schemas.microsoft.com/office/drawing/2014/main" id="{EF7D0176-77A5-85D5-0D94-40DE2AD9C603}"/>
-              </a:ext>
-            </a:extLst>
-          </p:cNvPr>
-          <p:cNvSpPr>
-            <a:spLocks noGrp="1"/>
-          </p:cNvSpPr>
-          <p:nvPr>
-            <p:ph type="title"/>
-          </p:nvPr>
-        </p:nvSpPr>
-        <p:spPr>
-          <a:xfrm>
-            <a:off x="2796988" y="0"/>
-            <a:ext cx="7301753" cy="670096"/>
-          </a:xfrm>
-        </p:spPr>
-        <p:txBody>
-          <a:bodyPr/>
-          <a:lstStyle/>
-          <a:p>
-            <a:r>
-              <a:rPr lang="en-US" dirty="0"/>
-              <a:t>    </a:t>
-            </a:r>
-            <a:r>
-              <a:rPr lang="en-US" sz="3200" dirty="0"/>
-              <a:t>Project’s Relevance and Impact </a:t>
-            </a:r>
-            <a:endParaRPr lang="en-US" sz="1800" dirty="0"/>
-          </a:p>
-        </p:txBody>
-      </p:sp>
-      <p:sp>
-        <p:nvSpPr>
-          <p:cNvPr id="4" name="Text Placeholder 4">
-            <a:extLst>
-              <a:ext uri="{FF2B5EF4-FFF2-40B4-BE49-F238E27FC236}">
-                <a16:creationId xmlns:a16="http://schemas.microsoft.com/office/drawing/2014/main" id="{F93C2E02-CFC0-C203-BE34-5A74BFDE9BE4}"/>
-              </a:ext>
-            </a:extLst>
-          </p:cNvPr>
-          <p:cNvSpPr>
-            <a:spLocks noGrp="1"/>
-          </p:cNvSpPr>
-          <p:nvPr>
-            <p:ph type="body" idx="1"/>
-          </p:nvPr>
-        </p:nvSpPr>
-        <p:spPr>
-          <a:xfrm>
-            <a:off x="293599" y="1207314"/>
-            <a:ext cx="11540591" cy="5443541"/>
-          </a:xfrm>
-          <a:ln>
-            <a:noFill/>
-          </a:ln>
-        </p:spPr>
-        <p:txBody>
-          <a:bodyPr vert="horz" lIns="91440" tIns="45720" rIns="91440" bIns="45720" numCol="1" spcCol="182880" rtlCol="0" anchor="t">
-            <a:normAutofit/>
-          </a:bodyPr>
-          <a:lstStyle/>
-          <a:p>
-            <a:pPr marL="342900" indent="-342900">
-              <a:buFont typeface="Arial" panose="020B0604020202020204" pitchFamily="34" charset="0"/>
-              <a:buChar char="•"/>
-            </a:pPr>
-            <a:r>
-              <a:rPr lang="en-US" sz="2400">
-                <a:solidFill>
-                  <a:schemeClr val="tx1"/>
-                </a:solidFill>
-              </a:rPr>
-              <a:t>NASA Science Goals and Objectives</a:t>
-            </a:r>
-          </a:p>
-          <a:p>
-            <a:pPr marL="742950" lvl="1" indent="-285750">
-              <a:buClr>
-                <a:schemeClr val="accent2"/>
-              </a:buClr>
-              <a:buFont typeface="Wingdings" pitchFamily="2" charset="2"/>
-              <a:buChar char="§"/>
-            </a:pPr>
-            <a:r>
-              <a:rPr lang="en-US" sz="1800">
-                <a:solidFill>
-                  <a:schemeClr val="tx1"/>
-                </a:solidFill>
-              </a:rPr>
-              <a:t>Describe the science goals and objectives this technology can address </a:t>
-            </a:r>
-          </a:p>
-          <a:p>
-            <a:pPr marL="742950" lvl="1" indent="-285750">
-              <a:buClr>
-                <a:schemeClr val="accent2"/>
-              </a:buClr>
-              <a:buFont typeface="Wingdings" pitchFamily="2" charset="2"/>
-              <a:buChar char="§"/>
-            </a:pPr>
-            <a:r>
-              <a:rPr lang="en-US" sz="1800">
-                <a:solidFill>
-                  <a:schemeClr val="tx1"/>
-                </a:solidFill>
-              </a:rPr>
-              <a:t>List future NASA missions that would benefit from this technology</a:t>
-            </a:r>
-          </a:p>
-          <a:p>
-            <a:pPr marL="742950" lvl="1" indent="-285750">
-              <a:buClr>
-                <a:schemeClr val="accent2"/>
-              </a:buClr>
-              <a:buFont typeface="Wingdings" pitchFamily="2" charset="2"/>
-              <a:buChar char="§"/>
-            </a:pPr>
-            <a:r>
-              <a:rPr lang="en-US" sz="1800">
-                <a:solidFill>
-                  <a:schemeClr val="tx1"/>
-                </a:solidFill>
-              </a:rPr>
-              <a:t>Describe how your technology improves upon existing approaches and how it may expand the science goals and objectives of a future NASA mission</a:t>
-            </a:r>
-          </a:p>
-          <a:p>
-            <a:pPr marL="114300" indent="-342900">
-              <a:buFont typeface="Arial" panose="020B0604020202020204" pitchFamily="34" charset="0"/>
-              <a:buChar char="•"/>
-            </a:pPr>
-            <a:r>
-              <a:rPr lang="en-US">
-                <a:solidFill>
-                  <a:schemeClr val="tx1"/>
-                </a:solidFill>
-              </a:rPr>
-              <a:t>NASA Agency Goals and Objectives</a:t>
-            </a:r>
-          </a:p>
-          <a:p>
-            <a:pPr marL="742950" lvl="1" indent="-285750">
-              <a:buClr>
-                <a:schemeClr val="accent2"/>
-              </a:buClr>
-              <a:buFont typeface="Wingdings" pitchFamily="2" charset="2"/>
-              <a:buChar char="§"/>
-            </a:pPr>
-            <a:r>
-              <a:rPr lang="en-US" sz="1800">
-                <a:solidFill>
-                  <a:schemeClr val="tx1"/>
-                </a:solidFill>
-              </a:rPr>
-              <a:t>Describe how your technology could benefit NASA objectives (e.g., returning to the Moon, going to Mars, space weather forecasting/nowcasting, etc.) </a:t>
-            </a:r>
-          </a:p>
-          <a:p>
-            <a:pPr marL="342900" indent="-342900">
-              <a:buFont typeface="Arial" panose="020B0604020202020204" pitchFamily="34" charset="0"/>
-              <a:buChar char="•"/>
-            </a:pPr>
-            <a:r>
-              <a:rPr lang="en-US" sz="2400">
-                <a:solidFill>
-                  <a:schemeClr val="tx1"/>
-                </a:solidFill>
-              </a:rPr>
-              <a:t>Benefit to </a:t>
-            </a:r>
-            <a:r>
-              <a:rPr lang="en-US"/>
-              <a:t>the Country</a:t>
-            </a:r>
-            <a:endParaRPr lang="en-US" sz="2400">
-              <a:solidFill>
-                <a:schemeClr val="tx1"/>
-              </a:solidFill>
-            </a:endParaRPr>
-          </a:p>
-          <a:p>
-            <a:pPr marL="742950" lvl="1" indent="-285750">
-              <a:buClr>
-                <a:schemeClr val="accent2"/>
-              </a:buClr>
-              <a:buFont typeface="Wingdings" pitchFamily="2" charset="2"/>
-              <a:buChar char="§"/>
-            </a:pPr>
-            <a:r>
-              <a:rPr lang="en-US" sz="1800">
-                <a:solidFill>
-                  <a:schemeClr val="tx1"/>
-                </a:solidFill>
-              </a:rPr>
-              <a:t>Describe how your technology could provide benefits more broadly, beyond NASA or the US Government</a:t>
-            </a:r>
-          </a:p>
-          <a:p>
-            <a:pPr marL="742950" lvl="1" indent="-285750">
-              <a:buClr>
-                <a:schemeClr val="accent2"/>
-              </a:buClr>
-              <a:buFont typeface="Wingdings" pitchFamily="2" charset="2"/>
-              <a:buChar char="§"/>
-            </a:pPr>
-            <a:r>
-              <a:rPr lang="en-US" sz="1800">
-                <a:solidFill>
-                  <a:schemeClr val="tx1"/>
-                </a:solidFill>
-              </a:rPr>
-              <a:t>Why should the average US taxpayer be excited about this new technology? </a:t>
-            </a:r>
-          </a:p>
-          <a:p>
-            <a:pPr marL="742950" lvl="1" indent="-285750">
-              <a:buClr>
-                <a:schemeClr val="accent2"/>
-              </a:buClr>
-              <a:buFont typeface="Wingdings" pitchFamily="2" charset="2"/>
-              <a:buChar char="§"/>
-            </a:pPr>
-            <a:r>
-              <a:rPr lang="en-US" sz="1800">
-                <a:solidFill>
-                  <a:schemeClr val="tx1"/>
-                </a:solidFill>
-              </a:rPr>
-              <a:t>Where and how could the commercial sector or US industry apply your technology?</a:t>
-            </a:r>
-            <a:endParaRPr lang="en-US">
-              <a:solidFill>
-                <a:schemeClr val="tx1"/>
-              </a:solidFill>
-            </a:endParaRPr>
-          </a:p>
-          <a:p>
-            <a:endParaRPr lang="en-US">
-              <a:solidFill>
-                <a:schemeClr val="tx1"/>
-              </a:solidFill>
-            </a:endParaRPr>
-          </a:p>
-        </p:txBody>
-      </p:sp>
-      <p:sp>
-        <p:nvSpPr>
-          <p:cNvPr id="5" name="Slide Number Placeholder 4">
-            <a:extLst>
-              <a:ext uri="{FF2B5EF4-FFF2-40B4-BE49-F238E27FC236}">
-                <a16:creationId xmlns:a16="http://schemas.microsoft.com/office/drawing/2014/main" id="{173A7DCD-C6D4-A2ED-D26B-A7DA768376CA}"/>
-              </a:ext>
-            </a:extLst>
-          </p:cNvPr>
-          <p:cNvSpPr>
-            <a:spLocks noGrp="1"/>
-          </p:cNvSpPr>
-          <p:nvPr>
-            <p:ph type="sldNum" sz="quarter" idx="12"/>
-          </p:nvPr>
-        </p:nvSpPr>
-        <p:spPr/>
-        <p:txBody>
-          <a:bodyPr/>
-          <a:lstStyle/>
-          <a:p>
-            <a:fld id="{88E0E29E-E225-F048-A964-380D52CA58AC}" type="slidenum">
-              <a:rPr lang="en-US" smtClean="0"/>
-              <a:t>3</a:t>
-            </a:fld>
-            <a:endParaRPr lang="en-US"/>
-          </a:p>
-        </p:txBody>
-      </p:sp>
-      <p:sp>
-        <p:nvSpPr>
-          <p:cNvPr id="3" name="TextBox 2">
-            <a:extLst>
-              <a:ext uri="{FF2B5EF4-FFF2-40B4-BE49-F238E27FC236}">
-                <a16:creationId xmlns:a16="http://schemas.microsoft.com/office/drawing/2014/main" id="{C4477E3D-06CF-0E8B-C7EB-7E988424969B}"/>
-              </a:ext>
-            </a:extLst>
-          </p:cNvPr>
-          <p:cNvSpPr txBox="1"/>
-          <p:nvPr/>
-        </p:nvSpPr>
-        <p:spPr>
-          <a:xfrm>
-            <a:off x="741218" y="5980091"/>
-            <a:ext cx="10515599" cy="369332"/>
-          </a:xfrm>
-          <a:prstGeom prst="rect">
-            <a:avLst/>
-          </a:prstGeom>
-          <a:solidFill>
-            <a:schemeClr val="accent1"/>
-          </a:solidFill>
-        </p:spPr>
-        <p:txBody>
-          <a:bodyPr wrap="square" lIns="91440" tIns="45720" rIns="91440" bIns="45720" rtlCol="0" anchor="t">
-            <a:spAutoFit/>
-          </a:bodyPr>
-          <a:lstStyle/>
-          <a:p>
-            <a:pPr algn="ctr"/>
-            <a:r>
-              <a:rPr lang="en-US" dirty="0">
-                <a:solidFill>
-                  <a:schemeClr val="bg1"/>
-                </a:solidFill>
-              </a:rPr>
-              <a:t>See example on slide 28, </a:t>
-            </a:r>
-            <a:r>
-              <a:rPr lang="en-US" b="1" dirty="0">
-                <a:solidFill>
-                  <a:schemeClr val="bg1"/>
-                </a:solidFill>
-              </a:rPr>
-              <a:t>To be published on TechPort</a:t>
-            </a:r>
-          </a:p>
-        </p:txBody>
-      </p:sp>
-      <p:sp>
-        <p:nvSpPr>
-          <p:cNvPr id="6" name="TextBox 5">
-            <a:extLst>
-              <a:ext uri="{FF2B5EF4-FFF2-40B4-BE49-F238E27FC236}">
-                <a16:creationId xmlns:a16="http://schemas.microsoft.com/office/drawing/2014/main" id="{682E5543-5326-F87B-41C6-91E72A7D3517}"/>
-              </a:ext>
-            </a:extLst>
-          </p:cNvPr>
-          <p:cNvSpPr txBox="1"/>
-          <p:nvPr/>
-        </p:nvSpPr>
-        <p:spPr>
-          <a:xfrm>
-            <a:off x="9459532" y="1287887"/>
-            <a:ext cx="2009105" cy="369332"/>
-          </a:xfrm>
-          <a:prstGeom prst="rect">
-            <a:avLst/>
-          </a:prstGeom>
-          <a:solidFill>
-            <a:schemeClr val="accent1"/>
-          </a:solidFill>
-        </p:spPr>
-        <p:txBody>
-          <a:bodyPr wrap="square" rtlCol="0">
-            <a:spAutoFit/>
-          </a:bodyPr>
-          <a:lstStyle/>
-          <a:p>
-            <a:pPr algn="ctr"/>
-            <a:r>
-              <a:rPr lang="en-US">
-                <a:solidFill>
-                  <a:schemeClr val="bg1"/>
-                </a:solidFill>
-              </a:rPr>
-              <a:t>Updated</a:t>
-            </a:r>
-          </a:p>
-        </p:txBody>
-      </p:sp>
-    </p:spTree>
-    <p:extLst>
-      <p:ext uri="{BB962C8B-B14F-4D97-AF65-F5344CB8AC3E}">
-        <p14:creationId xmlns:p14="http://schemas.microsoft.com/office/powerpoint/2010/main" val="3574870474"/>
-      </p:ext>
-    </p:extLst>
-  </p:cSld>
-  <p:clrMapOvr>
-    <a:masterClrMapping/>
-  </p:clrMapOvr>
-</p:sld>
-</file>
-
-<file path=ppt/slides/slide30.xml><?xml version="1.0" encoding="utf-8"?>
+<file path=ppt/slides/slide31.xml><?xml version="1.0" encoding="utf-8"?>
 <p:sld xmlns:a="http://schemas.openxmlformats.org/drawingml/2006/main" xmlns:r="http://schemas.openxmlformats.org/officeDocument/2006/relationships" xmlns:p="http://schemas.openxmlformats.org/presentationml/2006/main">
   <p:cSld>
     <p:spTree>
@@ -22158,7 +22302,7 @@
           <a:p>
             <a:fld id="{88E0E29E-E225-F048-A964-380D52CA58AC}" type="slidenum">
               <a:rPr lang="en-US" smtClean="0"/>
-              <a:t>30</a:t>
+              <a:t>31</a:t>
             </a:fld>
             <a:endParaRPr lang="en-US"/>
           </a:p>
@@ -22177,7 +22321,7 @@
 </p:sld>
 </file>
 
-<file path=ppt/slides/slide31.xml><?xml version="1.0" encoding="utf-8"?>
+<file path=ppt/slides/slide32.xml><?xml version="1.0" encoding="utf-8"?>
 <p:sld xmlns:a="http://schemas.openxmlformats.org/drawingml/2006/main" xmlns:r="http://schemas.openxmlformats.org/officeDocument/2006/relationships" xmlns:p="http://schemas.openxmlformats.org/presentationml/2006/main">
   <p:cSld>
     <p:spTree>
@@ -23127,7 +23271,7 @@
           <a:p>
             <a:fld id="{88E0E29E-E225-F048-A964-380D52CA58AC}" type="slidenum">
               <a:rPr lang="en-US" smtClean="0"/>
-              <a:t>31</a:t>
+              <a:t>32</a:t>
             </a:fld>
             <a:endParaRPr lang="en-US"/>
           </a:p>
@@ -23146,7 +23290,7 @@
 </p:sld>
 </file>
 
-<file path=ppt/slides/slide32.xml><?xml version="1.0" encoding="utf-8"?>
+<file path=ppt/slides/slide33.xml><?xml version="1.0" encoding="utf-8"?>
 <p:sld xmlns:a="http://schemas.openxmlformats.org/drawingml/2006/main" xmlns:r="http://schemas.openxmlformats.org/officeDocument/2006/relationships" xmlns:p="http://schemas.openxmlformats.org/presentationml/2006/main">
   <p:cSld>
     <p:spTree>
@@ -24127,7 +24271,7 @@
           <a:p>
             <a:fld id="{88E0E29E-E225-F048-A964-380D52CA58AC}" type="slidenum">
               <a:rPr lang="en-US" smtClean="0"/>
-              <a:t>32</a:t>
+              <a:t>33</a:t>
             </a:fld>
             <a:endParaRPr lang="en-US"/>
           </a:p>
@@ -24146,7 +24290,7 @@
 </p:sld>
 </file>
 
-<file path=ppt/slides/slide33.xml><?xml version="1.0" encoding="utf-8"?>
+<file path=ppt/slides/slide34.xml><?xml version="1.0" encoding="utf-8"?>
 <p:sld xmlns:a="http://schemas.openxmlformats.org/drawingml/2006/main" xmlns:r="http://schemas.openxmlformats.org/officeDocument/2006/relationships" xmlns:p="http://schemas.openxmlformats.org/presentationml/2006/main">
   <p:cSld>
     <p:spTree>
@@ -24214,7 +24358,7 @@
           <a:p>
             <a:fld id="{88E0E29E-E225-F048-A964-380D52CA58AC}" type="slidenum">
               <a:rPr lang="en-US" smtClean="0"/>
-              <a:t>33</a:t>
+              <a:t>34</a:t>
             </a:fld>
             <a:endParaRPr lang="en-US"/>
           </a:p>
@@ -24904,8 +25048,8 @@
           <a:lstStyle/>
           <a:p>
             <a:r>
-              <a:rPr lang="en-US"/>
-              <a:t>Technology TRL Status</a:t>
+              <a:rPr lang="en-US" dirty="0"/>
+              <a:t>System TRL Status</a:t>
             </a:r>
           </a:p>
         </p:txBody>
@@ -28514,563 +28658,6 @@
           </a:graphicData>
         </a:graphic>
       </p:graphicFrame>
-      <p:graphicFrame>
-        <p:nvGraphicFramePr>
-          <p:cNvPr id="12" name="Table 11">
-            <a:extLst>
-              <a:ext uri="{FF2B5EF4-FFF2-40B4-BE49-F238E27FC236}">
-                <a16:creationId xmlns:a16="http://schemas.microsoft.com/office/drawing/2014/main" id="{182DEF78-C73E-0FDD-BB76-4B707C54B55B}"/>
-              </a:ext>
-            </a:extLst>
-          </p:cNvPr>
-          <p:cNvGraphicFramePr>
-            <a:graphicFrameLocks noGrp="1"/>
-          </p:cNvGraphicFramePr>
-          <p:nvPr>
-            <p:extLst>
-              <p:ext uri="{D42A27DB-BD31-4B8C-83A1-F6EECF244321}">
-                <p14:modId xmlns:p14="http://schemas.microsoft.com/office/powerpoint/2010/main" val="3733602507"/>
-              </p:ext>
-            </p:extLst>
-          </p:nvPr>
-        </p:nvGraphicFramePr>
-        <p:xfrm>
-          <a:off x="310632" y="2367654"/>
-          <a:ext cx="5831398" cy="2629850"/>
-        </p:xfrm>
-        <a:graphic>
-          <a:graphicData uri="http://schemas.openxmlformats.org/drawingml/2006/table">
-            <a:tbl>
-              <a:tblPr firstRow="1" bandRow="1">
-                <a:tableStyleId>{073A0DAA-6AF3-43AB-8588-CEC1D06C72B9}</a:tableStyleId>
-              </a:tblPr>
-              <a:tblGrid>
-                <a:gridCol w="799060">
-                  <a:extLst>
-                    <a:ext uri="{9D8B030D-6E8A-4147-A177-3AD203B41FA5}">
-                      <a16:colId xmlns:a16="http://schemas.microsoft.com/office/drawing/2014/main" val="20000"/>
-                    </a:ext>
-                  </a:extLst>
-                </a:gridCol>
-                <a:gridCol w="441550">
-                  <a:extLst>
-                    <a:ext uri="{9D8B030D-6E8A-4147-A177-3AD203B41FA5}">
-                      <a16:colId xmlns:a16="http://schemas.microsoft.com/office/drawing/2014/main" val="3687347352"/>
-                    </a:ext>
-                  </a:extLst>
-                </a:gridCol>
-                <a:gridCol w="508576">
-                  <a:extLst>
-                    <a:ext uri="{9D8B030D-6E8A-4147-A177-3AD203B41FA5}">
-                      <a16:colId xmlns:a16="http://schemas.microsoft.com/office/drawing/2014/main" val="3476331583"/>
-                    </a:ext>
-                  </a:extLst>
-                </a:gridCol>
-                <a:gridCol w="4082212">
-                  <a:extLst>
-                    <a:ext uri="{9D8B030D-6E8A-4147-A177-3AD203B41FA5}">
-                      <a16:colId xmlns:a16="http://schemas.microsoft.com/office/drawing/2014/main" val="20004"/>
-                    </a:ext>
-                  </a:extLst>
-                </a:gridCol>
-              </a:tblGrid>
-              <a:tr h="550017">
-                <a:tc>
-                  <a:txBody>
-                    <a:bodyPr/>
-                    <a:lstStyle/>
-                    <a:p>
-                      <a:r>
-                        <a:rPr lang="en-US" sz="800" b="1">
-                          <a:solidFill>
-                            <a:schemeClr val="tx1"/>
-                          </a:solidFill>
-                          <a:latin typeface="+mn-lt"/>
-                        </a:rPr>
-                        <a:t>Cost</a:t>
-                      </a:r>
-                    </a:p>
-                  </a:txBody>
-                  <a:tcPr anchor="ctr">
-                    <a:solidFill>
-                      <a:srgbClr val="CBCBCB"/>
-                    </a:solidFill>
-                  </a:tcPr>
-                </a:tc>
-                <a:tc>
-                  <a:txBody>
-                    <a:bodyPr/>
-                    <a:lstStyle/>
-                    <a:p>
-                      <a:pPr algn="ctr"/>
-                      <a:r>
-                        <a:rPr lang="en-US" sz="800">
-                          <a:solidFill>
-                            <a:schemeClr val="tx1"/>
-                          </a:solidFill>
-                          <a:latin typeface="+mn-lt"/>
-                        </a:rPr>
-                        <a:t>Y</a:t>
-                      </a:r>
-                    </a:p>
-                  </a:txBody>
-                  <a:tcPr anchor="ctr">
-                    <a:solidFill>
-                      <a:srgbClr val="FFFF00"/>
-                    </a:solidFill>
-                  </a:tcPr>
-                </a:tc>
-                <a:tc>
-                  <a:txBody>
-                    <a:bodyPr/>
-                    <a:lstStyle/>
-                    <a:p>
-                      <a:pPr algn="ctr"/>
-                      <a:r>
-                        <a:rPr lang="en-US" sz="800">
-                          <a:solidFill>
-                            <a:schemeClr val="tx1"/>
-                          </a:solidFill>
-                          <a:latin typeface="+mn-lt"/>
-                        </a:rPr>
-                        <a:t>Y</a:t>
-                      </a:r>
-                    </a:p>
-                  </a:txBody>
-                  <a:tcPr anchor="ctr">
-                    <a:solidFill>
-                      <a:srgbClr val="FFFF00"/>
-                    </a:solidFill>
-                  </a:tcPr>
-                </a:tc>
-                <a:tc>
-                  <a:txBody>
-                    <a:bodyPr/>
-                    <a:lstStyle/>
-                    <a:p>
-                      <a:r>
-                        <a:rPr lang="en-US" sz="900" baseline="0">
-                          <a:solidFill>
-                            <a:schemeClr val="tx1"/>
-                          </a:solidFill>
-                          <a:latin typeface="+mn-lt"/>
-                        </a:rPr>
-                        <a:t>Discuss any issues with spending your funding, needs for augmentation, etc.</a:t>
-                      </a:r>
-                    </a:p>
-                  </a:txBody>
-                  <a:tcPr anchor="ctr">
-                    <a:solidFill>
-                      <a:srgbClr val="CBCBCB"/>
-                    </a:solidFill>
-                  </a:tcPr>
-                </a:tc>
-                <a:extLst>
-                  <a:ext uri="{0D108BD9-81ED-4DB2-BD59-A6C34878D82A}">
-                    <a16:rowId xmlns:a16="http://schemas.microsoft.com/office/drawing/2014/main" val="10001"/>
-                  </a:ext>
-                </a:extLst>
-              </a:tr>
-              <a:tr h="423540">
-                <a:tc>
-                  <a:txBody>
-                    <a:bodyPr/>
-                    <a:lstStyle/>
-                    <a:p>
-                      <a:r>
-                        <a:rPr lang="en-US" sz="800" b="1">
-                          <a:latin typeface="+mn-lt"/>
-                        </a:rPr>
-                        <a:t>Schedule</a:t>
-                      </a:r>
-                    </a:p>
-                  </a:txBody>
-                  <a:tcPr anchor="ctr">
-                    <a:solidFill>
-                      <a:srgbClr val="E7E7E7"/>
-                    </a:solidFill>
-                  </a:tcPr>
-                </a:tc>
-                <a:tc>
-                  <a:txBody>
-                    <a:bodyPr/>
-                    <a:lstStyle/>
-                    <a:p>
-                      <a:pPr algn="ctr"/>
-                      <a:r>
-                        <a:rPr lang="en-US" sz="800">
-                          <a:latin typeface="+mn-lt"/>
-                        </a:rPr>
-                        <a:t>G</a:t>
-                      </a:r>
-                    </a:p>
-                  </a:txBody>
-                  <a:tcPr anchor="ctr">
-                    <a:solidFill>
-                      <a:srgbClr val="00B050"/>
-                    </a:solidFill>
-                  </a:tcPr>
-                </a:tc>
-                <a:tc>
-                  <a:txBody>
-                    <a:bodyPr/>
-                    <a:lstStyle/>
-                    <a:p>
-                      <a:pPr algn="ctr"/>
-                      <a:r>
-                        <a:rPr lang="en-US" sz="800">
-                          <a:latin typeface="+mn-lt"/>
-                        </a:rPr>
-                        <a:t>G</a:t>
-                      </a:r>
-                    </a:p>
-                  </a:txBody>
-                  <a:tcPr anchor="ctr">
-                    <a:solidFill>
-                      <a:srgbClr val="00B050"/>
-                    </a:solidFill>
-                  </a:tcPr>
-                </a:tc>
-                <a:tc>
-                  <a:txBody>
-                    <a:bodyPr/>
-                    <a:lstStyle/>
-                    <a:p>
-                      <a:pPr marL="0" marR="0" lvl="0" indent="0" algn="l" defTabSz="914400" rtl="0" eaLnBrk="1" fontAlgn="auto" latinLnBrk="0" hangingPunct="1">
-                        <a:lnSpc>
-                          <a:spcPct val="100000"/>
-                        </a:lnSpc>
-                        <a:spcBef>
-                          <a:spcPts val="0"/>
-                        </a:spcBef>
-                        <a:spcAft>
-                          <a:spcPts val="0"/>
-                        </a:spcAft>
-                        <a:buClrTx/>
-                        <a:buSzTx/>
-                        <a:buFontTx/>
-                        <a:buNone/>
-                        <a:tabLst/>
-                        <a:defRPr/>
-                      </a:pPr>
-                      <a:r>
-                        <a:rPr lang="en-US" sz="900" baseline="0">
-                          <a:latin typeface="+mn-lt"/>
-                        </a:rPr>
-                        <a:t>Noteworthy changes in your original development schedule.  If behind schedule, indicate number of months behind.</a:t>
-                      </a:r>
-                    </a:p>
-                  </a:txBody>
-                  <a:tcPr anchor="ctr">
-                    <a:solidFill>
-                      <a:srgbClr val="E7E7E7"/>
-                    </a:solidFill>
-                  </a:tcPr>
-                </a:tc>
-                <a:extLst>
-                  <a:ext uri="{0D108BD9-81ED-4DB2-BD59-A6C34878D82A}">
-                    <a16:rowId xmlns:a16="http://schemas.microsoft.com/office/drawing/2014/main" val="10002"/>
-                  </a:ext>
-                </a:extLst>
-              </a:tr>
-              <a:tr h="556259">
-                <a:tc>
-                  <a:txBody>
-                    <a:bodyPr/>
-                    <a:lstStyle/>
-                    <a:p>
-                      <a:r>
-                        <a:rPr lang="en-US" sz="800" b="1">
-                          <a:latin typeface="+mn-lt"/>
-                        </a:rPr>
-                        <a:t>Technical</a:t>
-                      </a:r>
-                    </a:p>
-                  </a:txBody>
-                  <a:tcPr anchor="ctr"/>
-                </a:tc>
-                <a:tc>
-                  <a:txBody>
-                    <a:bodyPr/>
-                    <a:lstStyle/>
-                    <a:p>
-                      <a:pPr algn="ctr"/>
-                      <a:r>
-                        <a:rPr lang="en-US" sz="800">
-                          <a:latin typeface="+mn-lt"/>
-                        </a:rPr>
-                        <a:t>G</a:t>
-                      </a:r>
-                    </a:p>
-                  </a:txBody>
-                  <a:tcPr anchor="ctr">
-                    <a:solidFill>
-                      <a:srgbClr val="00B050"/>
-                    </a:solidFill>
-                  </a:tcPr>
-                </a:tc>
-                <a:tc>
-                  <a:txBody>
-                    <a:bodyPr/>
-                    <a:lstStyle/>
-                    <a:p>
-                      <a:pPr algn="ctr"/>
-                      <a:r>
-                        <a:rPr lang="en-US" sz="800">
-                          <a:latin typeface="+mn-lt"/>
-                        </a:rPr>
-                        <a:t>G</a:t>
-                      </a:r>
-                    </a:p>
-                  </a:txBody>
-                  <a:tcPr anchor="ctr">
-                    <a:solidFill>
-                      <a:srgbClr val="00B050"/>
-                    </a:solidFill>
-                  </a:tcPr>
-                </a:tc>
-                <a:tc>
-                  <a:txBody>
-                    <a:bodyPr/>
-                    <a:lstStyle/>
-                    <a:p>
-                      <a:pPr marL="0" marR="0" lvl="0" indent="0" algn="l" defTabSz="914400" rtl="0" eaLnBrk="1" fontAlgn="auto" latinLnBrk="0" hangingPunct="1">
-                        <a:lnSpc>
-                          <a:spcPct val="100000"/>
-                        </a:lnSpc>
-                        <a:spcBef>
-                          <a:spcPts val="0"/>
-                        </a:spcBef>
-                        <a:spcAft>
-                          <a:spcPts val="0"/>
-                        </a:spcAft>
-                        <a:buClrTx/>
-                        <a:buSzTx/>
-                        <a:buFontTx/>
-                        <a:buNone/>
-                        <a:tabLst/>
-                        <a:defRPr/>
-                      </a:pPr>
-                      <a:r>
-                        <a:rPr lang="en-US" sz="900" baseline="0">
-                          <a:latin typeface="+mn-lt"/>
-                        </a:rPr>
-                        <a:t>Summary of technical accomplishments or setbacks experienced since last report.</a:t>
-                      </a:r>
-                    </a:p>
-                  </a:txBody>
-                  <a:tcPr anchor="ctr">
-                    <a:solidFill>
-                      <a:srgbClr val="CBCBCB"/>
-                    </a:solidFill>
-                  </a:tcPr>
-                </a:tc>
-                <a:extLst>
-                  <a:ext uri="{0D108BD9-81ED-4DB2-BD59-A6C34878D82A}">
-                    <a16:rowId xmlns:a16="http://schemas.microsoft.com/office/drawing/2014/main" val="10003"/>
-                  </a:ext>
-                </a:extLst>
-              </a:tr>
-              <a:tr h="550017">
-                <a:tc>
-                  <a:txBody>
-                    <a:bodyPr/>
-                    <a:lstStyle/>
-                    <a:p>
-                      <a:r>
-                        <a:rPr lang="en-US" sz="800" b="1">
-                          <a:latin typeface="+mn-lt"/>
-                        </a:rPr>
-                        <a:t>Staffing</a:t>
-                      </a:r>
-                    </a:p>
-                  </a:txBody>
-                  <a:tcPr anchor="ctr"/>
-                </a:tc>
-                <a:tc>
-                  <a:txBody>
-                    <a:bodyPr/>
-                    <a:lstStyle/>
-                    <a:p>
-                      <a:pPr algn="ctr"/>
-                      <a:r>
-                        <a:rPr lang="en-US" sz="800">
-                          <a:latin typeface="+mn-lt"/>
-                        </a:rPr>
-                        <a:t>G</a:t>
-                      </a:r>
-                    </a:p>
-                  </a:txBody>
-                  <a:tcPr anchor="ctr">
-                    <a:solidFill>
-                      <a:srgbClr val="00B050"/>
-                    </a:solidFill>
-                  </a:tcPr>
-                </a:tc>
-                <a:tc>
-                  <a:txBody>
-                    <a:bodyPr/>
-                    <a:lstStyle/>
-                    <a:p>
-                      <a:pPr algn="ctr"/>
-                      <a:r>
-                        <a:rPr lang="en-US" sz="800">
-                          <a:latin typeface="+mn-lt"/>
-                        </a:rPr>
-                        <a:t>G</a:t>
-                      </a:r>
-                    </a:p>
-                  </a:txBody>
-                  <a:tcPr anchor="ctr">
-                    <a:solidFill>
-                      <a:srgbClr val="00B050"/>
-                    </a:solidFill>
-                  </a:tcPr>
-                </a:tc>
-                <a:tc>
-                  <a:txBody>
-                    <a:bodyPr/>
-                    <a:lstStyle/>
-                    <a:p>
-                      <a:pPr marL="0" marR="0" lvl="0" indent="0" algn="l" defTabSz="914400" rtl="0" eaLnBrk="1" fontAlgn="auto" latinLnBrk="0" hangingPunct="1">
-                        <a:lnSpc>
-                          <a:spcPct val="100000"/>
-                        </a:lnSpc>
-                        <a:spcBef>
-                          <a:spcPts val="0"/>
-                        </a:spcBef>
-                        <a:spcAft>
-                          <a:spcPts val="0"/>
-                        </a:spcAft>
-                        <a:buClrTx/>
-                        <a:buSzTx/>
-                        <a:buFontTx/>
-                        <a:buNone/>
-                        <a:tabLst/>
-                        <a:defRPr/>
-                      </a:pPr>
-                      <a:r>
-                        <a:rPr lang="en-US" sz="900">
-                          <a:latin typeface="+mn-lt"/>
-                        </a:rPr>
-                        <a:t>Noteworthy developments with PI, Co-I or other personnel working on award during this period.</a:t>
-                      </a:r>
-                    </a:p>
-                  </a:txBody>
-                  <a:tcPr anchor="ctr">
-                    <a:solidFill>
-                      <a:srgbClr val="E7E7E7"/>
-                    </a:solidFill>
-                  </a:tcPr>
-                </a:tc>
-                <a:extLst>
-                  <a:ext uri="{0D108BD9-81ED-4DB2-BD59-A6C34878D82A}">
-                    <a16:rowId xmlns:a16="http://schemas.microsoft.com/office/drawing/2014/main" val="10004"/>
-                  </a:ext>
-                </a:extLst>
-              </a:tr>
-              <a:tr h="550017">
-                <a:tc>
-                  <a:txBody>
-                    <a:bodyPr/>
-                    <a:lstStyle/>
-                    <a:p>
-                      <a:r>
-                        <a:rPr lang="en-US" sz="800" b="1">
-                          <a:latin typeface="+mn-lt"/>
-                        </a:rPr>
-                        <a:t>Facilities</a:t>
-                      </a:r>
-                    </a:p>
-                  </a:txBody>
-                  <a:tcPr anchor="ctr"/>
-                </a:tc>
-                <a:tc>
-                  <a:txBody>
-                    <a:bodyPr/>
-                    <a:lstStyle/>
-                    <a:p>
-                      <a:pPr algn="ctr"/>
-                      <a:r>
-                        <a:rPr lang="en-US" sz="800">
-                          <a:latin typeface="+mn-lt"/>
-                        </a:rPr>
-                        <a:t>G</a:t>
-                      </a:r>
-                    </a:p>
-                  </a:txBody>
-                  <a:tcPr anchor="ctr">
-                    <a:solidFill>
-                      <a:srgbClr val="00B050"/>
-                    </a:solidFill>
-                  </a:tcPr>
-                </a:tc>
-                <a:tc>
-                  <a:txBody>
-                    <a:bodyPr/>
-                    <a:lstStyle/>
-                    <a:p>
-                      <a:pPr algn="ctr"/>
-                      <a:r>
-                        <a:rPr lang="en-US" sz="800">
-                          <a:latin typeface="+mn-lt"/>
-                        </a:rPr>
-                        <a:t>G</a:t>
-                      </a:r>
-                    </a:p>
-                  </a:txBody>
-                  <a:tcPr anchor="ctr">
-                    <a:solidFill>
-                      <a:srgbClr val="00B050"/>
-                    </a:solidFill>
-                  </a:tcPr>
-                </a:tc>
-                <a:tc>
-                  <a:txBody>
-                    <a:bodyPr/>
-                    <a:lstStyle/>
-                    <a:p>
-                      <a:pPr marL="0" marR="0" lvl="0" indent="0" algn="l" defTabSz="914400" rtl="0" eaLnBrk="1" fontAlgn="auto" latinLnBrk="0" hangingPunct="1">
-                        <a:lnSpc>
-                          <a:spcPct val="100000"/>
-                        </a:lnSpc>
-                        <a:spcBef>
-                          <a:spcPts val="0"/>
-                        </a:spcBef>
-                        <a:spcAft>
-                          <a:spcPts val="0"/>
-                        </a:spcAft>
-                        <a:buClrTx/>
-                        <a:buSzTx/>
-                        <a:buFontTx/>
-                        <a:buNone/>
-                        <a:tabLst/>
-                        <a:defRPr/>
-                      </a:pPr>
-                      <a:r>
-                        <a:rPr lang="en-US" sz="900" baseline="0">
-                          <a:latin typeface="+mn-lt"/>
-                        </a:rPr>
-                        <a:t>Summary of any facility or lab related developments.</a:t>
-                      </a:r>
-                    </a:p>
-                  </a:txBody>
-                  <a:tcPr anchor="ctr">
-                    <a:solidFill>
-                      <a:srgbClr val="CBCBCB"/>
-                    </a:solidFill>
-                  </a:tcPr>
-                </a:tc>
-                <a:extLst>
-                  <a:ext uri="{0D108BD9-81ED-4DB2-BD59-A6C34878D82A}">
-                    <a16:rowId xmlns:a16="http://schemas.microsoft.com/office/drawing/2014/main" val="10005"/>
-                  </a:ext>
-                </a:extLst>
-              </a:tr>
-            </a:tbl>
-          </a:graphicData>
-        </a:graphic>
-      </p:graphicFrame>
       <p:sp>
         <p:nvSpPr>
           <p:cNvPr id="14" name="Rectangle 13">
@@ -29624,14 +29211,14 @@
           <p:nvPr>
             <p:extLst>
               <p:ext uri="{D42A27DB-BD31-4B8C-83A1-F6EECF244321}">
-                <p14:modId xmlns:p14="http://schemas.microsoft.com/office/powerpoint/2010/main" val="1681223349"/>
+                <p14:modId xmlns:p14="http://schemas.microsoft.com/office/powerpoint/2010/main" val="1250846711"/>
               </p:ext>
             </p:extLst>
           </p:nvPr>
         </p:nvGraphicFramePr>
         <p:xfrm>
-          <a:off x="317889" y="1402453"/>
-          <a:ext cx="5831398" cy="888200"/>
+          <a:off x="325147" y="1439702"/>
+          <a:ext cx="5831398" cy="3522400"/>
         </p:xfrm>
         <a:graphic>
           <a:graphicData uri="http://schemas.openxmlformats.org/drawingml/2006/table">
@@ -29647,21 +29234,21 @@
                     </a:ext>
                   </a:extLst>
                 </a:gridCol>
-                <a:gridCol w="441550">
+                <a:gridCol w="482343">
                   <a:extLst>
                     <a:ext uri="{9D8B030D-6E8A-4147-A177-3AD203B41FA5}">
                       <a16:colId xmlns:a16="http://schemas.microsoft.com/office/drawing/2014/main" val="3687347352"/>
                     </a:ext>
                   </a:extLst>
                 </a:gridCol>
-                <a:gridCol w="508576">
+                <a:gridCol w="546100">
                   <a:extLst>
                     <a:ext uri="{9D8B030D-6E8A-4147-A177-3AD203B41FA5}">
                       <a16:colId xmlns:a16="http://schemas.microsoft.com/office/drawing/2014/main" val="3476331583"/>
                     </a:ext>
                   </a:extLst>
                 </a:gridCol>
-                <a:gridCol w="4082212">
+                <a:gridCol w="4003895">
                   <a:extLst>
                     <a:ext uri="{9D8B030D-6E8A-4147-A177-3AD203B41FA5}">
                       <a16:colId xmlns:a16="http://schemas.microsoft.com/office/drawing/2014/main" val="20004"/>
@@ -29690,7 +29277,7 @@
                     <a:p>
                       <a:pPr algn="ctr"/>
                       <a:r>
-                        <a:rPr lang="en-US" sz="650">
+                        <a:rPr lang="en-US" sz="650" dirty="0">
                           <a:latin typeface="+mn-lt"/>
                         </a:rPr>
                         <a:t>Prior</a:t>
@@ -29722,7 +29309,7 @@
                     <a:p>
                       <a:pPr algn="ctr"/>
                       <a:r>
-                        <a:rPr lang="en-US" sz="1050">
+                        <a:rPr lang="en-US" sz="1050" dirty="0">
                           <a:latin typeface="+mn-lt"/>
                         </a:rPr>
                         <a:t>Rationale/Status</a:t>
@@ -29744,14 +29331,18 @@
                     <a:lstStyle/>
                     <a:p>
                       <a:r>
-                        <a:rPr lang="en-US" sz="800" b="1">
+                        <a:rPr lang="en-US" sz="800" b="1" dirty="0">
                           <a:latin typeface="+mn-lt"/>
                         </a:rPr>
                         <a:t>Overall</a:t>
                       </a:r>
                     </a:p>
                   </a:txBody>
-                  <a:tcPr anchor="ctr"/>
+                  <a:tcPr anchor="ctr">
+                    <a:solidFill>
+                      <a:schemeClr val="bg2"/>
+                    </a:solidFill>
+                  </a:tcPr>
                 </a:tc>
                 <a:tc>
                   <a:txBody>
@@ -29811,7 +29402,7 @@
                         <a:buNone/>
                       </a:pPr>
                       <a:r>
-                        <a:rPr lang="en-US" sz="900" b="0" i="0" u="none" strike="noStrike" baseline="0" noProof="0">
+                        <a:rPr lang="en-US" sz="900" b="0" i="0" u="none" strike="noStrike" baseline="0" noProof="0" dirty="0">
                           <a:latin typeface="+mn-lt"/>
                         </a:rPr>
                         <a:t>Overall assessment of progress or lack thereof during the quarter.</a:t>
@@ -29827,6 +29418,531 @@
                 <a:extLst>
                   <a:ext uri="{0D108BD9-81ED-4DB2-BD59-A6C34878D82A}">
                     <a16:rowId xmlns:a16="http://schemas.microsoft.com/office/drawing/2014/main" val="10006"/>
+                  </a:ext>
+                </a:extLst>
+              </a:tr>
+              <a:tr h="526840">
+                <a:tc>
+                  <a:txBody>
+                    <a:bodyPr/>
+                    <a:lstStyle/>
+                    <a:p>
+                      <a:r>
+                        <a:rPr lang="en-US" sz="800" b="1" dirty="0">
+                          <a:latin typeface="+mn-lt"/>
+                        </a:rPr>
+                        <a:t>Cost</a:t>
+                      </a:r>
+                    </a:p>
+                  </a:txBody>
+                  <a:tcPr anchor="ctr">
+                    <a:solidFill>
+                      <a:schemeClr val="bg2">
+                        <a:lumMod val="90000"/>
+                      </a:schemeClr>
+                    </a:solidFill>
+                  </a:tcPr>
+                </a:tc>
+                <a:tc>
+                  <a:txBody>
+                    <a:bodyPr/>
+                    <a:lstStyle/>
+                    <a:p>
+                      <a:pPr algn="ctr"/>
+                      <a:r>
+                        <a:rPr lang="en-US" sz="800" dirty="0">
+                          <a:latin typeface="+mn-lt"/>
+                        </a:rPr>
+                        <a:t>Y</a:t>
+                      </a:r>
+                    </a:p>
+                  </a:txBody>
+                  <a:tcPr anchor="ctr">
+                    <a:solidFill>
+                      <a:srgbClr val="FFFF00"/>
+                    </a:solidFill>
+                  </a:tcPr>
+                </a:tc>
+                <a:tc>
+                  <a:txBody>
+                    <a:bodyPr/>
+                    <a:lstStyle/>
+                    <a:p>
+                      <a:pPr algn="ctr"/>
+                      <a:r>
+                        <a:rPr lang="en-US" sz="800" dirty="0">
+                          <a:latin typeface="+mn-lt"/>
+                        </a:rPr>
+                        <a:t>Y</a:t>
+                      </a:r>
+                    </a:p>
+                  </a:txBody>
+                  <a:tcPr anchor="ctr">
+                    <a:solidFill>
+                      <a:srgbClr val="FFFF00"/>
+                    </a:solidFill>
+                  </a:tcPr>
+                </a:tc>
+                <a:tc>
+                  <a:txBody>
+                    <a:bodyPr/>
+                    <a:lstStyle/>
+                    <a:p>
+                      <a:pPr marL="0" marR="0" lvl="0" indent="0" algn="l" defTabSz="914400" rtl="0" eaLnBrk="1" fontAlgn="auto" latinLnBrk="0" hangingPunct="1">
+                        <a:lnSpc>
+                          <a:spcPct val="100000"/>
+                        </a:lnSpc>
+                        <a:spcBef>
+                          <a:spcPts val="0"/>
+                        </a:spcBef>
+                        <a:spcAft>
+                          <a:spcPts val="0"/>
+                        </a:spcAft>
+                        <a:buClrTx/>
+                        <a:buSzTx/>
+                        <a:buFontTx/>
+                        <a:buNone/>
+                        <a:tabLst/>
+                        <a:defRPr/>
+                      </a:pPr>
+                      <a:r>
+                        <a:rPr lang="en-US" sz="900" baseline="0" dirty="0">
+                          <a:solidFill>
+                            <a:schemeClr val="tx1"/>
+                          </a:solidFill>
+                          <a:latin typeface="+mn-lt"/>
+                        </a:rPr>
+                        <a:t>Discuss any issues with spending your funding, needs for augmentation, etc.</a:t>
+                      </a:r>
+                    </a:p>
+                  </a:txBody>
+                  <a:tcPr anchor="ctr">
+                    <a:solidFill>
+                      <a:schemeClr val="bg2">
+                        <a:lumMod val="90000"/>
+                      </a:schemeClr>
+                    </a:solidFill>
+                  </a:tcPr>
+                </a:tc>
+                <a:extLst>
+                  <a:ext uri="{0D108BD9-81ED-4DB2-BD59-A6C34878D82A}">
+                    <a16:rowId xmlns:a16="http://schemas.microsoft.com/office/drawing/2014/main" val="2343057346"/>
+                  </a:ext>
+                </a:extLst>
+              </a:tr>
+              <a:tr h="526840">
+                <a:tc>
+                  <a:txBody>
+                    <a:bodyPr/>
+                    <a:lstStyle/>
+                    <a:p>
+                      <a:r>
+                        <a:rPr lang="en-US" sz="800" b="1" dirty="0">
+                          <a:latin typeface="+mn-lt"/>
+                        </a:rPr>
+                        <a:t>Schedule</a:t>
+                      </a:r>
+                    </a:p>
+                  </a:txBody>
+                  <a:tcPr anchor="ctr">
+                    <a:solidFill>
+                      <a:schemeClr val="bg2"/>
+                    </a:solidFill>
+                  </a:tcPr>
+                </a:tc>
+                <a:tc>
+                  <a:txBody>
+                    <a:bodyPr/>
+                    <a:lstStyle/>
+                    <a:p>
+                      <a:pPr algn="ctr"/>
+                      <a:r>
+                        <a:rPr lang="en-US" sz="800" dirty="0">
+                          <a:latin typeface="+mn-lt"/>
+                        </a:rPr>
+                        <a:t>G</a:t>
+                      </a:r>
+                    </a:p>
+                  </a:txBody>
+                  <a:tcPr anchor="ctr">
+                    <a:solidFill>
+                      <a:srgbClr val="00B050"/>
+                    </a:solidFill>
+                  </a:tcPr>
+                </a:tc>
+                <a:tc>
+                  <a:txBody>
+                    <a:bodyPr/>
+                    <a:lstStyle/>
+                    <a:p>
+                      <a:pPr algn="ctr"/>
+                      <a:r>
+                        <a:rPr lang="en-US" sz="800" dirty="0">
+                          <a:latin typeface="+mn-lt"/>
+                        </a:rPr>
+                        <a:t>G</a:t>
+                      </a:r>
+                    </a:p>
+                  </a:txBody>
+                  <a:tcPr anchor="ctr">
+                    <a:solidFill>
+                      <a:srgbClr val="00B050"/>
+                    </a:solidFill>
+                  </a:tcPr>
+                </a:tc>
+                <a:tc>
+                  <a:txBody>
+                    <a:bodyPr/>
+                    <a:lstStyle/>
+                    <a:p>
+                      <a:pPr marL="0" marR="0" lvl="0" indent="0" algn="l" defTabSz="914400" rtl="0" eaLnBrk="1" fontAlgn="auto" latinLnBrk="0" hangingPunct="1">
+                        <a:lnSpc>
+                          <a:spcPct val="100000"/>
+                        </a:lnSpc>
+                        <a:spcBef>
+                          <a:spcPts val="0"/>
+                        </a:spcBef>
+                        <a:spcAft>
+                          <a:spcPts val="0"/>
+                        </a:spcAft>
+                        <a:buClrTx/>
+                        <a:buSzTx/>
+                        <a:buFontTx/>
+                        <a:buNone/>
+                        <a:tabLst/>
+                        <a:defRPr/>
+                      </a:pPr>
+                      <a:r>
+                        <a:rPr lang="en-US" sz="900" baseline="0" dirty="0">
+                          <a:latin typeface="+mn-lt"/>
+                        </a:rPr>
+                        <a:t>Noteworthy changes in your original development schedule.  If behind schedule, indicate number of months behind.</a:t>
+                      </a:r>
+                    </a:p>
+                  </a:txBody>
+                  <a:tcPr anchor="ctr">
+                    <a:solidFill>
+                      <a:srgbClr val="E7E7E7"/>
+                    </a:solidFill>
+                  </a:tcPr>
+                </a:tc>
+                <a:extLst>
+                  <a:ext uri="{0D108BD9-81ED-4DB2-BD59-A6C34878D82A}">
+                    <a16:rowId xmlns:a16="http://schemas.microsoft.com/office/drawing/2014/main" val="3036841174"/>
+                  </a:ext>
+                </a:extLst>
+              </a:tr>
+              <a:tr h="526840">
+                <a:tc>
+                  <a:txBody>
+                    <a:bodyPr/>
+                    <a:lstStyle/>
+                    <a:p>
+                      <a:r>
+                        <a:rPr lang="en-US" sz="800" b="1" dirty="0">
+                          <a:latin typeface="+mn-lt"/>
+                        </a:rPr>
+                        <a:t>Technical</a:t>
+                      </a:r>
+                    </a:p>
+                  </a:txBody>
+                  <a:tcPr anchor="ctr">
+                    <a:solidFill>
+                      <a:schemeClr val="bg2">
+                        <a:lumMod val="90000"/>
+                      </a:schemeClr>
+                    </a:solidFill>
+                  </a:tcPr>
+                </a:tc>
+                <a:tc>
+                  <a:txBody>
+                    <a:bodyPr/>
+                    <a:lstStyle/>
+                    <a:p>
+                      <a:pPr algn="ctr"/>
+                      <a:r>
+                        <a:rPr lang="en-US" sz="800" dirty="0">
+                          <a:latin typeface="+mn-lt"/>
+                        </a:rPr>
+                        <a:t>G</a:t>
+                      </a:r>
+                    </a:p>
+                  </a:txBody>
+                  <a:tcPr anchor="ctr">
+                    <a:solidFill>
+                      <a:srgbClr val="00B050"/>
+                    </a:solidFill>
+                  </a:tcPr>
+                </a:tc>
+                <a:tc>
+                  <a:txBody>
+                    <a:bodyPr/>
+                    <a:lstStyle/>
+                    <a:p>
+                      <a:pPr algn="ctr"/>
+                      <a:r>
+                        <a:rPr lang="en-US" sz="800" dirty="0">
+                          <a:latin typeface="+mn-lt"/>
+                        </a:rPr>
+                        <a:t>G</a:t>
+                      </a:r>
+                    </a:p>
+                  </a:txBody>
+                  <a:tcPr anchor="ctr">
+                    <a:solidFill>
+                      <a:srgbClr val="00B050"/>
+                    </a:solidFill>
+                  </a:tcPr>
+                </a:tc>
+                <a:tc>
+                  <a:txBody>
+                    <a:bodyPr/>
+                    <a:lstStyle/>
+                    <a:p>
+                      <a:pPr marL="0" marR="0" lvl="0" indent="0" algn="l" defTabSz="914400" rtl="0" eaLnBrk="1" fontAlgn="auto" latinLnBrk="0" hangingPunct="1">
+                        <a:lnSpc>
+                          <a:spcPct val="100000"/>
+                        </a:lnSpc>
+                        <a:spcBef>
+                          <a:spcPts val="0"/>
+                        </a:spcBef>
+                        <a:spcAft>
+                          <a:spcPts val="0"/>
+                        </a:spcAft>
+                        <a:buClrTx/>
+                        <a:buSzTx/>
+                        <a:buFontTx/>
+                        <a:buNone/>
+                        <a:tabLst/>
+                        <a:defRPr/>
+                      </a:pPr>
+                      <a:r>
+                        <a:rPr lang="en-US" sz="900" baseline="0" dirty="0">
+                          <a:latin typeface="+mn-lt"/>
+                        </a:rPr>
+                        <a:t>Summary of technical accomplishments or setbacks experienced since last report.</a:t>
+                      </a:r>
+                    </a:p>
+                  </a:txBody>
+                  <a:tcPr anchor="ctr">
+                    <a:solidFill>
+                      <a:schemeClr val="bg2">
+                        <a:lumMod val="90000"/>
+                      </a:schemeClr>
+                    </a:solidFill>
+                  </a:tcPr>
+                </a:tc>
+                <a:extLst>
+                  <a:ext uri="{0D108BD9-81ED-4DB2-BD59-A6C34878D82A}">
+                    <a16:rowId xmlns:a16="http://schemas.microsoft.com/office/drawing/2014/main" val="1829007059"/>
+                  </a:ext>
+                </a:extLst>
+              </a:tr>
+              <a:tr h="526840">
+                <a:tc>
+                  <a:txBody>
+                    <a:bodyPr/>
+                    <a:lstStyle/>
+                    <a:p>
+                      <a:r>
+                        <a:rPr lang="en-US" sz="800" b="1" dirty="0">
+                          <a:latin typeface="+mn-lt"/>
+                        </a:rPr>
+                        <a:t>Staffing</a:t>
+                      </a:r>
+                    </a:p>
+                  </a:txBody>
+                  <a:tcPr anchor="ctr">
+                    <a:solidFill>
+                      <a:schemeClr val="bg2"/>
+                    </a:solidFill>
+                  </a:tcPr>
+                </a:tc>
+                <a:tc>
+                  <a:txBody>
+                    <a:bodyPr/>
+                    <a:lstStyle/>
+                    <a:p>
+                      <a:pPr algn="ctr"/>
+                      <a:r>
+                        <a:rPr lang="en-US" sz="800" dirty="0">
+                          <a:latin typeface="+mn-lt"/>
+                        </a:rPr>
+                        <a:t>G</a:t>
+                      </a:r>
+                    </a:p>
+                  </a:txBody>
+                  <a:tcPr anchor="ctr">
+                    <a:solidFill>
+                      <a:srgbClr val="00B050"/>
+                    </a:solidFill>
+                  </a:tcPr>
+                </a:tc>
+                <a:tc>
+                  <a:txBody>
+                    <a:bodyPr/>
+                    <a:lstStyle/>
+                    <a:p>
+                      <a:pPr algn="ctr"/>
+                      <a:r>
+                        <a:rPr lang="en-US" sz="800" dirty="0">
+                          <a:latin typeface="+mn-lt"/>
+                        </a:rPr>
+                        <a:t>G</a:t>
+                      </a:r>
+                    </a:p>
+                  </a:txBody>
+                  <a:tcPr anchor="ctr">
+                    <a:solidFill>
+                      <a:srgbClr val="00B050"/>
+                    </a:solidFill>
+                  </a:tcPr>
+                </a:tc>
+                <a:tc>
+                  <a:txBody>
+                    <a:bodyPr/>
+                    <a:lstStyle/>
+                    <a:p>
+                      <a:pPr marL="0" marR="0" lvl="0" indent="0" algn="l" defTabSz="914400" rtl="0" eaLnBrk="1" fontAlgn="auto" latinLnBrk="0" hangingPunct="1">
+                        <a:lnSpc>
+                          <a:spcPct val="100000"/>
+                        </a:lnSpc>
+                        <a:spcBef>
+                          <a:spcPts val="0"/>
+                        </a:spcBef>
+                        <a:spcAft>
+                          <a:spcPts val="0"/>
+                        </a:spcAft>
+                        <a:buClrTx/>
+                        <a:buSzTx/>
+                        <a:buFontTx/>
+                        <a:buNone/>
+                        <a:tabLst/>
+                        <a:defRPr/>
+                      </a:pPr>
+                      <a:r>
+                        <a:rPr lang="en-US" sz="900" dirty="0">
+                          <a:latin typeface="+mn-lt"/>
+                        </a:rPr>
+                        <a:t>Noteworthy developments with PI, Co-I or other personnel working on award during this period.</a:t>
+                      </a:r>
+                    </a:p>
+                  </a:txBody>
+                  <a:tcPr anchor="ctr">
+                    <a:solidFill>
+                      <a:srgbClr val="E7E7E7"/>
+                    </a:solidFill>
+                  </a:tcPr>
+                </a:tc>
+                <a:extLst>
+                  <a:ext uri="{0D108BD9-81ED-4DB2-BD59-A6C34878D82A}">
+                    <a16:rowId xmlns:a16="http://schemas.microsoft.com/office/drawing/2014/main" val="3409510594"/>
+                  </a:ext>
+                </a:extLst>
+              </a:tr>
+              <a:tr h="526840">
+                <a:tc>
+                  <a:txBody>
+                    <a:bodyPr/>
+                    <a:lstStyle/>
+                    <a:p>
+                      <a:r>
+                        <a:rPr lang="en-US" sz="800" b="1" dirty="0">
+                          <a:latin typeface="+mn-lt"/>
+                        </a:rPr>
+                        <a:t>Facilities</a:t>
+                      </a:r>
+                    </a:p>
+                  </a:txBody>
+                  <a:tcPr anchor="ctr">
+                    <a:solidFill>
+                      <a:schemeClr val="bg2">
+                        <a:lumMod val="90000"/>
+                      </a:schemeClr>
+                    </a:solidFill>
+                  </a:tcPr>
+                </a:tc>
+                <a:tc>
+                  <a:txBody>
+                    <a:bodyPr/>
+                    <a:lstStyle/>
+                    <a:p>
+                      <a:pPr algn="ctr"/>
+                      <a:r>
+                        <a:rPr lang="en-US" sz="800" dirty="0">
+                          <a:latin typeface="+mn-lt"/>
+                        </a:rPr>
+                        <a:t>G</a:t>
+                      </a:r>
+                    </a:p>
+                  </a:txBody>
+                  <a:tcPr anchor="ctr">
+                    <a:solidFill>
+                      <a:srgbClr val="00B050"/>
+                    </a:solidFill>
+                  </a:tcPr>
+                </a:tc>
+                <a:tc>
+                  <a:txBody>
+                    <a:bodyPr/>
+                    <a:lstStyle/>
+                    <a:p>
+                      <a:pPr algn="ctr"/>
+                      <a:r>
+                        <a:rPr lang="en-US" sz="800" dirty="0">
+                          <a:latin typeface="+mn-lt"/>
+                        </a:rPr>
+                        <a:t>G</a:t>
+                      </a:r>
+                    </a:p>
+                  </a:txBody>
+                  <a:tcPr anchor="ctr">
+                    <a:solidFill>
+                      <a:srgbClr val="00B050"/>
+                    </a:solidFill>
+                  </a:tcPr>
+                </a:tc>
+                <a:tc>
+                  <a:txBody>
+                    <a:bodyPr/>
+                    <a:lstStyle/>
+                    <a:p>
+                      <a:pPr marL="0" marR="0" lvl="0" indent="0" algn="l" defTabSz="914400" rtl="0" eaLnBrk="1" fontAlgn="auto" latinLnBrk="0" hangingPunct="1">
+                        <a:lnSpc>
+                          <a:spcPct val="100000"/>
+                        </a:lnSpc>
+                        <a:spcBef>
+                          <a:spcPts val="0"/>
+                        </a:spcBef>
+                        <a:spcAft>
+                          <a:spcPts val="0"/>
+                        </a:spcAft>
+                        <a:buClrTx/>
+                        <a:buSzTx/>
+                        <a:buFontTx/>
+                        <a:buNone/>
+                        <a:tabLst/>
+                        <a:defRPr/>
+                      </a:pPr>
+                      <a:r>
+                        <a:rPr lang="en-US" sz="900" baseline="0" dirty="0">
+                          <a:latin typeface="+mn-lt"/>
+                        </a:rPr>
+                        <a:t>Summary of any facility or lab related developments.</a:t>
+                      </a:r>
+                    </a:p>
+                  </a:txBody>
+                  <a:tcPr anchor="ctr">
+                    <a:solidFill>
+                      <a:schemeClr val="bg2">
+                        <a:lumMod val="90000"/>
+                      </a:schemeClr>
+                    </a:solidFill>
+                  </a:tcPr>
+                </a:tc>
+                <a:extLst>
+                  <a:ext uri="{0D108BD9-81ED-4DB2-BD59-A6C34878D82A}">
+                    <a16:rowId xmlns:a16="http://schemas.microsoft.com/office/drawing/2014/main" val="31390217"/>
                   </a:ext>
                 </a:extLst>
               </a:tr>
@@ -30520,6 +30636,17 @@
 </file>
 
 <file path=customXml/item1.xml><?xml version="1.0" encoding="utf-8"?>
+<p:properties xmlns:p="http://schemas.microsoft.com/office/2006/metadata/properties" xmlns:xsi="http://www.w3.org/2001/XMLSchema-instance" xmlns:pc="http://schemas.microsoft.com/office/infopath/2007/PartnerControls">
+  <documentManagement>
+    <TaxCatchAll xmlns="e55529d0-f9ab-4d76-83cf-d2c669657f14" xsi:nil="true"/>
+    <lcf76f155ced4ddcb4097134ff3c332f xmlns="fd0ef206-3d28-4dbb-86dc-478ae1bbb31e">
+      <Terms xmlns="http://schemas.microsoft.com/office/infopath/2007/PartnerControls"/>
+    </lcf76f155ced4ddcb4097134ff3c332f>
+  </documentManagement>
+</p:properties>
+</file>
+
+<file path=customXml/item2.xml><?xml version="1.0" encoding="utf-8"?>
 <ct:contentTypeSchema xmlns:ct="http://schemas.microsoft.com/office/2006/metadata/contentType" xmlns:ma="http://schemas.microsoft.com/office/2006/metadata/properties/metaAttributes" ct:_="" ma:_="" ma:contentTypeName="Document" ma:contentTypeID="0x010100347D11A2116275438DBF1D77FCA14A41" ma:contentTypeVersion="14" ma:contentTypeDescription="Create a new document." ma:contentTypeScope="" ma:versionID="3c9b8c0f804e745218d2397220f8057e">
   <xsd:schema xmlns:xsd="http://www.w3.org/2001/XMLSchema" xmlns:xs="http://www.w3.org/2001/XMLSchema" xmlns:p="http://schemas.microsoft.com/office/2006/metadata/properties" xmlns:ns2="fd0ef206-3d28-4dbb-86dc-478ae1bbb31e" xmlns:ns3="e55529d0-f9ab-4d76-83cf-d2c669657f14" targetNamespace="http://schemas.microsoft.com/office/2006/metadata/properties" ma:root="true" ma:fieldsID="e0f4635cad6e258c1d85aa79c4e643f6" ns2:_="" ns3:_="">
     <xsd:import namespace="fd0ef206-3d28-4dbb-86dc-478ae1bbb31e"/>
@@ -30748,17 +30875,6 @@
 </ct:contentTypeSchema>
 </file>
 
-<file path=customXml/item2.xml><?xml version="1.0" encoding="utf-8"?>
-<p:properties xmlns:p="http://schemas.microsoft.com/office/2006/metadata/properties" xmlns:xsi="http://www.w3.org/2001/XMLSchema-instance" xmlns:pc="http://schemas.microsoft.com/office/infopath/2007/PartnerControls">
-  <documentManagement>
-    <TaxCatchAll xmlns="e55529d0-f9ab-4d76-83cf-d2c669657f14" xsi:nil="true"/>
-    <lcf76f155ced4ddcb4097134ff3c332f xmlns="fd0ef206-3d28-4dbb-86dc-478ae1bbb31e">
-      <Terms xmlns="http://schemas.microsoft.com/office/infopath/2007/PartnerControls"/>
-    </lcf76f155ced4ddcb4097134ff3c332f>
-  </documentManagement>
-</p:properties>
-</file>
-
 <file path=customXml/item3.xml><?xml version="1.0" encoding="utf-8"?>
 <?mso-contentType ?>
 <FormTemplates xmlns="http://schemas.microsoft.com/sharepoint/v3/contenttype/forms">
@@ -30769,6 +30885,23 @@
 </file>
 
 <file path=customXml/itemProps1.xml><?xml version="1.0" encoding="utf-8"?>
+<ds:datastoreItem xmlns:ds="http://schemas.openxmlformats.org/officeDocument/2006/customXml" ds:itemID="{87808F7F-4667-486A-AEC1-53DCE7E9EC37}">
+  <ds:schemaRefs>
+    <ds:schemaRef ds:uri="e55529d0-f9ab-4d76-83cf-d2c669657f14"/>
+    <ds:schemaRef ds:uri="fd0ef206-3d28-4dbb-86dc-478ae1bbb31e"/>
+    <ds:schemaRef ds:uri="http://purl.org/dc/dcmitype/"/>
+    <ds:schemaRef ds:uri="http://purl.org/dc/elements/1.1/"/>
+    <ds:schemaRef ds:uri="http://purl.org/dc/terms/"/>
+    <ds:schemaRef ds:uri="http://schemas.microsoft.com/office/2006/documentManagement/types"/>
+    <ds:schemaRef ds:uri="http://schemas.microsoft.com/office/2006/metadata/properties"/>
+    <ds:schemaRef ds:uri="http://schemas.microsoft.com/office/infopath/2007/PartnerControls"/>
+    <ds:schemaRef ds:uri="http://schemas.openxmlformats.org/package/2006/metadata/core-properties"/>
+    <ds:schemaRef ds:uri="http://www.w3.org/XML/1998/namespace"/>
+  </ds:schemaRefs>
+</ds:datastoreItem>
+</file>
+
+<file path=customXml/itemProps2.xml><?xml version="1.0" encoding="utf-8"?>
 <ds:datastoreItem xmlns:ds="http://schemas.openxmlformats.org/officeDocument/2006/customXml" ds:itemID="{E8411702-9CD7-4E1E-8304-9F5EEF156DAF}">
   <ds:schemaRefs>
     <ds:schemaRef ds:uri="e55529d0-f9ab-4d76-83cf-d2c669657f14"/>
@@ -30787,23 +30920,6 @@
 </ds:datastoreItem>
 </file>
 
-<file path=customXml/itemProps2.xml><?xml version="1.0" encoding="utf-8"?>
-<ds:datastoreItem xmlns:ds="http://schemas.openxmlformats.org/officeDocument/2006/customXml" ds:itemID="{87808F7F-4667-486A-AEC1-53DCE7E9EC37}">
-  <ds:schemaRefs>
-    <ds:schemaRef ds:uri="e55529d0-f9ab-4d76-83cf-d2c669657f14"/>
-    <ds:schemaRef ds:uri="fd0ef206-3d28-4dbb-86dc-478ae1bbb31e"/>
-    <ds:schemaRef ds:uri="http://purl.org/dc/dcmitype/"/>
-    <ds:schemaRef ds:uri="http://purl.org/dc/elements/1.1/"/>
-    <ds:schemaRef ds:uri="http://purl.org/dc/terms/"/>
-    <ds:schemaRef ds:uri="http://schemas.microsoft.com/office/2006/documentManagement/types"/>
-    <ds:schemaRef ds:uri="http://schemas.microsoft.com/office/2006/metadata/properties"/>
-    <ds:schemaRef ds:uri="http://schemas.microsoft.com/office/infopath/2007/PartnerControls"/>
-    <ds:schemaRef ds:uri="http://schemas.openxmlformats.org/package/2006/metadata/core-properties"/>
-    <ds:schemaRef ds:uri="http://www.w3.org/XML/1998/namespace"/>
-  </ds:schemaRefs>
-</ds:datastoreItem>
-</file>
-
 <file path=customXml/itemProps3.xml><?xml version="1.0" encoding="utf-8"?>
 <ds:datastoreItem xmlns:ds="http://schemas.openxmlformats.org/officeDocument/2006/customXml" ds:itemID="{810599CF-E9F8-4817-AE49-989C47D652D9}">
   <ds:schemaRefs>
